--- a/docs/poster/draft_C_field.pptx
+++ b/docs/poster/draft_C_field.pptx
@@ -3339,7 +3339,7 @@
                 </a:solidFill>
                 <a:latin typeface="Arial"/>
               </a:rPr>
-              <a:t>Two ground vehicles drive our own cotton plots and a pair of agents turn what they record into trained models. This is what the machines saw, what the agents did with it, and where the path breaks.</a:t>
+              <a:t>Two ground vehicles drive our own crop plots while a pair of agents collect, filter and train on the cluster with nobody in the room. This is what the machines recorded, what the agents did, and the one link between them we have not closed.</a:t>
             </a:r>
           </a:p>
         </p:txBody>
@@ -4511,7 +4511,7 @@
                 </a:solidFill>
                 <a:latin typeface="Arial"/>
               </a:rPr>
-              <a:t>Figure 3.  The path from a camera in a crop row to a checkpoint on the cluster. Every stage is built and has run. Two are not running today: the collector and trainer are paused after a stop-loss on 2026-08-29, and the supervisor is advisory, so nothing it says is applied to the loop.</a:t>
+              <a:t>Figure 3.  The path as built, from a camera in a crop row to a checkpoint on the cluster. Every stage has run. Three qualifications ride on it. The collector and trainer are paused after a stop-loss on 2026-08-29. The supervisor is advisory and nothing it says is applied. And the last link is not closed: no robot frame has entered training, because none of them is labelled yet.</a:t>
             </a:r>
           </a:p>
         </p:txBody>
@@ -5853,7 +5853,7 @@
                 </a:solidFill>
                 <a:latin typeface="Arial"/>
               </a:rPr>
-              <a:t>Figure 6.  27 distinct models, in four families, on one holdout or one incident corpus. One of them is deployed. The zero-shot column is a single deterministic pass per model with no repeats; the reviewer column is the 149-case dev split, and two of its arms are still running.</a:t>
+              <a:t>Figure 6.  30 rows in four families, which is 27 distinct models: OWLv2-large and Qwen2.5-7B each appear twice because each does two jobs here. One model is deployed. The zero-shot column is a single deterministic pass per model with no repeats, scored as mAP50 on the 848-image split; the reviewer column is the 149-case dev split, and two of its arms are still running. RF-DETR's score is on a third scale and is never differenced against the rows above it: the one measured offset between two of our evaluators, 0.0239, is larger than the gap on display.</a:t>
             </a:r>
           </a:p>
         </p:txBody>
@@ -6125,7 +6125,7 @@
         <p:spPr>
           <a:xfrm>
             <a:off x="32552640" y="26159968"/>
-            <a:ext cx="4879238" cy="365760"/>
+            <a:ext cx="4030675" cy="365760"/>
           </a:xfrm>
           <a:prstGeom prst="rect">
             <a:avLst/>
@@ -6166,8 +6166,8 @@
         </p:nvSpPr>
         <p:spPr>
           <a:xfrm>
-            <a:off x="37431878" y="26159968"/>
-            <a:ext cx="2863900" cy="365760"/>
+            <a:off x="36583315" y="26159968"/>
+            <a:ext cx="2227478" cy="365760"/>
           </a:xfrm>
           <a:prstGeom prst="rect">
             <a:avLst/>
@@ -6208,8 +6208,8 @@
         </p:nvSpPr>
         <p:spPr>
           <a:xfrm>
-            <a:off x="40295779" y="26159968"/>
-            <a:ext cx="2863900" cy="365760"/>
+            <a:off x="38810793" y="26159968"/>
+            <a:ext cx="2227478" cy="365760"/>
           </a:xfrm>
           <a:prstGeom prst="rect">
             <a:avLst/>
@@ -6244,7 +6244,49 @@
       </p:sp>
       <p:sp>
         <p:nvSpPr>
-          <p:cNvPr id="79" name="Rectangle 78"/>
+          <p:cNvPr id="79" name="TextBox 78"/>
+          <p:cNvSpPr txBox="1"/>
+          <p:nvPr/>
+        </p:nvSpPr>
+        <p:spPr>
+          <a:xfrm>
+            <a:off x="41038272" y="26159968"/>
+            <a:ext cx="2121408" cy="365760"/>
+          </a:xfrm>
+          <a:prstGeom prst="rect">
+            <a:avLst/>
+          </a:prstGeom>
+          <a:noFill/>
+        </p:spPr>
+        <p:txBody>
+          <a:bodyPr wrap="square" lIns="0" rIns="0" tIns="0" bIns="0">
+            <a:spAutoFit/>
+          </a:bodyPr>
+          <a:lstStyle/>
+          <a:p>
+            <a:pPr algn="r">
+              <a:lnSpc>
+                <a:spcPct val="100000"/>
+              </a:lnSpc>
+              <a:spcAft>
+                <a:spcPts val="0"/>
+              </a:spcAft>
+            </a:pPr>
+            <a:r>
+              <a:rPr sz="1550" b="1">
+                <a:solidFill>
+                  <a:srgbClr val="1E293B"/>
+                </a:solidFill>
+                <a:latin typeface="Arial"/>
+              </a:rPr>
+              <a:t>incidents</a:t>
+            </a:r>
+          </a:p>
+        </p:txBody>
+      </p:sp>
+      <p:sp>
+        <p:nvSpPr>
+          <p:cNvPr id="80" name="Rectangle 79"/>
           <p:cNvSpPr/>
           <p:nvPr/>
         </p:nvSpPr>
@@ -6288,14 +6330,14 @@
       </p:sp>
       <p:sp>
         <p:nvSpPr>
-          <p:cNvPr id="80" name="TextBox 79"/>
+          <p:cNvPr id="81" name="TextBox 80"/>
           <p:cNvSpPr txBox="1"/>
           <p:nvPr/>
         </p:nvSpPr>
         <p:spPr>
           <a:xfrm>
             <a:off x="32552640" y="26635456"/>
-            <a:ext cx="4879238" cy="365760"/>
+            <a:ext cx="4030675" cy="365760"/>
           </a:xfrm>
           <a:prstGeom prst="rect">
             <a:avLst/>
@@ -6330,14 +6372,14 @@
       </p:sp>
       <p:sp>
         <p:nvSpPr>
-          <p:cNvPr id="81" name="TextBox 80"/>
-          <p:cNvSpPr txBox="1"/>
-          <p:nvPr/>
-        </p:nvSpPr>
-        <p:spPr>
-          <a:xfrm>
-            <a:off x="37431878" y="26635456"/>
-            <a:ext cx="2863900" cy="365760"/>
+          <p:cNvPr id="82" name="TextBox 81"/>
+          <p:cNvSpPr txBox="1"/>
+          <p:nvPr/>
+        </p:nvSpPr>
+        <p:spPr>
+          <a:xfrm>
+            <a:off x="36583315" y="26635456"/>
+            <a:ext cx="2227478" cy="365760"/>
           </a:xfrm>
           <a:prstGeom prst="rect">
             <a:avLst/>
@@ -6372,14 +6414,14 @@
       </p:sp>
       <p:sp>
         <p:nvSpPr>
-          <p:cNvPr id="82" name="TextBox 81"/>
-          <p:cNvSpPr txBox="1"/>
-          <p:nvPr/>
-        </p:nvSpPr>
-        <p:spPr>
-          <a:xfrm>
-            <a:off x="40295779" y="26635456"/>
-            <a:ext cx="2863900" cy="365760"/>
+          <p:cNvPr id="83" name="TextBox 82"/>
+          <p:cNvSpPr txBox="1"/>
+          <p:nvPr/>
+        </p:nvSpPr>
+        <p:spPr>
+          <a:xfrm>
+            <a:off x="38810793" y="26635456"/>
+            <a:ext cx="2227478" cy="365760"/>
           </a:xfrm>
           <a:prstGeom prst="rect">
             <a:avLst/>
@@ -6414,14 +6456,56 @@
       </p:sp>
       <p:sp>
         <p:nvSpPr>
-          <p:cNvPr id="83" name="TextBox 82"/>
+          <p:cNvPr id="84" name="TextBox 83"/>
+          <p:cNvSpPr txBox="1"/>
+          <p:nvPr/>
+        </p:nvSpPr>
+        <p:spPr>
+          <a:xfrm>
+            <a:off x="41038272" y="26635456"/>
+            <a:ext cx="2121408" cy="365760"/>
+          </a:xfrm>
+          <a:prstGeom prst="rect">
+            <a:avLst/>
+          </a:prstGeom>
+          <a:noFill/>
+        </p:spPr>
+        <p:txBody>
+          <a:bodyPr wrap="square" lIns="0" rIns="0" tIns="0" bIns="0">
+            <a:spAutoFit/>
+          </a:bodyPr>
+          <a:lstStyle/>
+          <a:p>
+            <a:pPr algn="r">
+              <a:lnSpc>
+                <a:spcPct val="100000"/>
+              </a:lnSpc>
+              <a:spcAft>
+                <a:spcPts val="0"/>
+              </a:spcAft>
+            </a:pPr>
+            <a:r>
+              <a:rPr sz="1700" b="0">
+                <a:solidFill>
+                  <a:srgbClr val="1E293B"/>
+                </a:solidFill>
+                <a:latin typeface="Arial"/>
+              </a:rPr>
+              <a:t>—</a:t>
+            </a:r>
+          </a:p>
+        </p:txBody>
+      </p:sp>
+      <p:sp>
+        <p:nvSpPr>
+          <p:cNvPr id="85" name="TextBox 84"/>
           <p:cNvSpPr txBox="1"/>
           <p:nvPr/>
         </p:nvSpPr>
         <p:spPr>
           <a:xfrm>
             <a:off x="32552640" y="27037792"/>
-            <a:ext cx="4879238" cy="365760"/>
+            <a:ext cx="4030675" cy="365760"/>
           </a:xfrm>
           <a:prstGeom prst="rect">
             <a:avLst/>
@@ -6456,14 +6540,14 @@
       </p:sp>
       <p:sp>
         <p:nvSpPr>
-          <p:cNvPr id="84" name="TextBox 83"/>
-          <p:cNvSpPr txBox="1"/>
-          <p:nvPr/>
-        </p:nvSpPr>
-        <p:spPr>
-          <a:xfrm>
-            <a:off x="37431878" y="27037792"/>
-            <a:ext cx="2863900" cy="365760"/>
+          <p:cNvPr id="86" name="TextBox 85"/>
+          <p:cNvSpPr txBox="1"/>
+          <p:nvPr/>
+        </p:nvSpPr>
+        <p:spPr>
+          <a:xfrm>
+            <a:off x="36583315" y="27037792"/>
+            <a:ext cx="2227478" cy="365760"/>
           </a:xfrm>
           <a:prstGeom prst="rect">
             <a:avLst/>
@@ -6498,14 +6582,14 @@
       </p:sp>
       <p:sp>
         <p:nvSpPr>
-          <p:cNvPr id="85" name="TextBox 84"/>
-          <p:cNvSpPr txBox="1"/>
-          <p:nvPr/>
-        </p:nvSpPr>
-        <p:spPr>
-          <a:xfrm>
-            <a:off x="40295779" y="27037792"/>
-            <a:ext cx="2863900" cy="365760"/>
+          <p:cNvPr id="87" name="TextBox 86"/>
+          <p:cNvSpPr txBox="1"/>
+          <p:nvPr/>
+        </p:nvSpPr>
+        <p:spPr>
+          <a:xfrm>
+            <a:off x="38810793" y="27037792"/>
+            <a:ext cx="2227478" cy="365760"/>
           </a:xfrm>
           <a:prstGeom prst="rect">
             <a:avLst/>
@@ -6540,14 +6624,56 @@
       </p:sp>
       <p:sp>
         <p:nvSpPr>
-          <p:cNvPr id="86" name="TextBox 85"/>
+          <p:cNvPr id="88" name="TextBox 87"/>
+          <p:cNvSpPr txBox="1"/>
+          <p:nvPr/>
+        </p:nvSpPr>
+        <p:spPr>
+          <a:xfrm>
+            <a:off x="41038272" y="27037792"/>
+            <a:ext cx="2121408" cy="365760"/>
+          </a:xfrm>
+          <a:prstGeom prst="rect">
+            <a:avLst/>
+          </a:prstGeom>
+          <a:noFill/>
+        </p:spPr>
+        <p:txBody>
+          <a:bodyPr wrap="square" lIns="0" rIns="0" tIns="0" bIns="0">
+            <a:spAutoFit/>
+          </a:bodyPr>
+          <a:lstStyle/>
+          <a:p>
+            <a:pPr algn="r">
+              <a:lnSpc>
+                <a:spcPct val="100000"/>
+              </a:lnSpc>
+              <a:spcAft>
+                <a:spcPts val="0"/>
+              </a:spcAft>
+            </a:pPr>
+            <a:r>
+              <a:rPr sz="1700" b="0">
+                <a:solidFill>
+                  <a:srgbClr val="1E293B"/>
+                </a:solidFill>
+                <a:latin typeface="Arial"/>
+              </a:rPr>
+              <a:t>116</a:t>
+            </a:r>
+          </a:p>
+        </p:txBody>
+      </p:sp>
+      <p:sp>
+        <p:nvSpPr>
+          <p:cNvPr id="89" name="TextBox 88"/>
           <p:cNvSpPr txBox="1"/>
           <p:nvPr/>
         </p:nvSpPr>
         <p:spPr>
           <a:xfrm>
             <a:off x="32552640" y="27440128"/>
-            <a:ext cx="4879238" cy="365760"/>
+            <a:ext cx="4030675" cy="365760"/>
           </a:xfrm>
           <a:prstGeom prst="rect">
             <a:avLst/>
@@ -6582,14 +6708,14 @@
       </p:sp>
       <p:sp>
         <p:nvSpPr>
-          <p:cNvPr id="87" name="TextBox 86"/>
-          <p:cNvSpPr txBox="1"/>
-          <p:nvPr/>
-        </p:nvSpPr>
-        <p:spPr>
-          <a:xfrm>
-            <a:off x="37431878" y="27440128"/>
-            <a:ext cx="2863900" cy="365760"/>
+          <p:cNvPr id="90" name="TextBox 89"/>
+          <p:cNvSpPr txBox="1"/>
+          <p:nvPr/>
+        </p:nvSpPr>
+        <p:spPr>
+          <a:xfrm>
+            <a:off x="36583315" y="27440128"/>
+            <a:ext cx="2227478" cy="365760"/>
           </a:xfrm>
           <a:prstGeom prst="rect">
             <a:avLst/>
@@ -6624,14 +6750,14 @@
       </p:sp>
       <p:sp>
         <p:nvSpPr>
-          <p:cNvPr id="88" name="TextBox 87"/>
-          <p:cNvSpPr txBox="1"/>
-          <p:nvPr/>
-        </p:nvSpPr>
-        <p:spPr>
-          <a:xfrm>
-            <a:off x="40295779" y="27440128"/>
-            <a:ext cx="2863900" cy="365760"/>
+          <p:cNvPr id="91" name="TextBox 90"/>
+          <p:cNvSpPr txBox="1"/>
+          <p:nvPr/>
+        </p:nvSpPr>
+        <p:spPr>
+          <a:xfrm>
+            <a:off x="38810793" y="27440128"/>
+            <a:ext cx="2227478" cy="365760"/>
           </a:xfrm>
           <a:prstGeom prst="rect">
             <a:avLst/>
@@ -6666,14 +6792,56 @@
       </p:sp>
       <p:sp>
         <p:nvSpPr>
-          <p:cNvPr id="89" name="TextBox 88"/>
+          <p:cNvPr id="92" name="TextBox 91"/>
+          <p:cNvSpPr txBox="1"/>
+          <p:nvPr/>
+        </p:nvSpPr>
+        <p:spPr>
+          <a:xfrm>
+            <a:off x="41038272" y="27440128"/>
+            <a:ext cx="2121408" cy="365760"/>
+          </a:xfrm>
+          <a:prstGeom prst="rect">
+            <a:avLst/>
+          </a:prstGeom>
+          <a:noFill/>
+        </p:spPr>
+        <p:txBody>
+          <a:bodyPr wrap="square" lIns="0" rIns="0" tIns="0" bIns="0">
+            <a:spAutoFit/>
+          </a:bodyPr>
+          <a:lstStyle/>
+          <a:p>
+            <a:pPr algn="r">
+              <a:lnSpc>
+                <a:spcPct val="100000"/>
+              </a:lnSpc>
+              <a:spcAft>
+                <a:spcPts val="0"/>
+              </a:spcAft>
+            </a:pPr>
+            <a:r>
+              <a:rPr sz="1700" b="0">
+                <a:solidFill>
+                  <a:srgbClr val="1E293B"/>
+                </a:solidFill>
+                <a:latin typeface="Arial"/>
+              </a:rPr>
+              <a:t>113</a:t>
+            </a:r>
+          </a:p>
+        </p:txBody>
+      </p:sp>
+      <p:sp>
+        <p:nvSpPr>
+          <p:cNvPr id="93" name="TextBox 92"/>
           <p:cNvSpPr txBox="1"/>
           <p:nvPr/>
         </p:nvSpPr>
         <p:spPr>
           <a:xfrm>
             <a:off x="32552640" y="27842464"/>
-            <a:ext cx="4879238" cy="365760"/>
+            <a:ext cx="4030675" cy="365760"/>
           </a:xfrm>
           <a:prstGeom prst="rect">
             <a:avLst/>
@@ -6708,14 +6876,14 @@
       </p:sp>
       <p:sp>
         <p:nvSpPr>
-          <p:cNvPr id="90" name="TextBox 89"/>
-          <p:cNvSpPr txBox="1"/>
-          <p:nvPr/>
-        </p:nvSpPr>
-        <p:spPr>
-          <a:xfrm>
-            <a:off x="37431878" y="27842464"/>
-            <a:ext cx="2863900" cy="365760"/>
+          <p:cNvPr id="94" name="TextBox 93"/>
+          <p:cNvSpPr txBox="1"/>
+          <p:nvPr/>
+        </p:nvSpPr>
+        <p:spPr>
+          <a:xfrm>
+            <a:off x="36583315" y="27842464"/>
+            <a:ext cx="2227478" cy="365760"/>
           </a:xfrm>
           <a:prstGeom prst="rect">
             <a:avLst/>
@@ -6750,14 +6918,14 @@
       </p:sp>
       <p:sp>
         <p:nvSpPr>
-          <p:cNvPr id="91" name="TextBox 90"/>
-          <p:cNvSpPr txBox="1"/>
-          <p:nvPr/>
-        </p:nvSpPr>
-        <p:spPr>
-          <a:xfrm>
-            <a:off x="40295779" y="27842464"/>
-            <a:ext cx="2863900" cy="365760"/>
+          <p:cNvPr id="95" name="TextBox 94"/>
+          <p:cNvSpPr txBox="1"/>
+          <p:nvPr/>
+        </p:nvSpPr>
+        <p:spPr>
+          <a:xfrm>
+            <a:off x="38810793" y="27842464"/>
+            <a:ext cx="2227478" cy="365760"/>
           </a:xfrm>
           <a:prstGeom prst="rect">
             <a:avLst/>
@@ -6792,14 +6960,56 @@
       </p:sp>
       <p:sp>
         <p:nvSpPr>
-          <p:cNvPr id="92" name="TextBox 91"/>
+          <p:cNvPr id="96" name="TextBox 95"/>
+          <p:cNvSpPr txBox="1"/>
+          <p:nvPr/>
+        </p:nvSpPr>
+        <p:spPr>
+          <a:xfrm>
+            <a:off x="41038272" y="27842464"/>
+            <a:ext cx="2121408" cy="365760"/>
+          </a:xfrm>
+          <a:prstGeom prst="rect">
+            <a:avLst/>
+          </a:prstGeom>
+          <a:noFill/>
+        </p:spPr>
+        <p:txBody>
+          <a:bodyPr wrap="square" lIns="0" rIns="0" tIns="0" bIns="0">
+            <a:spAutoFit/>
+          </a:bodyPr>
+          <a:lstStyle/>
+          <a:p>
+            <a:pPr algn="r">
+              <a:lnSpc>
+                <a:spcPct val="100000"/>
+              </a:lnSpc>
+              <a:spcAft>
+                <a:spcPts val="0"/>
+              </a:spcAft>
+            </a:pPr>
+            <a:r>
+              <a:rPr sz="1700" b="0">
+                <a:solidFill>
+                  <a:srgbClr val="1E293B"/>
+                </a:solidFill>
+                <a:latin typeface="Arial"/>
+              </a:rPr>
+              <a:t>114</a:t>
+            </a:r>
+          </a:p>
+        </p:txBody>
+      </p:sp>
+      <p:sp>
+        <p:nvSpPr>
+          <p:cNvPr id="97" name="TextBox 96"/>
           <p:cNvSpPr txBox="1"/>
           <p:nvPr/>
         </p:nvSpPr>
         <p:spPr>
           <a:xfrm>
             <a:off x="32552640" y="28244800"/>
-            <a:ext cx="4879238" cy="365760"/>
+            <a:ext cx="4030675" cy="365760"/>
           </a:xfrm>
           <a:prstGeom prst="rect">
             <a:avLst/>
@@ -6821,9 +7031,9 @@
               </a:spcAft>
             </a:pPr>
             <a:r>
-              <a:rPr sz="1700" b="1">
-                <a:solidFill>
-                  <a:srgbClr val="1C6FB5"/>
+              <a:rPr sz="1700" b="0">
+                <a:solidFill>
+                  <a:srgbClr val="1E293B"/>
                 </a:solidFill>
                 <a:latin typeface="Arial"/>
               </a:rPr>
@@ -6834,14 +7044,14 @@
       </p:sp>
       <p:sp>
         <p:nvSpPr>
-          <p:cNvPr id="93" name="TextBox 92"/>
-          <p:cNvSpPr txBox="1"/>
-          <p:nvPr/>
-        </p:nvSpPr>
-        <p:spPr>
-          <a:xfrm>
-            <a:off x="37431878" y="28244800"/>
-            <a:ext cx="2863900" cy="365760"/>
+          <p:cNvPr id="98" name="TextBox 97"/>
+          <p:cNvSpPr txBox="1"/>
+          <p:nvPr/>
+        </p:nvSpPr>
+        <p:spPr>
+          <a:xfrm>
+            <a:off x="36583315" y="28244800"/>
+            <a:ext cx="2227478" cy="365760"/>
           </a:xfrm>
           <a:prstGeom prst="rect">
             <a:avLst/>
@@ -6863,9 +7073,9 @@
               </a:spcAft>
             </a:pPr>
             <a:r>
-              <a:rPr sz="1700" b="1">
-                <a:solidFill>
-                  <a:srgbClr val="1C6FB5"/>
+              <a:rPr sz="1700" b="0">
+                <a:solidFill>
+                  <a:srgbClr val="1E293B"/>
                 </a:solidFill>
                 <a:latin typeface="Arial"/>
               </a:rPr>
@@ -6876,14 +7086,14 @@
       </p:sp>
       <p:sp>
         <p:nvSpPr>
-          <p:cNvPr id="94" name="TextBox 93"/>
-          <p:cNvSpPr txBox="1"/>
-          <p:nvPr/>
-        </p:nvSpPr>
-        <p:spPr>
-          <a:xfrm>
-            <a:off x="40295779" y="28244800"/>
-            <a:ext cx="2863900" cy="365760"/>
+          <p:cNvPr id="99" name="TextBox 98"/>
+          <p:cNvSpPr txBox="1"/>
+          <p:nvPr/>
+        </p:nvSpPr>
+        <p:spPr>
+          <a:xfrm>
+            <a:off x="38810793" y="28244800"/>
+            <a:ext cx="2227478" cy="365760"/>
           </a:xfrm>
           <a:prstGeom prst="rect">
             <a:avLst/>
@@ -6905,9 +7115,9 @@
               </a:spcAft>
             </a:pPr>
             <a:r>
-              <a:rPr sz="1700" b="1">
-                <a:solidFill>
-                  <a:srgbClr val="1C6FB5"/>
+              <a:rPr sz="1700" b="0">
+                <a:solidFill>
+                  <a:srgbClr val="1E293B"/>
                 </a:solidFill>
                 <a:latin typeface="Arial"/>
               </a:rPr>
@@ -6918,7 +7128,49 @@
       </p:sp>
       <p:sp>
         <p:nvSpPr>
-          <p:cNvPr id="95" name="Rectangle 94"/>
+          <p:cNvPr id="100" name="TextBox 99"/>
+          <p:cNvSpPr txBox="1"/>
+          <p:nvPr/>
+        </p:nvSpPr>
+        <p:spPr>
+          <a:xfrm>
+            <a:off x="41038272" y="28244800"/>
+            <a:ext cx="2121408" cy="365760"/>
+          </a:xfrm>
+          <a:prstGeom prst="rect">
+            <a:avLst/>
+          </a:prstGeom>
+          <a:noFill/>
+        </p:spPr>
+        <p:txBody>
+          <a:bodyPr wrap="square" lIns="0" rIns="0" tIns="0" bIns="0">
+            <a:spAutoFit/>
+          </a:bodyPr>
+          <a:lstStyle/>
+          <a:p>
+            <a:pPr algn="r">
+              <a:lnSpc>
+                <a:spcPct val="100000"/>
+              </a:lnSpc>
+              <a:spcAft>
+                <a:spcPts val="0"/>
+              </a:spcAft>
+            </a:pPr>
+            <a:r>
+              <a:rPr sz="1700" b="0">
+                <a:solidFill>
+                  <a:srgbClr val="1E293B"/>
+                </a:solidFill>
+                <a:latin typeface="Arial"/>
+              </a:rPr>
+              <a:t>57</a:t>
+            </a:r>
+          </a:p>
+        </p:txBody>
+      </p:sp>
+      <p:sp>
+        <p:nvSpPr>
+          <p:cNvPr id="101" name="Rectangle 100"/>
           <p:cNvSpPr/>
           <p:nvPr/>
         </p:nvSpPr>
@@ -6962,7 +7214,7 @@
       </p:sp>
       <p:sp>
         <p:nvSpPr>
-          <p:cNvPr id="96" name="TextBox 95"/>
+          <p:cNvPr id="102" name="TextBox 101"/>
           <p:cNvSpPr txBox="1"/>
           <p:nvPr/>
         </p:nvSpPr>
@@ -7004,13 +7256,13 @@
       </p:sp>
       <p:sp>
         <p:nvSpPr>
-          <p:cNvPr id="97" name="Rectangle 96"/>
+          <p:cNvPr id="103" name="Rectangle 102"/>
           <p:cNvSpPr/>
           <p:nvPr/>
         </p:nvSpPr>
         <p:spPr>
           <a:xfrm>
-            <a:off x="731520" y="30937199"/>
+            <a:off x="731520" y="31176976"/>
             <a:ext cx="42428160" cy="20116"/>
           </a:xfrm>
           <a:prstGeom prst="rect">
@@ -7048,13 +7300,13 @@
       </p:sp>
       <p:sp>
         <p:nvSpPr>
-          <p:cNvPr id="98" name="TextBox 97"/>
-          <p:cNvSpPr txBox="1"/>
-          <p:nvPr/>
-        </p:nvSpPr>
-        <p:spPr>
-          <a:xfrm>
-            <a:off x="731520" y="31193231"/>
+          <p:cNvPr id="104" name="TextBox 103"/>
+          <p:cNvSpPr txBox="1"/>
+          <p:nvPr/>
+        </p:nvSpPr>
+        <p:spPr>
+          <a:xfrm>
+            <a:off x="731520" y="31433008"/>
             <a:ext cx="13837920" cy="365760"/>
           </a:xfrm>
           <a:prstGeom prst="rect">
@@ -7090,13 +7342,13 @@
       </p:sp>
       <p:sp>
         <p:nvSpPr>
-          <p:cNvPr id="99" name="TextBox 98"/>
-          <p:cNvSpPr txBox="1"/>
-          <p:nvPr/>
-        </p:nvSpPr>
-        <p:spPr>
-          <a:xfrm>
-            <a:off x="15026640" y="31193231"/>
+          <p:cNvPr id="105" name="TextBox 104"/>
+          <p:cNvSpPr txBox="1"/>
+          <p:nvPr/>
+        </p:nvSpPr>
+        <p:spPr>
+          <a:xfrm>
+            <a:off x="15026640" y="31433008"/>
             <a:ext cx="13837920" cy="365760"/>
           </a:xfrm>
           <a:prstGeom prst="rect">
@@ -7125,20 +7377,20 @@
                 </a:solidFill>
                 <a:latin typeface="Arial"/>
               </a:rPr>
-              <a:t>How the numbers were made. Every in-domain number is mAP50-95 on the same 1,977 images under one evaluator, and that set is also the validation set during training, so each figure is a maximum over many evaluations. We measured that optimism at +0.002 to +0.017.</a:t>
-            </a:r>
-          </a:p>
-        </p:txBody>
-      </p:sp>
-      <p:sp>
-        <p:nvSpPr>
-          <p:cNvPr id="100" name="TextBox 99"/>
-          <p:cNvSpPr txBox="1"/>
-          <p:nvPr/>
-        </p:nvSpPr>
-        <p:spPr>
-          <a:xfrm>
-            <a:off x="29321759" y="31193231"/>
+              <a:t>How the numbers were made. Most in-domain numbers are mAP50-95 on the same 1,977 images under Ultralytics. RF-DETR is pycocotools and the zero-shot column is mAP50 on the 848-image test split; neither is ever differenced against the rest. That holdout is also the validation set during training, so every mAP here is a run's best epoch, a maximum over 21 to 100 evaluations on the set it is reported on.</a:t>
+            </a:r>
+          </a:p>
+        </p:txBody>
+      </p:sp>
+      <p:sp>
+        <p:nvSpPr>
+          <p:cNvPr id="106" name="TextBox 105"/>
+          <p:cNvSpPr txBox="1"/>
+          <p:nvPr/>
+        </p:nvSpPr>
+        <p:spPr>
+          <a:xfrm>
+            <a:off x="29321759" y="31433008"/>
             <a:ext cx="13837920" cy="365760"/>
           </a:xfrm>
           <a:prstGeom prst="rect">

--- a/docs/poster/draft_C_field.pptx
+++ b/docs/poster/draft_C_field.pptx
@@ -3097,13 +3097,13 @@
         <p:spPr>
           <a:xfrm>
             <a:off x="0" y="0"/>
-            <a:ext cx="43891200" cy="3931920"/>
+            <a:ext cx="43891200" cy="32918400"/>
           </a:xfrm>
           <a:prstGeom prst="rect">
             <a:avLst/>
           </a:prstGeom>
           <a:solidFill>
-            <a:srgbClr val="14314E"/>
+            <a:srgbClr val="FFFFFF"/>
           </a:solidFill>
           <a:ln>
             <a:noFill/>
@@ -3140,14 +3140,14 @@
         </p:nvSpPr>
         <p:spPr>
           <a:xfrm>
-            <a:off x="0" y="3931920"/>
-            <a:ext cx="43891200" cy="45720"/>
+            <a:off x="0" y="0"/>
+            <a:ext cx="43891200" cy="3931920"/>
           </a:xfrm>
           <a:prstGeom prst="rect">
             <a:avLst/>
           </a:prstGeom>
           <a:solidFill>
-            <a:srgbClr val="1C6FB5"/>
+            <a:srgbClr val="14314E"/>
           </a:solidFill>
           <a:ln>
             <a:noFill/>
@@ -3178,254 +3178,20 @@
       </p:sp>
       <p:sp>
         <p:nvSpPr>
-          <p:cNvPr id="4" name="TextBox 3"/>
-          <p:cNvSpPr txBox="1"/>
-          <p:nvPr/>
-        </p:nvSpPr>
-        <p:spPr>
-          <a:xfrm>
-            <a:off x="731520" y="384048"/>
-            <a:ext cx="42428160" cy="365760"/>
-          </a:xfrm>
-          <a:prstGeom prst="rect">
-            <a:avLst/>
-          </a:prstGeom>
-          <a:noFill/>
-        </p:spPr>
-        <p:txBody>
-          <a:bodyPr wrap="square" lIns="0" rIns="0" tIns="0" bIns="0">
-            <a:spAutoFit/>
-          </a:bodyPr>
-          <a:lstStyle/>
-          <a:p>
-            <a:pPr algn="l">
-              <a:lnSpc>
-                <a:spcPct val="95000"/>
-              </a:lnSpc>
-              <a:spcAft>
-                <a:spcPts val="0"/>
-              </a:spcAft>
-            </a:pPr>
-            <a:r>
-              <a:rPr sz="9000" b="1">
-                <a:solidFill>
-                  <a:srgbClr val="FFFFFF"/>
-                </a:solidFill>
-                <a:latin typeface="Arial"/>
-              </a:rPr>
-              <a:t>Robot-Collected Field Data and Agent-Run Training for Laser Weeding</a:t>
-            </a:r>
-          </a:p>
-        </p:txBody>
-      </p:sp>
-      <p:sp>
-        <p:nvSpPr>
-          <p:cNvPr id="5" name="TextBox 4"/>
-          <p:cNvSpPr txBox="1"/>
-          <p:nvPr/>
-        </p:nvSpPr>
-        <p:spPr>
-          <a:xfrm>
-            <a:off x="731520" y="2121408"/>
-            <a:ext cx="42428160" cy="365760"/>
-          </a:xfrm>
-          <a:prstGeom prst="rect">
-            <a:avLst/>
-          </a:prstGeom>
-          <a:noFill/>
-        </p:spPr>
-        <p:txBody>
-          <a:bodyPr wrap="square" lIns="0" rIns="0" tIns="0" bIns="0">
-            <a:spAutoFit/>
-          </a:bodyPr>
-          <a:lstStyle/>
-          <a:p>
-            <a:pPr algn="l">
-              <a:lnSpc>
-                <a:spcPct val="100000"/>
-              </a:lnSpc>
-              <a:spcAft>
-                <a:spcPts val="0"/>
-              </a:spcAft>
-            </a:pPr>
-            <a:r>
-              <a:rPr sz="4000" b="1">
-                <a:solidFill>
-                  <a:srgbClr val="FFFFFF"/>
-                </a:solidFill>
-                <a:latin typeface="Arial"/>
-              </a:rPr>
-              <a:t>Harry He   ·   Hongbo Zhang</a:t>
-            </a:r>
-          </a:p>
-        </p:txBody>
-      </p:sp>
-      <p:sp>
-        <p:nvSpPr>
-          <p:cNvPr id="6" name="TextBox 5"/>
-          <p:cNvSpPr txBox="1"/>
-          <p:nvPr/>
-        </p:nvSpPr>
-        <p:spPr>
-          <a:xfrm>
-            <a:off x="731520" y="2761488"/>
-            <a:ext cx="42428160" cy="365760"/>
-          </a:xfrm>
-          <a:prstGeom prst="rect">
-            <a:avLst/>
-          </a:prstGeom>
-          <a:noFill/>
-        </p:spPr>
-        <p:txBody>
-          <a:bodyPr wrap="square" lIns="0" rIns="0" tIns="0" bIns="0">
-            <a:spAutoFit/>
-          </a:bodyPr>
-          <a:lstStyle/>
-          <a:p>
-            <a:pPr algn="l">
-              <a:lnSpc>
-                <a:spcPct val="100000"/>
-              </a:lnSpc>
-              <a:spcAft>
-                <a:spcPts val="0"/>
-              </a:spcAft>
-            </a:pPr>
-            <a:r>
-              <a:rPr sz="2400" b="0">
-                <a:solidFill>
-                  <a:srgbClr val="C2CEDA"/>
-                </a:solidFill>
-                <a:latin typeface="Arial"/>
-              </a:rPr>
-              <a:t>Department of Engineering Technology   ·   Middle Tennessee State University, Murfreesboro, TN, USA</a:t>
-            </a:r>
-          </a:p>
-        </p:txBody>
-      </p:sp>
-      <p:sp>
-        <p:nvSpPr>
-          <p:cNvPr id="7" name="TextBox 6"/>
-          <p:cNvSpPr txBox="1"/>
-          <p:nvPr/>
-        </p:nvSpPr>
-        <p:spPr>
-          <a:xfrm>
-            <a:off x="731520" y="4315968"/>
-            <a:ext cx="42428160" cy="365760"/>
-          </a:xfrm>
-          <a:prstGeom prst="rect">
-            <a:avLst/>
-          </a:prstGeom>
-          <a:noFill/>
-        </p:spPr>
-        <p:txBody>
-          <a:bodyPr wrap="square" lIns="0" rIns="0" tIns="0" bIns="0">
-            <a:spAutoFit/>
-          </a:bodyPr>
-          <a:lstStyle/>
-          <a:p>
-            <a:pPr algn="l">
-              <a:lnSpc>
-                <a:spcPct val="116000"/>
-              </a:lnSpc>
-              <a:spcAft>
-                <a:spcPts val="0"/>
-              </a:spcAft>
-            </a:pPr>
-            <a:r>
-              <a:rPr sz="3400" b="0">
-                <a:solidFill>
-                  <a:srgbClr val="1E293B"/>
-                </a:solidFill>
-                <a:latin typeface="Arial"/>
-              </a:rPr>
-              <a:t>Two ground vehicles drive our own crop plots while a pair of agents collect, filter and train on the cluster with nobody in the room. This is what the machines recorded, what the agents did, and the one link between them we have not closed.</a:t>
-            </a:r>
-          </a:p>
-        </p:txBody>
-      </p:sp>
-      <p:pic>
-        <p:nvPicPr>
-          <p:cNvPr id="8" name="Picture 7" descr="w_robots.png"/>
-          <p:cNvPicPr>
-            <a:picLocks noChangeAspect="1"/>
-          </p:cNvPicPr>
-          <p:nvPr/>
-        </p:nvPicPr>
-        <p:blipFill>
-          <a:blip r:embed="rId2"/>
-          <a:stretch>
-            <a:fillRect/>
-          </a:stretch>
-        </p:blipFill>
-        <p:spPr>
-          <a:xfrm>
-            <a:off x="731520" y="5623560"/>
-            <a:ext cx="42428160" cy="4023360"/>
-          </a:xfrm>
-          <a:prstGeom prst="rect">
-            <a:avLst/>
-          </a:prstGeom>
-        </p:spPr>
-      </p:pic>
-      <p:sp>
-        <p:nvSpPr>
-          <p:cNvPr id="9" name="TextBox 8"/>
-          <p:cNvSpPr txBox="1"/>
-          <p:nvPr/>
-        </p:nvSpPr>
-        <p:spPr>
-          <a:xfrm>
-            <a:off x="731520" y="9756648"/>
-            <a:ext cx="42428160" cy="365760"/>
-          </a:xfrm>
-          <a:prstGeom prst="rect">
-            <a:avLst/>
-          </a:prstGeom>
-          <a:noFill/>
-        </p:spPr>
-        <p:txBody>
-          <a:bodyPr wrap="square" lIns="0" rIns="0" tIns="0" bIns="0">
-            <a:spAutoFit/>
-          </a:bodyPr>
-          <a:lstStyle/>
-          <a:p>
-            <a:pPr algn="l">
-              <a:lnSpc>
-                <a:spcPct val="118000"/>
-              </a:lnSpc>
-              <a:spcAft>
-                <a:spcPts val="0"/>
-              </a:spcAft>
-            </a:pPr>
-            <a:r>
-              <a:rPr sz="1600" b="0">
-                <a:solidFill>
-                  <a:srgbClr val="556575"/>
-                </a:solidFill>
-                <a:latin typeface="Arial"/>
-              </a:rPr>
-              <a:t>Figure 1.  Four frames as recorded, unenhanced and unlabelled. The rectangle in (c) is the cart's fixed work-zone overlay. It is drawn on every frame, including the ones with no vegetation in them.</a:t>
-            </a:r>
-          </a:p>
-        </p:txBody>
-      </p:sp>
-      <p:sp>
-        <p:nvSpPr>
-          <p:cNvPr id="10" name="Rectangle 9"/>
+          <p:cNvPr id="4" name="Rectangle 3"/>
           <p:cNvSpPr/>
           <p:nvPr/>
         </p:nvSpPr>
         <p:spPr>
           <a:xfrm>
-            <a:off x="731520" y="10581640"/>
-            <a:ext cx="42428160" cy="23774"/>
+            <a:off x="0" y="3931920"/>
+            <a:ext cx="43891200" cy="45720"/>
           </a:xfrm>
           <a:prstGeom prst="rect">
             <a:avLst/>
           </a:prstGeom>
           <a:solidFill>
-            <a:srgbClr val="C2CEDA"/>
+            <a:srgbClr val="1C6FB5"/>
           </a:solidFill>
           <a:ln>
             <a:noFill/>
@@ -3456,14 +3222,14 @@
       </p:sp>
       <p:sp>
         <p:nvSpPr>
-          <p:cNvPr id="11" name="TextBox 10"/>
-          <p:cNvSpPr txBox="1"/>
-          <p:nvPr/>
-        </p:nvSpPr>
-        <p:spPr>
-          <a:xfrm>
-            <a:off x="731520" y="10764520"/>
-            <a:ext cx="8083296" cy="365760"/>
+          <p:cNvPr id="5" name="TextBox 4"/>
+          <p:cNvSpPr txBox="1"/>
+          <p:nvPr/>
+        </p:nvSpPr>
+        <p:spPr>
+          <a:xfrm>
+            <a:off x="731520" y="384048"/>
+            <a:ext cx="42428160" cy="365760"/>
           </a:xfrm>
           <a:prstGeom prst="rect">
             <a:avLst/>
@@ -3485,27 +3251,27 @@
               </a:spcAft>
             </a:pPr>
             <a:r>
-              <a:rPr sz="5600" b="1">
-                <a:solidFill>
-                  <a:srgbClr val="1C6FB5"/>
-                </a:solidFill>
-                <a:latin typeface="Arial"/>
-              </a:rPr>
-              <a:t>2,686</a:t>
-            </a:r>
-          </a:p>
-        </p:txBody>
-      </p:sp>
-      <p:sp>
-        <p:nvSpPr>
-          <p:cNvPr id="12" name="TextBox 11"/>
-          <p:cNvSpPr txBox="1"/>
-          <p:nvPr/>
-        </p:nvSpPr>
-        <p:spPr>
-          <a:xfrm>
-            <a:off x="731520" y="11489944"/>
-            <a:ext cx="8083296" cy="365760"/>
+              <a:rPr sz="9000" b="1">
+                <a:solidFill>
+                  <a:srgbClr val="FFFFFF"/>
+                </a:solidFill>
+                <a:latin typeface="Arial"/>
+              </a:rPr>
+              <a:t>Robot-Collected Field Data and Agent-Run Training for Laser Weeding</a:t>
+            </a:r>
+          </a:p>
+        </p:txBody>
+      </p:sp>
+      <p:sp>
+        <p:nvSpPr>
+          <p:cNvPr id="6" name="TextBox 5"/>
+          <p:cNvSpPr txBox="1"/>
+          <p:nvPr/>
+        </p:nvSpPr>
+        <p:spPr>
+          <a:xfrm>
+            <a:off x="731520" y="2121408"/>
+            <a:ext cx="42428160" cy="365760"/>
           </a:xfrm>
           <a:prstGeom prst="rect">
             <a:avLst/>
@@ -3520,34 +3286,142 @@
           <a:p>
             <a:pPr algn="l">
               <a:lnSpc>
-                <a:spcPct val="122000"/>
-              </a:lnSpc>
-              <a:spcAft>
-                <a:spcPts val="200"/>
-              </a:spcAft>
-            </a:pPr>
-            <a:r>
-              <a:rPr sz="2000" b="0">
+                <a:spcPct val="100000"/>
+              </a:lnSpc>
+              <a:spcAft>
+                <a:spcPts val="0"/>
+              </a:spcAft>
+            </a:pPr>
+            <a:r>
+              <a:rPr sz="4000" b="1">
+                <a:solidFill>
+                  <a:srgbClr val="FFFFFF"/>
+                </a:solidFill>
+                <a:latin typeface="Arial"/>
+              </a:rPr>
+              <a:t>Harry He   ·   Hongbo Zhang</a:t>
+            </a:r>
+          </a:p>
+        </p:txBody>
+      </p:sp>
+      <p:sp>
+        <p:nvSpPr>
+          <p:cNvPr id="7" name="TextBox 6"/>
+          <p:cNvSpPr txBox="1"/>
+          <p:nvPr/>
+        </p:nvSpPr>
+        <p:spPr>
+          <a:xfrm>
+            <a:off x="731520" y="2761488"/>
+            <a:ext cx="42428160" cy="365760"/>
+          </a:xfrm>
+          <a:prstGeom prst="rect">
+            <a:avLst/>
+          </a:prstGeom>
+          <a:noFill/>
+        </p:spPr>
+        <p:txBody>
+          <a:bodyPr wrap="square" lIns="0" rIns="0" tIns="0" bIns="0">
+            <a:spAutoFit/>
+          </a:bodyPr>
+          <a:lstStyle/>
+          <a:p>
+            <a:pPr algn="l">
+              <a:lnSpc>
+                <a:spcPct val="100000"/>
+              </a:lnSpc>
+              <a:spcAft>
+                <a:spcPts val="0"/>
+              </a:spcAft>
+            </a:pPr>
+            <a:r>
+              <a:rPr sz="2400" b="0">
+                <a:solidFill>
+                  <a:srgbClr val="C2CEDA"/>
+                </a:solidFill>
+                <a:latin typeface="Arial"/>
+              </a:rPr>
+              <a:t>Department of Engineering Technology   ·   Middle Tennessee State University, Murfreesboro, TN, USA</a:t>
+            </a:r>
+          </a:p>
+        </p:txBody>
+      </p:sp>
+      <p:sp>
+        <p:nvSpPr>
+          <p:cNvPr id="8" name="TextBox 7"/>
+          <p:cNvSpPr txBox="1"/>
+          <p:nvPr/>
+        </p:nvSpPr>
+        <p:spPr>
+          <a:xfrm>
+            <a:off x="731520" y="4315968"/>
+            <a:ext cx="42428160" cy="365760"/>
+          </a:xfrm>
+          <a:prstGeom prst="rect">
+            <a:avLst/>
+          </a:prstGeom>
+          <a:noFill/>
+        </p:spPr>
+        <p:txBody>
+          <a:bodyPr wrap="square" lIns="0" rIns="0" tIns="0" bIns="0">
+            <a:spAutoFit/>
+          </a:bodyPr>
+          <a:lstStyle/>
+          <a:p>
+            <a:pPr algn="l">
+              <a:lnSpc>
+                <a:spcPct val="116000"/>
+              </a:lnSpc>
+              <a:spcAft>
+                <a:spcPts val="0"/>
+              </a:spcAft>
+            </a:pPr>
+            <a:r>
+              <a:rPr sz="3400" b="0">
                 <a:solidFill>
                   <a:srgbClr val="1E293B"/>
                 </a:solidFill>
                 <a:latin typeface="Arial"/>
               </a:rPr>
-              <a:t>camera frames</a:t>
-            </a:r>
-          </a:p>
-        </p:txBody>
-      </p:sp>
-      <p:sp>
-        <p:nvSpPr>
-          <p:cNvPr id="13" name="TextBox 12"/>
-          <p:cNvSpPr txBox="1"/>
-          <p:nvPr/>
-        </p:nvSpPr>
-        <p:spPr>
-          <a:xfrm>
-            <a:off x="731520" y="11825224"/>
-            <a:ext cx="8083296" cy="365760"/>
+              <a:t>Two ground vehicles drive our own crop plots while a pair of agents collect, filter and train on the cluster with nobody in the room. This is what the machines recorded, what the agents did, and the one link between them we have not closed.</a:t>
+            </a:r>
+          </a:p>
+        </p:txBody>
+      </p:sp>
+      <p:pic>
+        <p:nvPicPr>
+          <p:cNvPr id="9" name="Picture 8" descr="w_robots.png"/>
+          <p:cNvPicPr>
+            <a:picLocks noChangeAspect="1"/>
+          </p:cNvPicPr>
+          <p:nvPr/>
+        </p:nvPicPr>
+        <p:blipFill>
+          <a:blip r:embed="rId2"/>
+          <a:stretch>
+            <a:fillRect/>
+          </a:stretch>
+        </p:blipFill>
+        <p:spPr>
+          <a:xfrm>
+            <a:off x="731520" y="5623560"/>
+            <a:ext cx="42428160" cy="4023360"/>
+          </a:xfrm>
+          <a:prstGeom prst="rect">
+            <a:avLst/>
+          </a:prstGeom>
+        </p:spPr>
+      </p:pic>
+      <p:sp>
+        <p:nvSpPr>
+          <p:cNvPr id="10" name="TextBox 9"/>
+          <p:cNvSpPr txBox="1"/>
+          <p:nvPr/>
+        </p:nvSpPr>
+        <p:spPr>
+          <a:xfrm>
+            <a:off x="731520" y="9756648"/>
+            <a:ext cx="42428160" cy="365760"/>
           </a:xfrm>
           <a:prstGeom prst="rect">
             <a:avLst/>
@@ -3562,7 +3436,7 @@
           <a:p>
             <a:pPr algn="l">
               <a:lnSpc>
-                <a:spcPct val="122000"/>
+                <a:spcPct val="118000"/>
               </a:lnSpc>
               <a:spcAft>
                 <a:spcPts val="0"/>
@@ -3575,524 +3449,20 @@
                 </a:solidFill>
                 <a:latin typeface="Arial"/>
               </a:rPr>
-              <a:t>26 drives, 2 robots</a:t>
-            </a:r>
-          </a:p>
-        </p:txBody>
-      </p:sp>
-      <p:sp>
-        <p:nvSpPr>
-          <p:cNvPr id="14" name="TextBox 13"/>
-          <p:cNvSpPr txBox="1"/>
-          <p:nvPr/>
-        </p:nvSpPr>
-        <p:spPr>
-          <a:xfrm>
-            <a:off x="9317736" y="10764520"/>
-            <a:ext cx="8083296" cy="365760"/>
-          </a:xfrm>
-          <a:prstGeom prst="rect">
-            <a:avLst/>
-          </a:prstGeom>
-          <a:noFill/>
-        </p:spPr>
-        <p:txBody>
-          <a:bodyPr wrap="square" lIns="0" rIns="0" tIns="0" bIns="0">
-            <a:spAutoFit/>
-          </a:bodyPr>
-          <a:lstStyle/>
-          <a:p>
-            <a:pPr algn="l">
-              <a:lnSpc>
-                <a:spcPct val="95000"/>
-              </a:lnSpc>
-              <a:spcAft>
-                <a:spcPts val="0"/>
-              </a:spcAft>
-            </a:pPr>
-            <a:r>
-              <a:rPr sz="5600" b="1">
-                <a:solidFill>
-                  <a:srgbClr val="1C6FB5"/>
-                </a:solidFill>
-                <a:latin typeface="Arial"/>
-              </a:rPr>
-              <a:t>91,955</a:t>
-            </a:r>
-          </a:p>
-        </p:txBody>
-      </p:sp>
-      <p:sp>
-        <p:nvSpPr>
-          <p:cNvPr id="15" name="TextBox 14"/>
-          <p:cNvSpPr txBox="1"/>
-          <p:nvPr/>
-        </p:nvSpPr>
-        <p:spPr>
-          <a:xfrm>
-            <a:off x="9317736" y="11489944"/>
-            <a:ext cx="8083296" cy="365760"/>
-          </a:xfrm>
-          <a:prstGeom prst="rect">
-            <a:avLst/>
-          </a:prstGeom>
-          <a:noFill/>
-        </p:spPr>
-        <p:txBody>
-          <a:bodyPr wrap="square" lIns="0" rIns="0" tIns="0" bIns="0">
-            <a:spAutoFit/>
-          </a:bodyPr>
-          <a:lstStyle/>
-          <a:p>
-            <a:pPr algn="l">
-              <a:lnSpc>
-                <a:spcPct val="122000"/>
-              </a:lnSpc>
-              <a:spcAft>
-                <a:spcPts val="200"/>
-              </a:spcAft>
-            </a:pPr>
-            <a:r>
-              <a:rPr sz="2000" b="0">
-                <a:solidFill>
-                  <a:srgbClr val="1E293B"/>
-                </a:solidFill>
-                <a:latin typeface="Arial"/>
-              </a:rPr>
-              <a:t>telemetry rows</a:t>
-            </a:r>
-          </a:p>
-        </p:txBody>
-      </p:sp>
-      <p:sp>
-        <p:nvSpPr>
-          <p:cNvPr id="16" name="TextBox 15"/>
-          <p:cNvSpPr txBox="1"/>
-          <p:nvPr/>
-        </p:nvSpPr>
-        <p:spPr>
-          <a:xfrm>
-            <a:off x="9317736" y="11825224"/>
-            <a:ext cx="8083296" cy="365760"/>
-          </a:xfrm>
-          <a:prstGeom prst="rect">
-            <a:avLst/>
-          </a:prstGeom>
-          <a:noFill/>
-        </p:spPr>
-        <p:txBody>
-          <a:bodyPr wrap="square" lIns="0" rIns="0" tIns="0" bIns="0">
-            <a:spAutoFit/>
-          </a:bodyPr>
-          <a:lstStyle/>
-          <a:p>
-            <a:pPr algn="l">
-              <a:lnSpc>
-                <a:spcPct val="122000"/>
-              </a:lnSpc>
-              <a:spcAft>
-                <a:spcPts val="0"/>
-              </a:spcAft>
-            </a:pPr>
-            <a:r>
-              <a:rPr sz="1600" b="0">
-                <a:solidFill>
-                  <a:srgbClr val="556575"/>
-                </a:solidFill>
-                <a:latin typeface="Arial"/>
-              </a:rPr>
-              <a:t>nine streams, counted line by line</a:t>
-            </a:r>
-          </a:p>
-        </p:txBody>
-      </p:sp>
-      <p:sp>
-        <p:nvSpPr>
-          <p:cNvPr id="17" name="TextBox 16"/>
-          <p:cNvSpPr txBox="1"/>
-          <p:nvPr/>
-        </p:nvSpPr>
-        <p:spPr>
-          <a:xfrm>
-            <a:off x="17903952" y="10764520"/>
-            <a:ext cx="8083296" cy="365760"/>
-          </a:xfrm>
-          <a:prstGeom prst="rect">
-            <a:avLst/>
-          </a:prstGeom>
-          <a:noFill/>
-        </p:spPr>
-        <p:txBody>
-          <a:bodyPr wrap="square" lIns="0" rIns="0" tIns="0" bIns="0">
-            <a:spAutoFit/>
-          </a:bodyPr>
-          <a:lstStyle/>
-          <a:p>
-            <a:pPr algn="l">
-              <a:lnSpc>
-                <a:spcPct val="95000"/>
-              </a:lnSpc>
-              <a:spcAft>
-                <a:spcPts val="0"/>
-              </a:spcAft>
-            </a:pPr>
-            <a:r>
-              <a:rPr sz="5600" b="1">
-                <a:solidFill>
-                  <a:srgbClr val="1C6FB5"/>
-                </a:solidFill>
-                <a:latin typeface="Arial"/>
-              </a:rPr>
-              <a:t>342 m</a:t>
-            </a:r>
-          </a:p>
-        </p:txBody>
-      </p:sp>
-      <p:sp>
-        <p:nvSpPr>
-          <p:cNvPr id="18" name="TextBox 17"/>
-          <p:cNvSpPr txBox="1"/>
-          <p:nvPr/>
-        </p:nvSpPr>
-        <p:spPr>
-          <a:xfrm>
-            <a:off x="17903952" y="11489944"/>
-            <a:ext cx="8083296" cy="365760"/>
-          </a:xfrm>
-          <a:prstGeom prst="rect">
-            <a:avLst/>
-          </a:prstGeom>
-          <a:noFill/>
-        </p:spPr>
-        <p:txBody>
-          <a:bodyPr wrap="square" lIns="0" rIns="0" tIns="0" bIns="0">
-            <a:spAutoFit/>
-          </a:bodyPr>
-          <a:lstStyle/>
-          <a:p>
-            <a:pPr algn="l">
-              <a:lnSpc>
-                <a:spcPct val="122000"/>
-              </a:lnSpc>
-              <a:spcAft>
-                <a:spcPts val="200"/>
-              </a:spcAft>
-            </a:pPr>
-            <a:r>
-              <a:rPr sz="2000" b="0">
-                <a:solidFill>
-                  <a:srgbClr val="1E293B"/>
-                </a:solidFill>
-                <a:latin typeface="Arial"/>
-              </a:rPr>
-              <a:t>of GPS track</a:t>
-            </a:r>
-          </a:p>
-        </p:txBody>
-      </p:sp>
-      <p:sp>
-        <p:nvSpPr>
-          <p:cNvPr id="19" name="TextBox 18"/>
-          <p:cNvSpPr txBox="1"/>
-          <p:nvPr/>
-        </p:nvSpPr>
-        <p:spPr>
-          <a:xfrm>
-            <a:off x="17903952" y="11825224"/>
-            <a:ext cx="8083296" cy="365760"/>
-          </a:xfrm>
-          <a:prstGeom prst="rect">
-            <a:avLst/>
-          </a:prstGeom>
-          <a:noFill/>
-        </p:spPr>
-        <p:txBody>
-          <a:bodyPr wrap="square" lIns="0" rIns="0" tIns="0" bIns="0">
-            <a:spAutoFit/>
-          </a:bodyPr>
-          <a:lstStyle/>
-          <a:p>
-            <a:pPr algn="l">
-              <a:lnSpc>
-                <a:spcPct val="122000"/>
-              </a:lnSpc>
-              <a:spcAft>
-                <a:spcPts val="0"/>
-              </a:spcAft>
-            </a:pPr>
-            <a:r>
-              <a:rPr sz="1600" b="0">
-                <a:solidFill>
-                  <a:srgbClr val="556575"/>
-                </a:solidFill>
-                <a:latin typeface="Arial"/>
-              </a:rPr>
-              <a:t>1,502 fixes over 18 drives</a:t>
-            </a:r>
-          </a:p>
-        </p:txBody>
-      </p:sp>
-      <p:sp>
-        <p:nvSpPr>
-          <p:cNvPr id="20" name="TextBox 19"/>
-          <p:cNvSpPr txBox="1"/>
-          <p:nvPr/>
-        </p:nvSpPr>
-        <p:spPr>
-          <a:xfrm>
-            <a:off x="26490168" y="10764520"/>
-            <a:ext cx="8083296" cy="365760"/>
-          </a:xfrm>
-          <a:prstGeom prst="rect">
-            <a:avLst/>
-          </a:prstGeom>
-          <a:noFill/>
-        </p:spPr>
-        <p:txBody>
-          <a:bodyPr wrap="square" lIns="0" rIns="0" tIns="0" bIns="0">
-            <a:spAutoFit/>
-          </a:bodyPr>
-          <a:lstStyle/>
-          <a:p>
-            <a:pPr algn="l">
-              <a:lnSpc>
-                <a:spcPct val="95000"/>
-              </a:lnSpc>
-              <a:spcAft>
-                <a:spcPts val="0"/>
-              </a:spcAft>
-            </a:pPr>
-            <a:r>
-              <a:rPr sz="5600" b="1">
-                <a:solidFill>
-                  <a:srgbClr val="1C6FB5"/>
-                </a:solidFill>
-                <a:latin typeface="Arial"/>
-              </a:rPr>
-              <a:t>75</a:t>
-            </a:r>
-          </a:p>
-        </p:txBody>
-      </p:sp>
-      <p:sp>
-        <p:nvSpPr>
-          <p:cNvPr id="21" name="TextBox 20"/>
-          <p:cNvSpPr txBox="1"/>
-          <p:nvPr/>
-        </p:nvSpPr>
-        <p:spPr>
-          <a:xfrm>
-            <a:off x="26490168" y="11489944"/>
-            <a:ext cx="8083296" cy="365760"/>
-          </a:xfrm>
-          <a:prstGeom prst="rect">
-            <a:avLst/>
-          </a:prstGeom>
-          <a:noFill/>
-        </p:spPr>
-        <p:txBody>
-          <a:bodyPr wrap="square" lIns="0" rIns="0" tIns="0" bIns="0">
-            <a:spAutoFit/>
-          </a:bodyPr>
-          <a:lstStyle/>
-          <a:p>
-            <a:pPr algn="l">
-              <a:lnSpc>
-                <a:spcPct val="122000"/>
-              </a:lnSpc>
-              <a:spcAft>
-                <a:spcPts val="200"/>
-              </a:spcAft>
-            </a:pPr>
-            <a:r>
-              <a:rPr sz="2000" b="0">
-                <a:solidFill>
-                  <a:srgbClr val="1E293B"/>
-                </a:solidFill>
-                <a:latin typeface="Arial"/>
-              </a:rPr>
-              <a:t>cart frames in a field</a:t>
-            </a:r>
-          </a:p>
-        </p:txBody>
-      </p:sp>
-      <p:sp>
-        <p:nvSpPr>
-          <p:cNvPr id="22" name="TextBox 21"/>
-          <p:cNvSpPr txBox="1"/>
-          <p:nvPr/>
-        </p:nvSpPr>
-        <p:spPr>
-          <a:xfrm>
-            <a:off x="26490168" y="11825224"/>
-            <a:ext cx="8083296" cy="365760"/>
-          </a:xfrm>
-          <a:prstGeom prst="rect">
-            <a:avLst/>
-          </a:prstGeom>
-          <a:noFill/>
-        </p:spPr>
-        <p:txBody>
-          <a:bodyPr wrap="square" lIns="0" rIns="0" tIns="0" bIns="0">
-            <a:spAutoFit/>
-          </a:bodyPr>
-          <a:lstStyle/>
-          <a:p>
-            <a:pPr algn="l">
-              <a:lnSpc>
-                <a:spcPct val="122000"/>
-              </a:lnSpc>
-              <a:spcAft>
-                <a:spcPts val="0"/>
-              </a:spcAft>
-            </a:pPr>
-            <a:r>
-              <a:rPr sz="1600" b="0">
-                <a:solidFill>
-                  <a:srgbClr val="556575"/>
-                </a:solidFill>
-                <a:latin typeface="Arial"/>
-              </a:rPr>
-              <a:t>of 427 the cart has recorded</a:t>
-            </a:r>
-          </a:p>
-        </p:txBody>
-      </p:sp>
-      <p:sp>
-        <p:nvSpPr>
-          <p:cNvPr id="23" name="TextBox 22"/>
-          <p:cNvSpPr txBox="1"/>
-          <p:nvPr/>
-        </p:nvSpPr>
-        <p:spPr>
-          <a:xfrm>
-            <a:off x="35076384" y="10764520"/>
-            <a:ext cx="8083296" cy="365760"/>
-          </a:xfrm>
-          <a:prstGeom prst="rect">
-            <a:avLst/>
-          </a:prstGeom>
-          <a:noFill/>
-        </p:spPr>
-        <p:txBody>
-          <a:bodyPr wrap="square" lIns="0" rIns="0" tIns="0" bIns="0">
-            <a:spAutoFit/>
-          </a:bodyPr>
-          <a:lstStyle/>
-          <a:p>
-            <a:pPr algn="l">
-              <a:lnSpc>
-                <a:spcPct val="95000"/>
-              </a:lnSpc>
-              <a:spcAft>
-                <a:spcPts val="0"/>
-              </a:spcAft>
-            </a:pPr>
-            <a:r>
-              <a:rPr sz="5600" b="1">
-                <a:solidFill>
-                  <a:srgbClr val="1C6FB5"/>
-                </a:solidFill>
-                <a:latin typeface="Arial"/>
-              </a:rPr>
-              <a:t>0</a:t>
-            </a:r>
-          </a:p>
-        </p:txBody>
-      </p:sp>
-      <p:sp>
-        <p:nvSpPr>
-          <p:cNvPr id="24" name="TextBox 23"/>
-          <p:cNvSpPr txBox="1"/>
-          <p:nvPr/>
-        </p:nvSpPr>
-        <p:spPr>
-          <a:xfrm>
-            <a:off x="35076384" y="11489944"/>
-            <a:ext cx="8083296" cy="365760"/>
-          </a:xfrm>
-          <a:prstGeom prst="rect">
-            <a:avLst/>
-          </a:prstGeom>
-          <a:noFill/>
-        </p:spPr>
-        <p:txBody>
-          <a:bodyPr wrap="square" lIns="0" rIns="0" tIns="0" bIns="0">
-            <a:spAutoFit/>
-          </a:bodyPr>
-          <a:lstStyle/>
-          <a:p>
-            <a:pPr algn="l">
-              <a:lnSpc>
-                <a:spcPct val="122000"/>
-              </a:lnSpc>
-              <a:spcAft>
-                <a:spcPts val="200"/>
-              </a:spcAft>
-            </a:pPr>
-            <a:r>
-              <a:rPr sz="2000" b="0">
-                <a:solidFill>
-                  <a:srgbClr val="1E293B"/>
-                </a:solidFill>
-                <a:latin typeface="Arial"/>
-              </a:rPr>
-              <a:t>of them labelled</a:t>
-            </a:r>
-          </a:p>
-        </p:txBody>
-      </p:sp>
-      <p:sp>
-        <p:nvSpPr>
-          <p:cNvPr id="25" name="TextBox 24"/>
-          <p:cNvSpPr txBox="1"/>
-          <p:nvPr/>
-        </p:nvSpPr>
-        <p:spPr>
-          <a:xfrm>
-            <a:off x="35076384" y="11825224"/>
-            <a:ext cx="8083296" cy="365760"/>
-          </a:xfrm>
-          <a:prstGeom prst="rect">
-            <a:avLst/>
-          </a:prstGeom>
-          <a:noFill/>
-        </p:spPr>
-        <p:txBody>
-          <a:bodyPr wrap="square" lIns="0" rIns="0" tIns="0" bIns="0">
-            <a:spAutoFit/>
-          </a:bodyPr>
-          <a:lstStyle/>
-          <a:p>
-            <a:pPr algn="l">
-              <a:lnSpc>
-                <a:spcPct val="122000"/>
-              </a:lnSpc>
-              <a:spcAft>
-                <a:spcPts val="0"/>
-              </a:spcAft>
-            </a:pPr>
-            <a:r>
-              <a:rPr sz="1600" b="0">
-                <a:solidFill>
-                  <a:srgbClr val="556575"/>
-                </a:solidFill>
-                <a:latin typeface="Arial"/>
-              </a:rPr>
-              <a:t>the whole archive, so far</a:t>
-            </a:r>
-          </a:p>
-        </p:txBody>
-      </p:sp>
-      <p:sp>
-        <p:nvSpPr>
-          <p:cNvPr id="26" name="Rectangle 25"/>
+              <a:t>Figure 1.  Four frames as recorded, unenhanced and unlabelled. The rectangle in (c) is the cart's fixed work-zone overlay. It is drawn on every frame, including the ones with no vegetation in them.</a:t>
+            </a:r>
+          </a:p>
+        </p:txBody>
+      </p:sp>
+      <p:sp>
+        <p:nvSpPr>
+          <p:cNvPr id="11" name="Rectangle 10"/>
           <p:cNvSpPr/>
           <p:nvPr/>
         </p:nvSpPr>
         <p:spPr>
           <a:xfrm>
-            <a:off x="731520" y="12164568"/>
+            <a:off x="731520" y="10581640"/>
             <a:ext cx="42428160" cy="23774"/>
           </a:xfrm>
           <a:prstGeom prst="rect">
@@ -4130,14 +3500,14 @@
       </p:sp>
       <p:sp>
         <p:nvSpPr>
-          <p:cNvPr id="27" name="TextBox 26"/>
-          <p:cNvSpPr txBox="1"/>
-          <p:nvPr/>
-        </p:nvSpPr>
-        <p:spPr>
-          <a:xfrm>
-            <a:off x="731520" y="12512039"/>
-            <a:ext cx="10607040" cy="365760"/>
+          <p:cNvPr id="12" name="TextBox 11"/>
+          <p:cNvSpPr txBox="1"/>
+          <p:nvPr/>
+        </p:nvSpPr>
+        <p:spPr>
+          <a:xfrm>
+            <a:off x="731520" y="10764520"/>
+            <a:ext cx="8083296" cy="365760"/>
           </a:xfrm>
           <a:prstGeom prst="rect">
             <a:avLst/>
@@ -4159,33 +3529,621 @@
               </a:spcAft>
             </a:pPr>
             <a:r>
-              <a:rPr sz="3400" b="1">
-                <a:solidFill>
-                  <a:srgbClr val="14314E"/>
-                </a:solidFill>
-                <a:latin typeface="Arial"/>
-              </a:rPr>
-              <a:t>How a drive becomes a dataset</a:t>
-            </a:r>
-          </a:p>
-        </p:txBody>
-      </p:sp>
-      <p:sp>
-        <p:nvSpPr>
-          <p:cNvPr id="28" name="Rectangle 27"/>
+              <a:rPr sz="5600" b="1">
+                <a:solidFill>
+                  <a:srgbClr val="1C6FB5"/>
+                </a:solidFill>
+                <a:latin typeface="Arial"/>
+              </a:rPr>
+              <a:t>2,686</a:t>
+            </a:r>
+          </a:p>
+        </p:txBody>
+      </p:sp>
+      <p:sp>
+        <p:nvSpPr>
+          <p:cNvPr id="13" name="TextBox 12"/>
+          <p:cNvSpPr txBox="1"/>
+          <p:nvPr/>
+        </p:nvSpPr>
+        <p:spPr>
+          <a:xfrm>
+            <a:off x="731520" y="11489944"/>
+            <a:ext cx="8083296" cy="365760"/>
+          </a:xfrm>
+          <a:prstGeom prst="rect">
+            <a:avLst/>
+          </a:prstGeom>
+          <a:noFill/>
+        </p:spPr>
+        <p:txBody>
+          <a:bodyPr wrap="square" lIns="0" rIns="0" tIns="0" bIns="0">
+            <a:spAutoFit/>
+          </a:bodyPr>
+          <a:lstStyle/>
+          <a:p>
+            <a:pPr algn="l">
+              <a:lnSpc>
+                <a:spcPct val="122000"/>
+              </a:lnSpc>
+              <a:spcAft>
+                <a:spcPts val="200"/>
+              </a:spcAft>
+            </a:pPr>
+            <a:r>
+              <a:rPr sz="2000" b="0">
+                <a:solidFill>
+                  <a:srgbClr val="1E293B"/>
+                </a:solidFill>
+                <a:latin typeface="Arial"/>
+              </a:rPr>
+              <a:t>camera frames</a:t>
+            </a:r>
+          </a:p>
+        </p:txBody>
+      </p:sp>
+      <p:sp>
+        <p:nvSpPr>
+          <p:cNvPr id="14" name="TextBox 13"/>
+          <p:cNvSpPr txBox="1"/>
+          <p:nvPr/>
+        </p:nvSpPr>
+        <p:spPr>
+          <a:xfrm>
+            <a:off x="731520" y="11825224"/>
+            <a:ext cx="8083296" cy="365760"/>
+          </a:xfrm>
+          <a:prstGeom prst="rect">
+            <a:avLst/>
+          </a:prstGeom>
+          <a:noFill/>
+        </p:spPr>
+        <p:txBody>
+          <a:bodyPr wrap="square" lIns="0" rIns="0" tIns="0" bIns="0">
+            <a:spAutoFit/>
+          </a:bodyPr>
+          <a:lstStyle/>
+          <a:p>
+            <a:pPr algn="l">
+              <a:lnSpc>
+                <a:spcPct val="122000"/>
+              </a:lnSpc>
+              <a:spcAft>
+                <a:spcPts val="0"/>
+              </a:spcAft>
+            </a:pPr>
+            <a:r>
+              <a:rPr sz="1600" b="0">
+                <a:solidFill>
+                  <a:srgbClr val="556575"/>
+                </a:solidFill>
+                <a:latin typeface="Arial"/>
+              </a:rPr>
+              <a:t>26 drives, 2 robots</a:t>
+            </a:r>
+          </a:p>
+        </p:txBody>
+      </p:sp>
+      <p:sp>
+        <p:nvSpPr>
+          <p:cNvPr id="15" name="TextBox 14"/>
+          <p:cNvSpPr txBox="1"/>
+          <p:nvPr/>
+        </p:nvSpPr>
+        <p:spPr>
+          <a:xfrm>
+            <a:off x="9317736" y="10764520"/>
+            <a:ext cx="8083296" cy="365760"/>
+          </a:xfrm>
+          <a:prstGeom prst="rect">
+            <a:avLst/>
+          </a:prstGeom>
+          <a:noFill/>
+        </p:spPr>
+        <p:txBody>
+          <a:bodyPr wrap="square" lIns="0" rIns="0" tIns="0" bIns="0">
+            <a:spAutoFit/>
+          </a:bodyPr>
+          <a:lstStyle/>
+          <a:p>
+            <a:pPr algn="l">
+              <a:lnSpc>
+                <a:spcPct val="95000"/>
+              </a:lnSpc>
+              <a:spcAft>
+                <a:spcPts val="0"/>
+              </a:spcAft>
+            </a:pPr>
+            <a:r>
+              <a:rPr sz="5600" b="1">
+                <a:solidFill>
+                  <a:srgbClr val="1C6FB5"/>
+                </a:solidFill>
+                <a:latin typeface="Arial"/>
+              </a:rPr>
+              <a:t>91,955</a:t>
+            </a:r>
+          </a:p>
+        </p:txBody>
+      </p:sp>
+      <p:sp>
+        <p:nvSpPr>
+          <p:cNvPr id="16" name="TextBox 15"/>
+          <p:cNvSpPr txBox="1"/>
+          <p:nvPr/>
+        </p:nvSpPr>
+        <p:spPr>
+          <a:xfrm>
+            <a:off x="9317736" y="11489944"/>
+            <a:ext cx="8083296" cy="365760"/>
+          </a:xfrm>
+          <a:prstGeom prst="rect">
+            <a:avLst/>
+          </a:prstGeom>
+          <a:noFill/>
+        </p:spPr>
+        <p:txBody>
+          <a:bodyPr wrap="square" lIns="0" rIns="0" tIns="0" bIns="0">
+            <a:spAutoFit/>
+          </a:bodyPr>
+          <a:lstStyle/>
+          <a:p>
+            <a:pPr algn="l">
+              <a:lnSpc>
+                <a:spcPct val="122000"/>
+              </a:lnSpc>
+              <a:spcAft>
+                <a:spcPts val="200"/>
+              </a:spcAft>
+            </a:pPr>
+            <a:r>
+              <a:rPr sz="2000" b="0">
+                <a:solidFill>
+                  <a:srgbClr val="1E293B"/>
+                </a:solidFill>
+                <a:latin typeface="Arial"/>
+              </a:rPr>
+              <a:t>telemetry rows</a:t>
+            </a:r>
+          </a:p>
+        </p:txBody>
+      </p:sp>
+      <p:sp>
+        <p:nvSpPr>
+          <p:cNvPr id="17" name="TextBox 16"/>
+          <p:cNvSpPr txBox="1"/>
+          <p:nvPr/>
+        </p:nvSpPr>
+        <p:spPr>
+          <a:xfrm>
+            <a:off x="9317736" y="11825224"/>
+            <a:ext cx="8083296" cy="365760"/>
+          </a:xfrm>
+          <a:prstGeom prst="rect">
+            <a:avLst/>
+          </a:prstGeom>
+          <a:noFill/>
+        </p:spPr>
+        <p:txBody>
+          <a:bodyPr wrap="square" lIns="0" rIns="0" tIns="0" bIns="0">
+            <a:spAutoFit/>
+          </a:bodyPr>
+          <a:lstStyle/>
+          <a:p>
+            <a:pPr algn="l">
+              <a:lnSpc>
+                <a:spcPct val="122000"/>
+              </a:lnSpc>
+              <a:spcAft>
+                <a:spcPts val="0"/>
+              </a:spcAft>
+            </a:pPr>
+            <a:r>
+              <a:rPr sz="1600" b="0">
+                <a:solidFill>
+                  <a:srgbClr val="556575"/>
+                </a:solidFill>
+                <a:latin typeface="Arial"/>
+              </a:rPr>
+              <a:t>nine streams, counted line by line</a:t>
+            </a:r>
+          </a:p>
+        </p:txBody>
+      </p:sp>
+      <p:sp>
+        <p:nvSpPr>
+          <p:cNvPr id="18" name="TextBox 17"/>
+          <p:cNvSpPr txBox="1"/>
+          <p:nvPr/>
+        </p:nvSpPr>
+        <p:spPr>
+          <a:xfrm>
+            <a:off x="17903952" y="10764520"/>
+            <a:ext cx="8083296" cy="365760"/>
+          </a:xfrm>
+          <a:prstGeom prst="rect">
+            <a:avLst/>
+          </a:prstGeom>
+          <a:noFill/>
+        </p:spPr>
+        <p:txBody>
+          <a:bodyPr wrap="square" lIns="0" rIns="0" tIns="0" bIns="0">
+            <a:spAutoFit/>
+          </a:bodyPr>
+          <a:lstStyle/>
+          <a:p>
+            <a:pPr algn="l">
+              <a:lnSpc>
+                <a:spcPct val="95000"/>
+              </a:lnSpc>
+              <a:spcAft>
+                <a:spcPts val="0"/>
+              </a:spcAft>
+            </a:pPr>
+            <a:r>
+              <a:rPr sz="5600" b="1">
+                <a:solidFill>
+                  <a:srgbClr val="1C6FB5"/>
+                </a:solidFill>
+                <a:latin typeface="Arial"/>
+              </a:rPr>
+              <a:t>342 m</a:t>
+            </a:r>
+          </a:p>
+        </p:txBody>
+      </p:sp>
+      <p:sp>
+        <p:nvSpPr>
+          <p:cNvPr id="19" name="TextBox 18"/>
+          <p:cNvSpPr txBox="1"/>
+          <p:nvPr/>
+        </p:nvSpPr>
+        <p:spPr>
+          <a:xfrm>
+            <a:off x="17903952" y="11489944"/>
+            <a:ext cx="8083296" cy="365760"/>
+          </a:xfrm>
+          <a:prstGeom prst="rect">
+            <a:avLst/>
+          </a:prstGeom>
+          <a:noFill/>
+        </p:spPr>
+        <p:txBody>
+          <a:bodyPr wrap="square" lIns="0" rIns="0" tIns="0" bIns="0">
+            <a:spAutoFit/>
+          </a:bodyPr>
+          <a:lstStyle/>
+          <a:p>
+            <a:pPr algn="l">
+              <a:lnSpc>
+                <a:spcPct val="122000"/>
+              </a:lnSpc>
+              <a:spcAft>
+                <a:spcPts val="200"/>
+              </a:spcAft>
+            </a:pPr>
+            <a:r>
+              <a:rPr sz="2000" b="0">
+                <a:solidFill>
+                  <a:srgbClr val="1E293B"/>
+                </a:solidFill>
+                <a:latin typeface="Arial"/>
+              </a:rPr>
+              <a:t>of GPS track</a:t>
+            </a:r>
+          </a:p>
+        </p:txBody>
+      </p:sp>
+      <p:sp>
+        <p:nvSpPr>
+          <p:cNvPr id="20" name="TextBox 19"/>
+          <p:cNvSpPr txBox="1"/>
+          <p:nvPr/>
+        </p:nvSpPr>
+        <p:spPr>
+          <a:xfrm>
+            <a:off x="17903952" y="11825224"/>
+            <a:ext cx="8083296" cy="365760"/>
+          </a:xfrm>
+          <a:prstGeom prst="rect">
+            <a:avLst/>
+          </a:prstGeom>
+          <a:noFill/>
+        </p:spPr>
+        <p:txBody>
+          <a:bodyPr wrap="square" lIns="0" rIns="0" tIns="0" bIns="0">
+            <a:spAutoFit/>
+          </a:bodyPr>
+          <a:lstStyle/>
+          <a:p>
+            <a:pPr algn="l">
+              <a:lnSpc>
+                <a:spcPct val="122000"/>
+              </a:lnSpc>
+              <a:spcAft>
+                <a:spcPts val="0"/>
+              </a:spcAft>
+            </a:pPr>
+            <a:r>
+              <a:rPr sz="1600" b="0">
+                <a:solidFill>
+                  <a:srgbClr val="556575"/>
+                </a:solidFill>
+                <a:latin typeface="Arial"/>
+              </a:rPr>
+              <a:t>1,502 fixes over 18 drives</a:t>
+            </a:r>
+          </a:p>
+        </p:txBody>
+      </p:sp>
+      <p:sp>
+        <p:nvSpPr>
+          <p:cNvPr id="21" name="TextBox 20"/>
+          <p:cNvSpPr txBox="1"/>
+          <p:nvPr/>
+        </p:nvSpPr>
+        <p:spPr>
+          <a:xfrm>
+            <a:off x="26490168" y="10764520"/>
+            <a:ext cx="8083296" cy="365760"/>
+          </a:xfrm>
+          <a:prstGeom prst="rect">
+            <a:avLst/>
+          </a:prstGeom>
+          <a:noFill/>
+        </p:spPr>
+        <p:txBody>
+          <a:bodyPr wrap="square" lIns="0" rIns="0" tIns="0" bIns="0">
+            <a:spAutoFit/>
+          </a:bodyPr>
+          <a:lstStyle/>
+          <a:p>
+            <a:pPr algn="l">
+              <a:lnSpc>
+                <a:spcPct val="95000"/>
+              </a:lnSpc>
+              <a:spcAft>
+                <a:spcPts val="0"/>
+              </a:spcAft>
+            </a:pPr>
+            <a:r>
+              <a:rPr sz="5600" b="1">
+                <a:solidFill>
+                  <a:srgbClr val="1C6FB5"/>
+                </a:solidFill>
+                <a:latin typeface="Arial"/>
+              </a:rPr>
+              <a:t>75</a:t>
+            </a:r>
+          </a:p>
+        </p:txBody>
+      </p:sp>
+      <p:sp>
+        <p:nvSpPr>
+          <p:cNvPr id="22" name="TextBox 21"/>
+          <p:cNvSpPr txBox="1"/>
+          <p:nvPr/>
+        </p:nvSpPr>
+        <p:spPr>
+          <a:xfrm>
+            <a:off x="26490168" y="11489944"/>
+            <a:ext cx="8083296" cy="365760"/>
+          </a:xfrm>
+          <a:prstGeom prst="rect">
+            <a:avLst/>
+          </a:prstGeom>
+          <a:noFill/>
+        </p:spPr>
+        <p:txBody>
+          <a:bodyPr wrap="square" lIns="0" rIns="0" tIns="0" bIns="0">
+            <a:spAutoFit/>
+          </a:bodyPr>
+          <a:lstStyle/>
+          <a:p>
+            <a:pPr algn="l">
+              <a:lnSpc>
+                <a:spcPct val="122000"/>
+              </a:lnSpc>
+              <a:spcAft>
+                <a:spcPts val="200"/>
+              </a:spcAft>
+            </a:pPr>
+            <a:r>
+              <a:rPr sz="2000" b="0">
+                <a:solidFill>
+                  <a:srgbClr val="1E293B"/>
+                </a:solidFill>
+                <a:latin typeface="Arial"/>
+              </a:rPr>
+              <a:t>cart frames in a field</a:t>
+            </a:r>
+          </a:p>
+        </p:txBody>
+      </p:sp>
+      <p:sp>
+        <p:nvSpPr>
+          <p:cNvPr id="23" name="TextBox 22"/>
+          <p:cNvSpPr txBox="1"/>
+          <p:nvPr/>
+        </p:nvSpPr>
+        <p:spPr>
+          <a:xfrm>
+            <a:off x="26490168" y="11825224"/>
+            <a:ext cx="8083296" cy="365760"/>
+          </a:xfrm>
+          <a:prstGeom prst="rect">
+            <a:avLst/>
+          </a:prstGeom>
+          <a:noFill/>
+        </p:spPr>
+        <p:txBody>
+          <a:bodyPr wrap="square" lIns="0" rIns="0" tIns="0" bIns="0">
+            <a:spAutoFit/>
+          </a:bodyPr>
+          <a:lstStyle/>
+          <a:p>
+            <a:pPr algn="l">
+              <a:lnSpc>
+                <a:spcPct val="122000"/>
+              </a:lnSpc>
+              <a:spcAft>
+                <a:spcPts val="0"/>
+              </a:spcAft>
+            </a:pPr>
+            <a:r>
+              <a:rPr sz="1600" b="0">
+                <a:solidFill>
+                  <a:srgbClr val="556575"/>
+                </a:solidFill>
+                <a:latin typeface="Arial"/>
+              </a:rPr>
+              <a:t>of 427 the cart has recorded</a:t>
+            </a:r>
+          </a:p>
+        </p:txBody>
+      </p:sp>
+      <p:sp>
+        <p:nvSpPr>
+          <p:cNvPr id="24" name="TextBox 23"/>
+          <p:cNvSpPr txBox="1"/>
+          <p:nvPr/>
+        </p:nvSpPr>
+        <p:spPr>
+          <a:xfrm>
+            <a:off x="35076384" y="10764520"/>
+            <a:ext cx="8083296" cy="365760"/>
+          </a:xfrm>
+          <a:prstGeom prst="rect">
+            <a:avLst/>
+          </a:prstGeom>
+          <a:noFill/>
+        </p:spPr>
+        <p:txBody>
+          <a:bodyPr wrap="square" lIns="0" rIns="0" tIns="0" bIns="0">
+            <a:spAutoFit/>
+          </a:bodyPr>
+          <a:lstStyle/>
+          <a:p>
+            <a:pPr algn="l">
+              <a:lnSpc>
+                <a:spcPct val="95000"/>
+              </a:lnSpc>
+              <a:spcAft>
+                <a:spcPts val="0"/>
+              </a:spcAft>
+            </a:pPr>
+            <a:r>
+              <a:rPr sz="5600" b="1">
+                <a:solidFill>
+                  <a:srgbClr val="1C6FB5"/>
+                </a:solidFill>
+                <a:latin typeface="Arial"/>
+              </a:rPr>
+              <a:t>0</a:t>
+            </a:r>
+          </a:p>
+        </p:txBody>
+      </p:sp>
+      <p:sp>
+        <p:nvSpPr>
+          <p:cNvPr id="25" name="TextBox 24"/>
+          <p:cNvSpPr txBox="1"/>
+          <p:nvPr/>
+        </p:nvSpPr>
+        <p:spPr>
+          <a:xfrm>
+            <a:off x="35076384" y="11489944"/>
+            <a:ext cx="8083296" cy="365760"/>
+          </a:xfrm>
+          <a:prstGeom prst="rect">
+            <a:avLst/>
+          </a:prstGeom>
+          <a:noFill/>
+        </p:spPr>
+        <p:txBody>
+          <a:bodyPr wrap="square" lIns="0" rIns="0" tIns="0" bIns="0">
+            <a:spAutoFit/>
+          </a:bodyPr>
+          <a:lstStyle/>
+          <a:p>
+            <a:pPr algn="l">
+              <a:lnSpc>
+                <a:spcPct val="122000"/>
+              </a:lnSpc>
+              <a:spcAft>
+                <a:spcPts val="200"/>
+              </a:spcAft>
+            </a:pPr>
+            <a:r>
+              <a:rPr sz="2000" b="0">
+                <a:solidFill>
+                  <a:srgbClr val="1E293B"/>
+                </a:solidFill>
+                <a:latin typeface="Arial"/>
+              </a:rPr>
+              <a:t>of them labelled</a:t>
+            </a:r>
+          </a:p>
+        </p:txBody>
+      </p:sp>
+      <p:sp>
+        <p:nvSpPr>
+          <p:cNvPr id="26" name="TextBox 25"/>
+          <p:cNvSpPr txBox="1"/>
+          <p:nvPr/>
+        </p:nvSpPr>
+        <p:spPr>
+          <a:xfrm>
+            <a:off x="35076384" y="11825224"/>
+            <a:ext cx="8083296" cy="365760"/>
+          </a:xfrm>
+          <a:prstGeom prst="rect">
+            <a:avLst/>
+          </a:prstGeom>
+          <a:noFill/>
+        </p:spPr>
+        <p:txBody>
+          <a:bodyPr wrap="square" lIns="0" rIns="0" tIns="0" bIns="0">
+            <a:spAutoFit/>
+          </a:bodyPr>
+          <a:lstStyle/>
+          <a:p>
+            <a:pPr algn="l">
+              <a:lnSpc>
+                <a:spcPct val="122000"/>
+              </a:lnSpc>
+              <a:spcAft>
+                <a:spcPts val="0"/>
+              </a:spcAft>
+            </a:pPr>
+            <a:r>
+              <a:rPr sz="1600" b="0">
+                <a:solidFill>
+                  <a:srgbClr val="556575"/>
+                </a:solidFill>
+                <a:latin typeface="Arial"/>
+              </a:rPr>
+              <a:t>the whole archive, so far</a:t>
+            </a:r>
+          </a:p>
+        </p:txBody>
+      </p:sp>
+      <p:sp>
+        <p:nvSpPr>
+          <p:cNvPr id="27" name="Rectangle 26"/>
           <p:cNvSpPr/>
           <p:nvPr/>
         </p:nvSpPr>
         <p:spPr>
           <a:xfrm>
-            <a:off x="731520" y="13078967"/>
-            <a:ext cx="10607040" cy="27432"/>
+            <a:off x="731520" y="12164568"/>
+            <a:ext cx="42428160" cy="23774"/>
           </a:xfrm>
           <a:prstGeom prst="rect">
             <a:avLst/>
           </a:prstGeom>
           <a:solidFill>
-            <a:srgbClr val="1C6FB5"/>
+            <a:srgbClr val="C2CEDA"/>
           </a:solidFill>
           <a:ln>
             <a:noFill/>
@@ -4216,13 +4174,13 @@
       </p:sp>
       <p:sp>
         <p:nvSpPr>
-          <p:cNvPr id="29" name="TextBox 28"/>
-          <p:cNvSpPr txBox="1"/>
-          <p:nvPr/>
-        </p:nvSpPr>
-        <p:spPr>
-          <a:xfrm>
-            <a:off x="731520" y="13408151"/>
+          <p:cNvPr id="28" name="TextBox 27"/>
+          <p:cNvSpPr txBox="1"/>
+          <p:nvPr/>
+        </p:nvSpPr>
+        <p:spPr>
+          <a:xfrm>
+            <a:off x="731520" y="12512039"/>
             <a:ext cx="10607040" cy="365760"/>
           </a:xfrm>
           <a:prstGeom prst="rect">
@@ -4238,184 +4196,34 @@
           <a:p>
             <a:pPr algn="l">
               <a:lnSpc>
-                <a:spcPct val="122000"/>
-              </a:lnSpc>
-              <a:spcAft>
-                <a:spcPts val="2200"/>
-              </a:spcAft>
-            </a:pPr>
-            <a:r>
-              <a:rPr sz="2000" b="0">
-                <a:solidFill>
-                  <a:srgbClr val="1E293B"/>
-                </a:solidFill>
-                <a:latin typeface="Arial"/>
-              </a:rPr>
-              <a:t>A vehicle opens a session, the platform registers it as a governed dataset, and frames and sensor batches arrive over one API key while the vehicle is still driving. Robot 241 sends camera, GPS and two IMUs. The laser cart sends camera, laser state, vehicle telemetry and its own detections, and no position at all.</a:t>
-            </a:r>
-          </a:p>
-        </p:txBody>
-      </p:sp>
-      <p:sp>
-        <p:nvSpPr>
-          <p:cNvPr id="30" name="TextBox 29"/>
-          <p:cNvSpPr txBox="1"/>
-          <p:nvPr/>
-        </p:nvSpPr>
-        <p:spPr>
-          <a:xfrm>
-            <a:off x="731520" y="14927071"/>
-            <a:ext cx="10607040" cy="365760"/>
-          </a:xfrm>
-          <a:prstGeom prst="rect">
-            <a:avLst/>
-          </a:prstGeom>
-          <a:noFill/>
-        </p:spPr>
-        <p:txBody>
-          <a:bodyPr wrap="square" lIns="0" rIns="0" tIns="0" bIns="0">
-            <a:spAutoFit/>
-          </a:bodyPr>
-          <a:lstStyle/>
-          <a:p>
-            <a:pPr algn="l">
-              <a:lnSpc>
-                <a:spcPct val="100000"/>
+                <a:spcPct val="95000"/>
               </a:lnSpc>
               <a:spcAft>
                 <a:spcPts val="0"/>
               </a:spcAft>
             </a:pPr>
             <a:r>
-              <a:rPr sz="2400" b="1">
-                <a:solidFill>
-                  <a:srgbClr val="1E293B"/>
-                </a:solidFill>
-                <a:latin typeface="Arial"/>
-              </a:rPr>
-              <a:t>213 seconds in one crop plot</a:t>
-            </a:r>
-          </a:p>
-        </p:txBody>
-      </p:sp>
-      <p:pic>
-        <p:nvPicPr>
-          <p:cNvPr id="31" name="Picture 30" descr="h_drive.png"/>
-          <p:cNvPicPr>
-            <a:picLocks noChangeAspect="1"/>
-          </p:cNvPicPr>
-          <p:nvPr/>
-        </p:nvPicPr>
-        <p:blipFill>
-          <a:blip r:embed="rId3"/>
-          <a:stretch>
-            <a:fillRect/>
-          </a:stretch>
-        </p:blipFill>
-        <p:spPr>
-          <a:xfrm>
-            <a:off x="731520" y="15347695"/>
-            <a:ext cx="10607040" cy="4023360"/>
-          </a:xfrm>
-          <a:prstGeom prst="rect">
-            <a:avLst/>
-          </a:prstGeom>
-        </p:spPr>
-      </p:pic>
-      <p:sp>
-        <p:nvSpPr>
-          <p:cNvPr id="32" name="TextBox 31"/>
-          <p:cNvSpPr txBox="1"/>
-          <p:nvPr/>
-        </p:nvSpPr>
-        <p:spPr>
-          <a:xfrm>
-            <a:off x="731520" y="19480784"/>
-            <a:ext cx="10607040" cy="365760"/>
-          </a:xfrm>
-          <a:prstGeom prst="rect">
-            <a:avLst/>
-          </a:prstGeom>
-          <a:noFill/>
-        </p:spPr>
-        <p:txBody>
-          <a:bodyPr wrap="square" lIns="0" rIns="0" tIns="0" bIns="0">
-            <a:spAutoFit/>
-          </a:bodyPr>
-          <a:lstStyle/>
-          <a:p>
-            <a:pPr algn="l">
-              <a:lnSpc>
-                <a:spcPct val="118000"/>
-              </a:lnSpc>
-              <a:spcAft>
-                <a:spcPts val="0"/>
-              </a:spcAft>
-            </a:pPr>
-            <a:r>
-              <a:rPr sz="1600" b="0">
-                <a:solidFill>
-                  <a:srgbClr val="556575"/>
-                </a:solidFill>
-                <a:latin typeface="Arial"/>
-              </a:rPr>
-              <a:t>Figure 2.  Robot 241, 2026-08-29: one 213 s pass through a crop plot. (h) GPS track from the board fix. (i) IMU heading over the same pass.</a:t>
-            </a:r>
-          </a:p>
-        </p:txBody>
-      </p:sp>
-      <p:sp>
-        <p:nvSpPr>
-          <p:cNvPr id="33" name="TextBox 32"/>
-          <p:cNvSpPr txBox="1"/>
-          <p:nvPr/>
-        </p:nvSpPr>
-        <p:spPr>
-          <a:xfrm>
-            <a:off x="11704320" y="12512039"/>
-            <a:ext cx="20482560" cy="365760"/>
-          </a:xfrm>
-          <a:prstGeom prst="rect">
-            <a:avLst/>
-          </a:prstGeom>
-          <a:noFill/>
-        </p:spPr>
-        <p:txBody>
-          <a:bodyPr wrap="square" lIns="0" rIns="0" tIns="0" bIns="0">
-            <a:spAutoFit/>
-          </a:bodyPr>
-          <a:lstStyle/>
-          <a:p>
-            <a:pPr algn="l">
-              <a:lnSpc>
-                <a:spcPct val="95000"/>
-              </a:lnSpc>
-              <a:spcAft>
-                <a:spcPts val="0"/>
-              </a:spcAft>
-            </a:pPr>
-            <a:r>
               <a:rPr sz="3400" b="1">
                 <a:solidFill>
                   <a:srgbClr val="14314E"/>
                 </a:solidFill>
                 <a:latin typeface="Arial"/>
               </a:rPr>
-              <a:t>What the agents do with it</a:t>
-            </a:r>
-          </a:p>
-        </p:txBody>
-      </p:sp>
-      <p:sp>
-        <p:nvSpPr>
-          <p:cNvPr id="34" name="Rectangle 33"/>
+              <a:t>How a drive becomes a dataset</a:t>
+            </a:r>
+          </a:p>
+        </p:txBody>
+      </p:sp>
+      <p:sp>
+        <p:nvSpPr>
+          <p:cNvPr id="29" name="Rectangle 28"/>
           <p:cNvSpPr/>
           <p:nvPr/>
         </p:nvSpPr>
         <p:spPr>
           <a:xfrm>
-            <a:off x="11704320" y="13078967"/>
-            <a:ext cx="20482560" cy="27432"/>
+            <a:off x="731520" y="13073379"/>
+            <a:ext cx="10607040" cy="27432"/>
           </a:xfrm>
           <a:prstGeom prst="rect">
             <a:avLst/>
@@ -4450,24 +4258,108 @@
           </a:p>
         </p:txBody>
       </p:sp>
+      <p:sp>
+        <p:nvSpPr>
+          <p:cNvPr id="30" name="TextBox 29"/>
+          <p:cNvSpPr txBox="1"/>
+          <p:nvPr/>
+        </p:nvSpPr>
+        <p:spPr>
+          <a:xfrm>
+            <a:off x="731520" y="13402563"/>
+            <a:ext cx="10607040" cy="365760"/>
+          </a:xfrm>
+          <a:prstGeom prst="rect">
+            <a:avLst/>
+          </a:prstGeom>
+          <a:noFill/>
+        </p:spPr>
+        <p:txBody>
+          <a:bodyPr wrap="square" lIns="0" rIns="0" tIns="0" bIns="0">
+            <a:spAutoFit/>
+          </a:bodyPr>
+          <a:lstStyle/>
+          <a:p>
+            <a:pPr algn="l">
+              <a:lnSpc>
+                <a:spcPct val="122000"/>
+              </a:lnSpc>
+              <a:spcAft>
+                <a:spcPts val="2200"/>
+              </a:spcAft>
+            </a:pPr>
+            <a:r>
+              <a:rPr sz="2000" b="0">
+                <a:solidFill>
+                  <a:srgbClr val="1E293B"/>
+                </a:solidFill>
+                <a:latin typeface="Arial"/>
+              </a:rPr>
+              <a:t>A vehicle opens a session, the platform registers it as a governed dataset, and frames and sensor batches arrive over one API key while the vehicle is still driving. Robot 241 sends camera, GPS and two IMUs. The laser cart sends camera, laser state, vehicle telemetry and its own detections, and no position at all.</a:t>
+            </a:r>
+          </a:p>
+        </p:txBody>
+      </p:sp>
+      <p:sp>
+        <p:nvSpPr>
+          <p:cNvPr id="31" name="TextBox 30"/>
+          <p:cNvSpPr txBox="1"/>
+          <p:nvPr/>
+        </p:nvSpPr>
+        <p:spPr>
+          <a:xfrm>
+            <a:off x="731520" y="14921483"/>
+            <a:ext cx="10607040" cy="365760"/>
+          </a:xfrm>
+          <a:prstGeom prst="rect">
+            <a:avLst/>
+          </a:prstGeom>
+          <a:noFill/>
+        </p:spPr>
+        <p:txBody>
+          <a:bodyPr wrap="square" lIns="0" rIns="0" tIns="0" bIns="0">
+            <a:spAutoFit/>
+          </a:bodyPr>
+          <a:lstStyle/>
+          <a:p>
+            <a:pPr algn="l">
+              <a:lnSpc>
+                <a:spcPct val="100000"/>
+              </a:lnSpc>
+              <a:spcAft>
+                <a:spcPts val="0"/>
+              </a:spcAft>
+            </a:pPr>
+            <a:r>
+              <a:rPr sz="2400" b="1">
+                <a:solidFill>
+                  <a:srgbClr val="1E293B"/>
+                </a:solidFill>
+                <a:latin typeface="Arial"/>
+              </a:rPr>
+              <a:t>213 seconds in one crop plot</a:t>
+            </a:r>
+          </a:p>
+        </p:txBody>
+      </p:sp>
       <p:pic>
         <p:nvPicPr>
-          <p:cNvPr id="35" name="Picture 34" descr="n_system.png"/>
+          <p:cNvPr id="32" name="Picture 31" descr="h_drive.png"/>
           <p:cNvPicPr>
             <a:picLocks noChangeAspect="1"/>
           </p:cNvPicPr>
           <p:nvPr/>
         </p:nvPicPr>
         <p:blipFill>
-          <a:blip r:embed="rId4"/>
+          <a:blip r:embed="rId3"/>
           <a:stretch>
             <a:fillRect/>
           </a:stretch>
         </p:blipFill>
         <p:spPr>
           <a:xfrm>
-            <a:off x="11704320" y="13408151"/>
-            <a:ext cx="20482560" cy="3383280"/>
+            <a:off x="731520" y="15342108"/>
+            <a:ext cx="10607040" cy="4023360"/>
           </a:xfrm>
           <a:prstGeom prst="rect">
             <a:avLst/>
@@ -4476,13 +4368,55 @@
       </p:pic>
       <p:sp>
         <p:nvSpPr>
-          <p:cNvPr id="36" name="TextBox 35"/>
-          <p:cNvSpPr txBox="1"/>
-          <p:nvPr/>
-        </p:nvSpPr>
-        <p:spPr>
-          <a:xfrm>
-            <a:off x="11704320" y="16901160"/>
+          <p:cNvPr id="33" name="TextBox 32"/>
+          <p:cNvSpPr txBox="1"/>
+          <p:nvPr/>
+        </p:nvSpPr>
+        <p:spPr>
+          <a:xfrm>
+            <a:off x="731520" y="19475196"/>
+            <a:ext cx="10607040" cy="365760"/>
+          </a:xfrm>
+          <a:prstGeom prst="rect">
+            <a:avLst/>
+          </a:prstGeom>
+          <a:noFill/>
+        </p:spPr>
+        <p:txBody>
+          <a:bodyPr wrap="square" lIns="0" rIns="0" tIns="0" bIns="0">
+            <a:spAutoFit/>
+          </a:bodyPr>
+          <a:lstStyle/>
+          <a:p>
+            <a:pPr algn="l">
+              <a:lnSpc>
+                <a:spcPct val="118000"/>
+              </a:lnSpc>
+              <a:spcAft>
+                <a:spcPts val="0"/>
+              </a:spcAft>
+            </a:pPr>
+            <a:r>
+              <a:rPr sz="1600" b="0">
+                <a:solidFill>
+                  <a:srgbClr val="556575"/>
+                </a:solidFill>
+                <a:latin typeface="Arial"/>
+              </a:rPr>
+              <a:t>Figure 2.  Robot 241, 2026-08-29: one 213 s pass through a crop plot. (h) GPS track from the board fix. (i) IMU heading over the same pass.</a:t>
+            </a:r>
+          </a:p>
+        </p:txBody>
+      </p:sp>
+      <p:sp>
+        <p:nvSpPr>
+          <p:cNvPr id="34" name="TextBox 33"/>
+          <p:cNvSpPr txBox="1"/>
+          <p:nvPr/>
+        </p:nvSpPr>
+        <p:spPr>
+          <a:xfrm>
+            <a:off x="11704320" y="12512039"/>
             <a:ext cx="20482560" cy="365760"/>
           </a:xfrm>
           <a:prstGeom prst="rect">
@@ -4498,226 +4432,34 @@
           <a:p>
             <a:pPr algn="l">
               <a:lnSpc>
-                <a:spcPct val="118000"/>
+                <a:spcPct val="95000"/>
               </a:lnSpc>
               <a:spcAft>
                 <a:spcPts val="0"/>
               </a:spcAft>
             </a:pPr>
             <a:r>
-              <a:rPr sz="1600" b="0">
-                <a:solidFill>
-                  <a:srgbClr val="556575"/>
-                </a:solidFill>
-                <a:latin typeface="Arial"/>
-              </a:rPr>
-              <a:t>Figure 3.  The path as built, from a camera in a crop row to a checkpoint on the cluster. Every stage has run. Three qualifications ride on it. The collector and trainer are paused after a stop-loss on 2026-08-29. The supervisor is advisory and nothing it says is applied. And the last link is not closed: no robot frame has entered training, because none of them is labelled yet.</a:t>
-            </a:r>
-          </a:p>
-        </p:txBody>
-      </p:sp>
-      <p:sp>
-        <p:nvSpPr>
-          <p:cNvPr id="37" name="TextBox 36"/>
-          <p:cNvSpPr txBox="1"/>
-          <p:nvPr/>
-        </p:nvSpPr>
-        <p:spPr>
-          <a:xfrm>
-            <a:off x="11704320" y="17691608"/>
-            <a:ext cx="20482560" cy="365760"/>
-          </a:xfrm>
-          <a:prstGeom prst="rect">
-            <a:avLst/>
-          </a:prstGeom>
-          <a:noFill/>
-        </p:spPr>
-        <p:txBody>
-          <a:bodyPr wrap="square" lIns="0" rIns="0" tIns="0" bIns="0">
-            <a:spAutoFit/>
-          </a:bodyPr>
-          <a:lstStyle/>
-          <a:p>
-            <a:pPr algn="l">
-              <a:lnSpc>
-                <a:spcPct val="100000"/>
-              </a:lnSpc>
-              <a:spcAft>
-                <a:spcPts val="0"/>
-              </a:spcAft>
-            </a:pPr>
-            <a:r>
-              <a:rPr sz="2400" b="1">
-                <a:solidFill>
-                  <a:srgbClr val="1E293B"/>
-                </a:solidFill>
-                <a:latin typeface="Arial"/>
-              </a:rPr>
-              <a:t>We let it run itself for fifteen rounds</a:t>
-            </a:r>
-          </a:p>
-        </p:txBody>
-      </p:sp>
-      <p:pic>
-        <p:nvPicPr>
-          <p:cNvPr id="38" name="Picture 37" descr="f_rounds.png"/>
-          <p:cNvPicPr>
-            <a:picLocks noChangeAspect="1"/>
-          </p:cNvPicPr>
-          <p:nvPr/>
-        </p:nvPicPr>
-        <p:blipFill>
-          <a:blip r:embed="rId5"/>
-          <a:stretch>
-            <a:fillRect/>
-          </a:stretch>
-        </p:blipFill>
-        <p:spPr>
-          <a:xfrm>
-            <a:off x="11704320" y="18112232"/>
-            <a:ext cx="20482560" cy="4663440"/>
-          </a:xfrm>
-          <a:prstGeom prst="rect">
-            <a:avLst/>
-          </a:prstGeom>
-        </p:spPr>
-      </p:pic>
-      <p:sp>
-        <p:nvSpPr>
-          <p:cNvPr id="39" name="TextBox 38"/>
-          <p:cNvSpPr txBox="1"/>
-          <p:nvPr/>
-        </p:nvSpPr>
-        <p:spPr>
-          <a:xfrm>
-            <a:off x="11704320" y="22885400"/>
-            <a:ext cx="20482560" cy="365760"/>
-          </a:xfrm>
-          <a:prstGeom prst="rect">
-            <a:avLst/>
-          </a:prstGeom>
-          <a:noFill/>
-        </p:spPr>
-        <p:txBody>
-          <a:bodyPr wrap="square" lIns="0" rIns="0" tIns="0" bIns="0">
-            <a:spAutoFit/>
-          </a:bodyPr>
-          <a:lstStyle/>
-          <a:p>
-            <a:pPr algn="l">
-              <a:lnSpc>
-                <a:spcPct val="118000"/>
-              </a:lnSpc>
-              <a:spcAft>
-                <a:spcPts val="0"/>
-              </a:spcAft>
-            </a:pPr>
-            <a:r>
-              <a:rPr sz="1600" b="0">
-                <a:solidFill>
-                  <a:srgbClr val="556575"/>
-                </a:solidFill>
-                <a:latin typeface="Arial"/>
-              </a:rPr>
-              <a:t>Figure 4.  (f) Fifteen unattended rounds on a fixed holdout. (g) Round 15's exact dataset, three ways. The first two marks differ only in the starting weights, so their gap is the warm-start chain; the third is the recipe the campaign ran, whose wall-clock cap truncates the cosine, with its three seeds drawn behind it. Sigma throughout is that recipe's own seed spread, 0.0040 over three seeds, propagated to the difference being quoted. Completing the schedule is not the fix -- the second mark sits below the third.</a:t>
-            </a:r>
-          </a:p>
-        </p:txBody>
-      </p:sp>
-      <p:sp>
-        <p:nvSpPr>
-          <p:cNvPr id="40" name="TextBox 39"/>
-          <p:cNvSpPr txBox="1"/>
-          <p:nvPr/>
-        </p:nvSpPr>
-        <p:spPr>
-          <a:xfrm>
-            <a:off x="11704320" y="23915624"/>
-            <a:ext cx="20482560" cy="365760"/>
-          </a:xfrm>
-          <a:prstGeom prst="rect">
-            <a:avLst/>
-          </a:prstGeom>
-          <a:noFill/>
-        </p:spPr>
-        <p:txBody>
-          <a:bodyPr wrap="square" lIns="0" rIns="0" tIns="0" bIns="0">
-            <a:spAutoFit/>
-          </a:bodyPr>
-          <a:lstStyle/>
-          <a:p>
-            <a:pPr algn="l">
-              <a:lnSpc>
-                <a:spcPct val="122000"/>
-              </a:lnSpc>
-              <a:spcAft>
-                <a:spcPts val="1200"/>
-              </a:spcAft>
-            </a:pPr>
-            <a:r>
-              <a:rPr sz="2000" b="0">
-                <a:solidFill>
-                  <a:srgbClr val="1E293B"/>
-                </a:solidFill>
-                <a:latin typeface="Arial"/>
-              </a:rPr>
-              <a:t>Every round reported success and accuracy fell the whole time. The corpus stopped growing at round three and eight rounds collected nothing. What was left was the chain: starting fresh instead of from the previous round's weights is worth +0.0287, 5.1 times this recipe's own seed spread.</a:t>
-            </a:r>
-          </a:p>
-        </p:txBody>
-      </p:sp>
-      <p:sp>
-        <p:nvSpPr>
-          <p:cNvPr id="41" name="TextBox 40"/>
-          <p:cNvSpPr txBox="1"/>
-          <p:nvPr/>
-        </p:nvSpPr>
-        <p:spPr>
-          <a:xfrm>
-            <a:off x="32552640" y="12512039"/>
-            <a:ext cx="10607040" cy="365760"/>
-          </a:xfrm>
-          <a:prstGeom prst="rect">
-            <a:avLst/>
-          </a:prstGeom>
-          <a:noFill/>
-        </p:spPr>
-        <p:txBody>
-          <a:bodyPr wrap="square" lIns="0" rIns="0" tIns="0" bIns="0">
-            <a:spAutoFit/>
-          </a:bodyPr>
-          <a:lstStyle/>
-          <a:p>
-            <a:pPr algn="l">
-              <a:lnSpc>
-                <a:spcPct val="95000"/>
-              </a:lnSpc>
-              <a:spcAft>
-                <a:spcPts val="0"/>
-              </a:spcAft>
-            </a:pPr>
-            <a:r>
               <a:rPr sz="3400" b="1">
                 <a:solidFill>
                   <a:srgbClr val="14314E"/>
                 </a:solidFill>
                 <a:latin typeface="Arial"/>
               </a:rPr>
-              <a:t>Then we pointed it back at our own rows</a:t>
-            </a:r>
-          </a:p>
-        </p:txBody>
-      </p:sp>
-      <p:sp>
-        <p:nvSpPr>
-          <p:cNvPr id="42" name="Rectangle 41"/>
+              <a:t>What the agents do with it</a:t>
+            </a:r>
+          </a:p>
+        </p:txBody>
+      </p:sp>
+      <p:sp>
+        <p:nvSpPr>
+          <p:cNvPr id="35" name="Rectangle 34"/>
           <p:cNvSpPr/>
           <p:nvPr/>
         </p:nvSpPr>
         <p:spPr>
           <a:xfrm>
-            <a:off x="32552640" y="13078967"/>
-            <a:ext cx="10607040" cy="27432"/>
+            <a:off x="11704320" y="13073379"/>
+            <a:ext cx="20482560" cy="27432"/>
           </a:xfrm>
           <a:prstGeom prst="rect">
             <a:avLst/>
@@ -4754,22 +4496,22 @@
       </p:sp>
       <p:pic>
         <p:nvPicPr>
-          <p:cNvPr id="43" name="Picture 42" descr="p_field.png"/>
+          <p:cNvPr id="36" name="Picture 35" descr="n_system.png"/>
           <p:cNvPicPr>
             <a:picLocks noChangeAspect="1"/>
           </p:cNvPicPr>
           <p:nvPr/>
         </p:nvPicPr>
         <p:blipFill>
-          <a:blip r:embed="rId6"/>
+          <a:blip r:embed="rId4"/>
           <a:stretch>
             <a:fillRect/>
           </a:stretch>
         </p:blipFill>
         <p:spPr>
           <a:xfrm>
-            <a:off x="32552640" y="13408151"/>
-            <a:ext cx="10607040" cy="2468880"/>
+            <a:off x="11704320" y="13402563"/>
+            <a:ext cx="20482560" cy="3383280"/>
           </a:xfrm>
           <a:prstGeom prst="rect">
             <a:avLst/>
@@ -4778,13 +4520,205 @@
       </p:pic>
       <p:sp>
         <p:nvSpPr>
-          <p:cNvPr id="44" name="TextBox 43"/>
-          <p:cNvSpPr txBox="1"/>
-          <p:nvPr/>
-        </p:nvSpPr>
-        <p:spPr>
-          <a:xfrm>
-            <a:off x="32552640" y="15986760"/>
+          <p:cNvPr id="37" name="TextBox 36"/>
+          <p:cNvSpPr txBox="1"/>
+          <p:nvPr/>
+        </p:nvSpPr>
+        <p:spPr>
+          <a:xfrm>
+            <a:off x="11704320" y="16895572"/>
+            <a:ext cx="20482560" cy="365760"/>
+          </a:xfrm>
+          <a:prstGeom prst="rect">
+            <a:avLst/>
+          </a:prstGeom>
+          <a:noFill/>
+        </p:spPr>
+        <p:txBody>
+          <a:bodyPr wrap="square" lIns="0" rIns="0" tIns="0" bIns="0">
+            <a:spAutoFit/>
+          </a:bodyPr>
+          <a:lstStyle/>
+          <a:p>
+            <a:pPr algn="l">
+              <a:lnSpc>
+                <a:spcPct val="118000"/>
+              </a:lnSpc>
+              <a:spcAft>
+                <a:spcPts val="0"/>
+              </a:spcAft>
+            </a:pPr>
+            <a:r>
+              <a:rPr sz="1600" b="0">
+                <a:solidFill>
+                  <a:srgbClr val="556575"/>
+                </a:solidFill>
+                <a:latin typeface="Arial"/>
+              </a:rPr>
+              <a:t>Figure 3.  The path as built, from a camera in a crop row to a checkpoint on the cluster. Every stage has run. Three qualifications ride on it. The collector and trainer are paused after a stop-loss on 2026-08-29. The supervisor is advisory and nothing it says is applied. And the last link is not closed: no robot frame has entered training, because none of them is labelled yet.</a:t>
+            </a:r>
+          </a:p>
+        </p:txBody>
+      </p:sp>
+      <p:sp>
+        <p:nvSpPr>
+          <p:cNvPr id="38" name="TextBox 37"/>
+          <p:cNvSpPr txBox="1"/>
+          <p:nvPr/>
+        </p:nvSpPr>
+        <p:spPr>
+          <a:xfrm>
+            <a:off x="11704320" y="17686020"/>
+            <a:ext cx="20482560" cy="365760"/>
+          </a:xfrm>
+          <a:prstGeom prst="rect">
+            <a:avLst/>
+          </a:prstGeom>
+          <a:noFill/>
+        </p:spPr>
+        <p:txBody>
+          <a:bodyPr wrap="square" lIns="0" rIns="0" tIns="0" bIns="0">
+            <a:spAutoFit/>
+          </a:bodyPr>
+          <a:lstStyle/>
+          <a:p>
+            <a:pPr algn="l">
+              <a:lnSpc>
+                <a:spcPct val="100000"/>
+              </a:lnSpc>
+              <a:spcAft>
+                <a:spcPts val="0"/>
+              </a:spcAft>
+            </a:pPr>
+            <a:r>
+              <a:rPr sz="2400" b="1">
+                <a:solidFill>
+                  <a:srgbClr val="1E293B"/>
+                </a:solidFill>
+                <a:latin typeface="Arial"/>
+              </a:rPr>
+              <a:t>We let it run itself for fifteen rounds</a:t>
+            </a:r>
+          </a:p>
+        </p:txBody>
+      </p:sp>
+      <p:pic>
+        <p:nvPicPr>
+          <p:cNvPr id="39" name="Picture 38" descr="f_rounds.png"/>
+          <p:cNvPicPr>
+            <a:picLocks noChangeAspect="1"/>
+          </p:cNvPicPr>
+          <p:nvPr/>
+        </p:nvPicPr>
+        <p:blipFill>
+          <a:blip r:embed="rId5"/>
+          <a:stretch>
+            <a:fillRect/>
+          </a:stretch>
+        </p:blipFill>
+        <p:spPr>
+          <a:xfrm>
+            <a:off x="11704320" y="18106644"/>
+            <a:ext cx="20482560" cy="4663440"/>
+          </a:xfrm>
+          <a:prstGeom prst="rect">
+            <a:avLst/>
+          </a:prstGeom>
+        </p:spPr>
+      </p:pic>
+      <p:sp>
+        <p:nvSpPr>
+          <p:cNvPr id="40" name="TextBox 39"/>
+          <p:cNvSpPr txBox="1"/>
+          <p:nvPr/>
+        </p:nvSpPr>
+        <p:spPr>
+          <a:xfrm>
+            <a:off x="11704320" y="22879812"/>
+            <a:ext cx="20482560" cy="365760"/>
+          </a:xfrm>
+          <a:prstGeom prst="rect">
+            <a:avLst/>
+          </a:prstGeom>
+          <a:noFill/>
+        </p:spPr>
+        <p:txBody>
+          <a:bodyPr wrap="square" lIns="0" rIns="0" tIns="0" bIns="0">
+            <a:spAutoFit/>
+          </a:bodyPr>
+          <a:lstStyle/>
+          <a:p>
+            <a:pPr algn="l">
+              <a:lnSpc>
+                <a:spcPct val="118000"/>
+              </a:lnSpc>
+              <a:spcAft>
+                <a:spcPts val="0"/>
+              </a:spcAft>
+            </a:pPr>
+            <a:r>
+              <a:rPr sz="1600" b="0">
+                <a:solidFill>
+                  <a:srgbClr val="556575"/>
+                </a:solidFill>
+                <a:latin typeface="Arial"/>
+              </a:rPr>
+              <a:t>Figure 4.  (f) Fifteen unattended rounds on a fixed holdout. (g) Round 15's exact dataset, three ways. The first two marks differ only in the starting weights, so their gap is the warm-start chain; the third is the recipe the campaign ran, whose wall-clock cap truncates the cosine, with its three seeds drawn behind it. Sigma throughout is that recipe's own seed spread, 0.0040 over three seeds, propagated to the difference being quoted. Completing the schedule is not the fix -- the second mark sits below the third.</a:t>
+            </a:r>
+          </a:p>
+        </p:txBody>
+      </p:sp>
+      <p:sp>
+        <p:nvSpPr>
+          <p:cNvPr id="41" name="TextBox 40"/>
+          <p:cNvSpPr txBox="1"/>
+          <p:nvPr/>
+        </p:nvSpPr>
+        <p:spPr>
+          <a:xfrm>
+            <a:off x="11704320" y="23910035"/>
+            <a:ext cx="20482560" cy="365760"/>
+          </a:xfrm>
+          <a:prstGeom prst="rect">
+            <a:avLst/>
+          </a:prstGeom>
+          <a:noFill/>
+        </p:spPr>
+        <p:txBody>
+          <a:bodyPr wrap="square" lIns="0" rIns="0" tIns="0" bIns="0">
+            <a:spAutoFit/>
+          </a:bodyPr>
+          <a:lstStyle/>
+          <a:p>
+            <a:pPr algn="l">
+              <a:lnSpc>
+                <a:spcPct val="122000"/>
+              </a:lnSpc>
+              <a:spcAft>
+                <a:spcPts val="1200"/>
+              </a:spcAft>
+            </a:pPr>
+            <a:r>
+              <a:rPr sz="2000" b="0">
+                <a:solidFill>
+                  <a:srgbClr val="1E293B"/>
+                </a:solidFill>
+                <a:latin typeface="Arial"/>
+              </a:rPr>
+              <a:t>Every round reported success and accuracy fell the whole time. The corpus stopped growing at round three and eight rounds collected nothing. What was left was the chain: starting fresh instead of from the previous round's weights is worth +0.0287, 5.1 times this recipe's own seed spread.</a:t>
+            </a:r>
+          </a:p>
+        </p:txBody>
+      </p:sp>
+      <p:sp>
+        <p:nvSpPr>
+          <p:cNvPr id="42" name="TextBox 41"/>
+          <p:cNvSpPr txBox="1"/>
+          <p:nvPr/>
+        </p:nvSpPr>
+        <p:spPr>
+          <a:xfrm>
+            <a:off x="32552640" y="12512039"/>
             <a:ext cx="10607040" cy="365760"/>
           </a:xfrm>
           <a:prstGeom prst="rect">
@@ -4800,124 +4734,40 @@
           <a:p>
             <a:pPr algn="l">
               <a:lnSpc>
-                <a:spcPct val="118000"/>
+                <a:spcPct val="95000"/>
               </a:lnSpc>
               <a:spcAft>
                 <a:spcPts val="0"/>
               </a:spcAft>
             </a:pPr>
             <a:r>
-              <a:rPr sz="1600" b="0">
-                <a:solidFill>
-                  <a:srgbClr val="556575"/>
-                </a:solidFill>
-                <a:latin typeface="Arial"/>
-              </a:rPr>
-              <a:t>Figure 5.  The deployable checkpoint over every frame the two robots recorded, at the confidence the cart deploys at. There is no ground truth for these frames, so this is the rate at which the detector produces a box at all -- not recall and not precision. Vegetation is excess green over a thumbnail, so "nothing to detect" does not account for it: 1157 frames clear that bar and 21 of them draw a box. 24 of the 25 boxes it does draw are the same class.</a:t>
-            </a:r>
-          </a:p>
-        </p:txBody>
-      </p:sp>
-      <p:sp>
-        <p:nvSpPr>
-          <p:cNvPr id="45" name="TextBox 44"/>
-          <p:cNvSpPr txBox="1"/>
-          <p:nvPr/>
-        </p:nvSpPr>
-        <p:spPr>
-          <a:xfrm>
-            <a:off x="32552640" y="17496536"/>
-            <a:ext cx="10607040" cy="365760"/>
-          </a:xfrm>
-          <a:prstGeom prst="rect">
-            <a:avLst/>
-          </a:prstGeom>
-          <a:noFill/>
-        </p:spPr>
-        <p:txBody>
-          <a:bodyPr wrap="square" lIns="0" rIns="0" tIns="0" bIns="0">
-            <a:spAutoFit/>
-          </a:bodyPr>
-          <a:lstStyle/>
-          <a:p>
-            <a:pPr algn="l">
-              <a:lnSpc>
-                <a:spcPct val="122000"/>
-              </a:lnSpc>
-              <a:spcAft>
-                <a:spcPts val="2200"/>
-              </a:spcAft>
-            </a:pPr>
-            <a:r>
-              <a:rPr sz="2000" b="0">
-                <a:solidFill>
-                  <a:srgbClr val="1E293B"/>
-                </a:solidFill>
-                <a:latin typeface="Arial"/>
-              </a:rPr>
-              <a:t>The deployable checkpoint draws a box on 25 of the 2,686 frames our robots recorded, and 24 of those 25 boxes are the same class. These frames carry no labels, so that is a firing rate, not recall and not precision. On a second labelled weed dataset the same checkpoints fall from 0.873 to 0.100.</a:t>
-            </a:r>
-          </a:p>
-        </p:txBody>
-      </p:sp>
-      <p:sp>
-        <p:nvSpPr>
-          <p:cNvPr id="46" name="TextBox 45"/>
-          <p:cNvSpPr txBox="1"/>
-          <p:nvPr/>
-        </p:nvSpPr>
-        <p:spPr>
-          <a:xfrm>
-            <a:off x="32552640" y="19015456"/>
-            <a:ext cx="10607040" cy="365760"/>
-          </a:xfrm>
-          <a:prstGeom prst="rect">
-            <a:avLst/>
-          </a:prstGeom>
-          <a:noFill/>
-        </p:spPr>
-        <p:txBody>
-          <a:bodyPr wrap="square" lIns="0" rIns="0" tIns="0" bIns="0">
-            <a:spAutoFit/>
-          </a:bodyPr>
-          <a:lstStyle/>
-          <a:p>
-            <a:pPr algn="l">
-              <a:lnSpc>
-                <a:spcPct val="100000"/>
-              </a:lnSpc>
-              <a:spcAft>
-                <a:spcPts val="0"/>
-              </a:spcAft>
-            </a:pPr>
-            <a:r>
-              <a:rPr sz="2400" b="1">
-                <a:solidFill>
-                  <a:srgbClr val="1E293B"/>
-                </a:solidFill>
-                <a:latin typeface="Arial"/>
-              </a:rPr>
-              <a:t>Does more web data help?</a:t>
-            </a:r>
-          </a:p>
-        </p:txBody>
-      </p:sp>
-      <p:sp>
-        <p:nvSpPr>
-          <p:cNvPr id="47" name="Rectangle 46"/>
+              <a:rPr sz="3400" b="1">
+                <a:solidFill>
+                  <a:srgbClr val="14314E"/>
+                </a:solidFill>
+                <a:latin typeface="Arial"/>
+              </a:rPr>
+              <a:t>Then we pointed it back at our own rows</a:t>
+            </a:r>
+          </a:p>
+        </p:txBody>
+      </p:sp>
+      <p:sp>
+        <p:nvSpPr>
+          <p:cNvPr id="43" name="Rectangle 42"/>
           <p:cNvSpPr/>
           <p:nvPr/>
         </p:nvSpPr>
         <p:spPr>
           <a:xfrm>
-            <a:off x="32552640" y="19436080"/>
-            <a:ext cx="10607040" cy="23774"/>
+            <a:off x="32552640" y="13073379"/>
+            <a:ext cx="10607040" cy="27432"/>
           </a:xfrm>
           <a:prstGeom prst="rect">
             <a:avLst/>
           </a:prstGeom>
           <a:solidFill>
-            <a:srgbClr val="1E293B"/>
+            <a:srgbClr val="1C6FB5"/>
           </a:solidFill>
           <a:ln>
             <a:noFill/>
@@ -4946,16 +4796,40 @@
           </a:p>
         </p:txBody>
       </p:sp>
-      <p:sp>
-        <p:nvSpPr>
-          <p:cNvPr id="48" name="TextBox 47"/>
-          <p:cNvSpPr txBox="1"/>
-          <p:nvPr/>
-        </p:nvSpPr>
-        <p:spPr>
-          <a:xfrm>
-            <a:off x="32552640" y="19554952"/>
-            <a:ext cx="4667097" cy="365760"/>
+      <p:pic>
+        <p:nvPicPr>
+          <p:cNvPr id="44" name="Picture 43" descr="p_field.png"/>
+          <p:cNvPicPr>
+            <a:picLocks noChangeAspect="1"/>
+          </p:cNvPicPr>
+          <p:nvPr/>
+        </p:nvPicPr>
+        <p:blipFill>
+          <a:blip r:embed="rId6"/>
+          <a:stretch>
+            <a:fillRect/>
+          </a:stretch>
+        </p:blipFill>
+        <p:spPr>
+          <a:xfrm>
+            <a:off x="32552640" y="13402563"/>
+            <a:ext cx="10607040" cy="2468880"/>
+          </a:xfrm>
+          <a:prstGeom prst="rect">
+            <a:avLst/>
+          </a:prstGeom>
+        </p:spPr>
+      </p:pic>
+      <p:sp>
+        <p:nvSpPr>
+          <p:cNvPr id="45" name="TextBox 44"/>
+          <p:cNvSpPr txBox="1"/>
+          <p:nvPr/>
+        </p:nvSpPr>
+        <p:spPr>
+          <a:xfrm>
+            <a:off x="32552640" y="15981171"/>
+            <a:ext cx="10607040" cy="365760"/>
           </a:xfrm>
           <a:prstGeom prst="rect">
             <a:avLst/>
@@ -4970,6 +4844,90 @@
           <a:p>
             <a:pPr algn="l">
               <a:lnSpc>
+                <a:spcPct val="118000"/>
+              </a:lnSpc>
+              <a:spcAft>
+                <a:spcPts val="0"/>
+              </a:spcAft>
+            </a:pPr>
+            <a:r>
+              <a:rPr sz="1600" b="0">
+                <a:solidFill>
+                  <a:srgbClr val="556575"/>
+                </a:solidFill>
+                <a:latin typeface="Arial"/>
+              </a:rPr>
+              <a:t>Figure 5.  The deployable checkpoint over every frame the two robots recorded, at the confidence the cart deploys at. There is no ground truth for these frames, so this is the rate at which the detector produces a box at all -- not recall and not precision. Vegetation is excess green over a thumbnail, so "nothing to detect" does not account for it: 1157 frames clear that bar and 21 of them draw a box. 24 of the 25 boxes it does draw are the same class.</a:t>
+            </a:r>
+          </a:p>
+        </p:txBody>
+      </p:sp>
+      <p:sp>
+        <p:nvSpPr>
+          <p:cNvPr id="46" name="TextBox 45"/>
+          <p:cNvSpPr txBox="1"/>
+          <p:nvPr/>
+        </p:nvSpPr>
+        <p:spPr>
+          <a:xfrm>
+            <a:off x="32552640" y="17490947"/>
+            <a:ext cx="10607040" cy="365760"/>
+          </a:xfrm>
+          <a:prstGeom prst="rect">
+            <a:avLst/>
+          </a:prstGeom>
+          <a:noFill/>
+        </p:spPr>
+        <p:txBody>
+          <a:bodyPr wrap="square" lIns="0" rIns="0" tIns="0" bIns="0">
+            <a:spAutoFit/>
+          </a:bodyPr>
+          <a:lstStyle/>
+          <a:p>
+            <a:pPr algn="l">
+              <a:lnSpc>
+                <a:spcPct val="122000"/>
+              </a:lnSpc>
+              <a:spcAft>
+                <a:spcPts val="2200"/>
+              </a:spcAft>
+            </a:pPr>
+            <a:r>
+              <a:rPr sz="2000" b="0">
+                <a:solidFill>
+                  <a:srgbClr val="1E293B"/>
+                </a:solidFill>
+                <a:latin typeface="Arial"/>
+              </a:rPr>
+              <a:t>The deployable checkpoint draws a box on 25 of the 2,686 frames our robots recorded, and 24 of those 25 boxes are the same class. These frames carry no labels, so that is a firing rate, not recall and not precision. On a second labelled weed dataset the same checkpoints fall from 0.873 to 0.100.</a:t>
+            </a:r>
+          </a:p>
+        </p:txBody>
+      </p:sp>
+      <p:sp>
+        <p:nvSpPr>
+          <p:cNvPr id="47" name="TextBox 46"/>
+          <p:cNvSpPr txBox="1"/>
+          <p:nvPr/>
+        </p:nvSpPr>
+        <p:spPr>
+          <a:xfrm>
+            <a:off x="32552640" y="19009867"/>
+            <a:ext cx="10607040" cy="365760"/>
+          </a:xfrm>
+          <a:prstGeom prst="rect">
+            <a:avLst/>
+          </a:prstGeom>
+          <a:noFill/>
+        </p:spPr>
+        <p:txBody>
+          <a:bodyPr wrap="square" lIns="0" rIns="0" tIns="0" bIns="0">
+            <a:spAutoFit/>
+          </a:bodyPr>
+          <a:lstStyle/>
+          <a:p>
+            <a:pPr algn="l">
+              <a:lnSpc>
                 <a:spcPct val="100000"/>
               </a:lnSpc>
               <a:spcAft>
@@ -4977,117 +4935,33 @@
               </a:spcAft>
             </a:pPr>
             <a:r>
-              <a:rPr sz="1550" b="1">
+              <a:rPr sz="2400" b="1">
                 <a:solidFill>
                   <a:srgbClr val="1E293B"/>
                 </a:solidFill>
                 <a:latin typeface="Arial"/>
               </a:rPr>
-              <a:t>harvested added</a:t>
-            </a:r>
-          </a:p>
-        </p:txBody>
-      </p:sp>
-      <p:sp>
-        <p:nvSpPr>
-          <p:cNvPr id="49" name="TextBox 48"/>
-          <p:cNvSpPr txBox="1"/>
-          <p:nvPr/>
-        </p:nvSpPr>
-        <p:spPr>
-          <a:xfrm>
-            <a:off x="37219737" y="19554952"/>
-            <a:ext cx="4242816" cy="365760"/>
-          </a:xfrm>
-          <a:prstGeom prst="rect">
-            <a:avLst/>
-          </a:prstGeom>
-          <a:noFill/>
-        </p:spPr>
-        <p:txBody>
-          <a:bodyPr wrap="square" lIns="0" rIns="0" tIns="0" bIns="0">
-            <a:spAutoFit/>
-          </a:bodyPr>
-          <a:lstStyle/>
-          <a:p>
-            <a:pPr algn="r">
-              <a:lnSpc>
-                <a:spcPct val="100000"/>
-              </a:lnSpc>
-              <a:spcAft>
-                <a:spcPts val="0"/>
-              </a:spcAft>
-            </a:pPr>
-            <a:r>
-              <a:rPr sz="1550" b="1">
-                <a:solidFill>
-                  <a:srgbClr val="1E293B"/>
-                </a:solidFill>
-                <a:latin typeface="Arial"/>
-              </a:rPr>
-              <a:t>mAP50-95</a:t>
-            </a:r>
-          </a:p>
-        </p:txBody>
-      </p:sp>
-      <p:sp>
-        <p:nvSpPr>
-          <p:cNvPr id="50" name="TextBox 49"/>
-          <p:cNvSpPr txBox="1"/>
-          <p:nvPr/>
-        </p:nvSpPr>
-        <p:spPr>
-          <a:xfrm>
-            <a:off x="41462553" y="19554952"/>
-            <a:ext cx="1697126" cy="365760"/>
-          </a:xfrm>
-          <a:prstGeom prst="rect">
-            <a:avLst/>
-          </a:prstGeom>
-          <a:noFill/>
-        </p:spPr>
-        <p:txBody>
-          <a:bodyPr wrap="square" lIns="0" rIns="0" tIns="0" bIns="0">
-            <a:spAutoFit/>
-          </a:bodyPr>
-          <a:lstStyle/>
-          <a:p>
-            <a:pPr algn="r">
-              <a:lnSpc>
-                <a:spcPct val="100000"/>
-              </a:lnSpc>
-              <a:spcAft>
-                <a:spcPts val="0"/>
-              </a:spcAft>
-            </a:pPr>
-            <a:r>
-              <a:rPr sz="1550" b="1">
-                <a:solidFill>
-                  <a:srgbClr val="1E293B"/>
-                </a:solidFill>
-                <a:latin typeface="Arial"/>
-              </a:rPr>
-              <a:t>n</a:t>
-            </a:r>
-          </a:p>
-        </p:txBody>
-      </p:sp>
-      <p:sp>
-        <p:nvSpPr>
-          <p:cNvPr id="51" name="Rectangle 50"/>
+              <a:t>Does more web data help?</a:t>
+            </a:r>
+          </a:p>
+        </p:txBody>
+      </p:sp>
+      <p:sp>
+        <p:nvSpPr>
+          <p:cNvPr id="48" name="Rectangle 47"/>
           <p:cNvSpPr/>
           <p:nvPr/>
         </p:nvSpPr>
         <p:spPr>
           <a:xfrm>
-            <a:off x="32552640" y="19920712"/>
-            <a:ext cx="10607040" cy="14630"/>
+            <a:off x="32552640" y="19430492"/>
+            <a:ext cx="10607040" cy="23774"/>
           </a:xfrm>
           <a:prstGeom prst="rect">
             <a:avLst/>
           </a:prstGeom>
           <a:solidFill>
-            <a:srgbClr val="C2CEDA"/>
+            <a:srgbClr val="1E293B"/>
           </a:solidFill>
           <a:ln>
             <a:noFill/>
@@ -5118,13 +4992,13 @@
       </p:sp>
       <p:sp>
         <p:nvSpPr>
-          <p:cNvPr id="52" name="TextBox 51"/>
-          <p:cNvSpPr txBox="1"/>
-          <p:nvPr/>
-        </p:nvSpPr>
-        <p:spPr>
-          <a:xfrm>
-            <a:off x="32552640" y="20030440"/>
+          <p:cNvPr id="49" name="TextBox 48"/>
+          <p:cNvSpPr txBox="1"/>
+          <p:nvPr/>
+        </p:nvSpPr>
+        <p:spPr>
+          <a:xfrm>
+            <a:off x="32552640" y="19549363"/>
             <a:ext cx="4667097" cy="365760"/>
           </a:xfrm>
           <a:prstGeom prst="rect">
@@ -5147,26 +5021,26 @@
               </a:spcAft>
             </a:pPr>
             <a:r>
-              <a:rPr sz="1700" b="0">
+              <a:rPr sz="1550" b="1">
                 <a:solidFill>
                   <a:srgbClr val="1E293B"/>
                 </a:solidFill>
                 <a:latin typeface="Arial"/>
               </a:rPr>
-              <a:t>none, the core</a:t>
-            </a:r>
-          </a:p>
-        </p:txBody>
-      </p:sp>
-      <p:sp>
-        <p:nvSpPr>
-          <p:cNvPr id="53" name="TextBox 52"/>
-          <p:cNvSpPr txBox="1"/>
-          <p:nvPr/>
-        </p:nvSpPr>
-        <p:spPr>
-          <a:xfrm>
-            <a:off x="37219737" y="20030440"/>
+              <a:t>harvested added</a:t>
+            </a:r>
+          </a:p>
+        </p:txBody>
+      </p:sp>
+      <p:sp>
+        <p:nvSpPr>
+          <p:cNvPr id="50" name="TextBox 49"/>
+          <p:cNvSpPr txBox="1"/>
+          <p:nvPr/>
+        </p:nvSpPr>
+        <p:spPr>
+          <a:xfrm>
+            <a:off x="37219737" y="19549363"/>
             <a:ext cx="4242816" cy="365760"/>
           </a:xfrm>
           <a:prstGeom prst="rect">
@@ -5189,26 +5063,26 @@
               </a:spcAft>
             </a:pPr>
             <a:r>
-              <a:rPr sz="1700" b="0">
+              <a:rPr sz="1550" b="1">
                 <a:solidFill>
                   <a:srgbClr val="1E293B"/>
                 </a:solidFill>
                 <a:latin typeface="Arial"/>
               </a:rPr>
-              <a:t>0.8637 ± 0.0027</a:t>
-            </a:r>
-          </a:p>
-        </p:txBody>
-      </p:sp>
-      <p:sp>
-        <p:nvSpPr>
-          <p:cNvPr id="54" name="TextBox 53"/>
-          <p:cNvSpPr txBox="1"/>
-          <p:nvPr/>
-        </p:nvSpPr>
-        <p:spPr>
-          <a:xfrm>
-            <a:off x="41462553" y="20030440"/>
+              <a:t>mAP50-95</a:t>
+            </a:r>
+          </a:p>
+        </p:txBody>
+      </p:sp>
+      <p:sp>
+        <p:nvSpPr>
+          <p:cNvPr id="51" name="TextBox 50"/>
+          <p:cNvSpPr txBox="1"/>
+          <p:nvPr/>
+        </p:nvSpPr>
+        <p:spPr>
+          <a:xfrm>
+            <a:off x="41462553" y="19549363"/>
             <a:ext cx="1697126" cy="365760"/>
           </a:xfrm>
           <a:prstGeom prst="rect">
@@ -5231,411 +5105,33 @@
               </a:spcAft>
             </a:pPr>
             <a:r>
-              <a:rPr sz="1700" b="0">
+              <a:rPr sz="1550" b="1">
                 <a:solidFill>
                   <a:srgbClr val="1E293B"/>
                 </a:solidFill>
                 <a:latin typeface="Arial"/>
               </a:rPr>
-              <a:t>3</a:t>
-            </a:r>
-          </a:p>
-        </p:txBody>
-      </p:sp>
-      <p:sp>
-        <p:nvSpPr>
-          <p:cNvPr id="55" name="TextBox 54"/>
-          <p:cNvSpPr txBox="1"/>
-          <p:nvPr/>
-        </p:nvSpPr>
-        <p:spPr>
-          <a:xfrm>
-            <a:off x="32552640" y="20432776"/>
-            <a:ext cx="4667097" cy="365760"/>
-          </a:xfrm>
-          <a:prstGeom prst="rect">
-            <a:avLst/>
-          </a:prstGeom>
-          <a:noFill/>
-        </p:spPr>
-        <p:txBody>
-          <a:bodyPr wrap="square" lIns="0" rIns="0" tIns="0" bIns="0">
-            <a:spAutoFit/>
-          </a:bodyPr>
-          <a:lstStyle/>
-          <a:p>
-            <a:pPr algn="l">
-              <a:lnSpc>
-                <a:spcPct val="100000"/>
-              </a:lnSpc>
-              <a:spcAft>
-                <a:spcPts val="0"/>
-              </a:spcAft>
-            </a:pPr>
-            <a:r>
-              <a:rPr sz="1700" b="0">
-                <a:solidFill>
-                  <a:srgbClr val="1E293B"/>
-                </a:solidFill>
-                <a:latin typeface="Arial"/>
-              </a:rPr>
-              <a:t>+5,000</a:t>
-            </a:r>
-          </a:p>
-        </p:txBody>
-      </p:sp>
-      <p:sp>
-        <p:nvSpPr>
-          <p:cNvPr id="56" name="TextBox 55"/>
-          <p:cNvSpPr txBox="1"/>
-          <p:nvPr/>
-        </p:nvSpPr>
-        <p:spPr>
-          <a:xfrm>
-            <a:off x="37219737" y="20432776"/>
-            <a:ext cx="4242816" cy="365760"/>
-          </a:xfrm>
-          <a:prstGeom prst="rect">
-            <a:avLst/>
-          </a:prstGeom>
-          <a:noFill/>
-        </p:spPr>
-        <p:txBody>
-          <a:bodyPr wrap="square" lIns="0" rIns="0" tIns="0" bIns="0">
-            <a:spAutoFit/>
-          </a:bodyPr>
-          <a:lstStyle/>
-          <a:p>
-            <a:pPr algn="r">
-              <a:lnSpc>
-                <a:spcPct val="100000"/>
-              </a:lnSpc>
-              <a:spcAft>
-                <a:spcPts val="0"/>
-              </a:spcAft>
-            </a:pPr>
-            <a:r>
-              <a:rPr sz="1700" b="0">
-                <a:solidFill>
-                  <a:srgbClr val="1E293B"/>
-                </a:solidFill>
-                <a:latin typeface="Arial"/>
-              </a:rPr>
-              <a:t>0.8609 ± 0.0036</a:t>
-            </a:r>
-          </a:p>
-        </p:txBody>
-      </p:sp>
-      <p:sp>
-        <p:nvSpPr>
-          <p:cNvPr id="57" name="TextBox 56"/>
-          <p:cNvSpPr txBox="1"/>
-          <p:nvPr/>
-        </p:nvSpPr>
-        <p:spPr>
-          <a:xfrm>
-            <a:off x="41462553" y="20432776"/>
-            <a:ext cx="1697126" cy="365760"/>
-          </a:xfrm>
-          <a:prstGeom prst="rect">
-            <a:avLst/>
-          </a:prstGeom>
-          <a:noFill/>
-        </p:spPr>
-        <p:txBody>
-          <a:bodyPr wrap="square" lIns="0" rIns="0" tIns="0" bIns="0">
-            <a:spAutoFit/>
-          </a:bodyPr>
-          <a:lstStyle/>
-          <a:p>
-            <a:pPr algn="r">
-              <a:lnSpc>
-                <a:spcPct val="100000"/>
-              </a:lnSpc>
-              <a:spcAft>
-                <a:spcPts val="0"/>
-              </a:spcAft>
-            </a:pPr>
-            <a:r>
-              <a:rPr sz="1700" b="0">
-                <a:solidFill>
-                  <a:srgbClr val="1E293B"/>
-                </a:solidFill>
-                <a:latin typeface="Arial"/>
-              </a:rPr>
-              <a:t>3</a:t>
-            </a:r>
-          </a:p>
-        </p:txBody>
-      </p:sp>
-      <p:sp>
-        <p:nvSpPr>
-          <p:cNvPr id="58" name="TextBox 57"/>
-          <p:cNvSpPr txBox="1"/>
-          <p:nvPr/>
-        </p:nvSpPr>
-        <p:spPr>
-          <a:xfrm>
-            <a:off x="32552640" y="20835112"/>
-            <a:ext cx="4667097" cy="365760"/>
-          </a:xfrm>
-          <a:prstGeom prst="rect">
-            <a:avLst/>
-          </a:prstGeom>
-          <a:noFill/>
-        </p:spPr>
-        <p:txBody>
-          <a:bodyPr wrap="square" lIns="0" rIns="0" tIns="0" bIns="0">
-            <a:spAutoFit/>
-          </a:bodyPr>
-          <a:lstStyle/>
-          <a:p>
-            <a:pPr algn="l">
-              <a:lnSpc>
-                <a:spcPct val="100000"/>
-              </a:lnSpc>
-              <a:spcAft>
-                <a:spcPts val="0"/>
-              </a:spcAft>
-            </a:pPr>
-            <a:r>
-              <a:rPr sz="1700" b="0">
-                <a:solidFill>
-                  <a:srgbClr val="1E293B"/>
-                </a:solidFill>
-                <a:latin typeface="Arial"/>
-              </a:rPr>
-              <a:t>+15,000</a:t>
-            </a:r>
-          </a:p>
-        </p:txBody>
-      </p:sp>
-      <p:sp>
-        <p:nvSpPr>
-          <p:cNvPr id="59" name="TextBox 58"/>
-          <p:cNvSpPr txBox="1"/>
-          <p:nvPr/>
-        </p:nvSpPr>
-        <p:spPr>
-          <a:xfrm>
-            <a:off x="37219737" y="20835112"/>
-            <a:ext cx="4242816" cy="365760"/>
-          </a:xfrm>
-          <a:prstGeom prst="rect">
-            <a:avLst/>
-          </a:prstGeom>
-          <a:noFill/>
-        </p:spPr>
-        <p:txBody>
-          <a:bodyPr wrap="square" lIns="0" rIns="0" tIns="0" bIns="0">
-            <a:spAutoFit/>
-          </a:bodyPr>
-          <a:lstStyle/>
-          <a:p>
-            <a:pPr algn="r">
-              <a:lnSpc>
-                <a:spcPct val="100000"/>
-              </a:lnSpc>
-              <a:spcAft>
-                <a:spcPts val="0"/>
-              </a:spcAft>
-            </a:pPr>
-            <a:r>
-              <a:rPr sz="1700" b="0">
-                <a:solidFill>
-                  <a:srgbClr val="1E293B"/>
-                </a:solidFill>
-                <a:latin typeface="Arial"/>
-              </a:rPr>
-              <a:t>0.8580 ± 0.0047</a:t>
-            </a:r>
-          </a:p>
-        </p:txBody>
-      </p:sp>
-      <p:sp>
-        <p:nvSpPr>
-          <p:cNvPr id="60" name="TextBox 59"/>
-          <p:cNvSpPr txBox="1"/>
-          <p:nvPr/>
-        </p:nvSpPr>
-        <p:spPr>
-          <a:xfrm>
-            <a:off x="41462553" y="20835112"/>
-            <a:ext cx="1697126" cy="365760"/>
-          </a:xfrm>
-          <a:prstGeom prst="rect">
-            <a:avLst/>
-          </a:prstGeom>
-          <a:noFill/>
-        </p:spPr>
-        <p:txBody>
-          <a:bodyPr wrap="square" lIns="0" rIns="0" tIns="0" bIns="0">
-            <a:spAutoFit/>
-          </a:bodyPr>
-          <a:lstStyle/>
-          <a:p>
-            <a:pPr algn="r">
-              <a:lnSpc>
-                <a:spcPct val="100000"/>
-              </a:lnSpc>
-              <a:spcAft>
-                <a:spcPts val="0"/>
-              </a:spcAft>
-            </a:pPr>
-            <a:r>
-              <a:rPr sz="1700" b="0">
-                <a:solidFill>
-                  <a:srgbClr val="1E293B"/>
-                </a:solidFill>
-                <a:latin typeface="Arial"/>
-              </a:rPr>
-              <a:t>3</a:t>
-            </a:r>
-          </a:p>
-        </p:txBody>
-      </p:sp>
-      <p:sp>
-        <p:nvSpPr>
-          <p:cNvPr id="61" name="TextBox 60"/>
-          <p:cNvSpPr txBox="1"/>
-          <p:nvPr/>
-        </p:nvSpPr>
-        <p:spPr>
-          <a:xfrm>
-            <a:off x="32552640" y="21237448"/>
-            <a:ext cx="4667097" cy="365760"/>
-          </a:xfrm>
-          <a:prstGeom prst="rect">
-            <a:avLst/>
-          </a:prstGeom>
-          <a:noFill/>
-        </p:spPr>
-        <p:txBody>
-          <a:bodyPr wrap="square" lIns="0" rIns="0" tIns="0" bIns="0">
-            <a:spAutoFit/>
-          </a:bodyPr>
-          <a:lstStyle/>
-          <a:p>
-            <a:pPr algn="l">
-              <a:lnSpc>
-                <a:spcPct val="100000"/>
-              </a:lnSpc>
-              <a:spcAft>
-                <a:spcPts val="0"/>
-              </a:spcAft>
-            </a:pPr>
-            <a:r>
-              <a:rPr sz="1700" b="1">
-                <a:solidFill>
-                  <a:srgbClr val="1C6FB5"/>
-                </a:solidFill>
-                <a:latin typeface="Arial"/>
-              </a:rPr>
-              <a:t>+40,000</a:t>
-            </a:r>
-          </a:p>
-        </p:txBody>
-      </p:sp>
-      <p:sp>
-        <p:nvSpPr>
-          <p:cNvPr id="62" name="TextBox 61"/>
-          <p:cNvSpPr txBox="1"/>
-          <p:nvPr/>
-        </p:nvSpPr>
-        <p:spPr>
-          <a:xfrm>
-            <a:off x="37219737" y="21237448"/>
-            <a:ext cx="4242816" cy="365760"/>
-          </a:xfrm>
-          <a:prstGeom prst="rect">
-            <a:avLst/>
-          </a:prstGeom>
-          <a:noFill/>
-        </p:spPr>
-        <p:txBody>
-          <a:bodyPr wrap="square" lIns="0" rIns="0" tIns="0" bIns="0">
-            <a:spAutoFit/>
-          </a:bodyPr>
-          <a:lstStyle/>
-          <a:p>
-            <a:pPr algn="r">
-              <a:lnSpc>
-                <a:spcPct val="100000"/>
-              </a:lnSpc>
-              <a:spcAft>
-                <a:spcPts val="0"/>
-              </a:spcAft>
-            </a:pPr>
-            <a:r>
-              <a:rPr sz="1700" b="1">
-                <a:solidFill>
-                  <a:srgbClr val="1C6FB5"/>
-                </a:solidFill>
-                <a:latin typeface="Arial"/>
-              </a:rPr>
-              <a:t>0.8448 ± 0.0018</a:t>
-            </a:r>
-          </a:p>
-        </p:txBody>
-      </p:sp>
-      <p:sp>
-        <p:nvSpPr>
-          <p:cNvPr id="63" name="TextBox 62"/>
-          <p:cNvSpPr txBox="1"/>
-          <p:nvPr/>
-        </p:nvSpPr>
-        <p:spPr>
-          <a:xfrm>
-            <a:off x="41462553" y="21237448"/>
-            <a:ext cx="1697126" cy="365760"/>
-          </a:xfrm>
-          <a:prstGeom prst="rect">
-            <a:avLst/>
-          </a:prstGeom>
-          <a:noFill/>
-        </p:spPr>
-        <p:txBody>
-          <a:bodyPr wrap="square" lIns="0" rIns="0" tIns="0" bIns="0">
-            <a:spAutoFit/>
-          </a:bodyPr>
-          <a:lstStyle/>
-          <a:p>
-            <a:pPr algn="r">
-              <a:lnSpc>
-                <a:spcPct val="100000"/>
-              </a:lnSpc>
-              <a:spcAft>
-                <a:spcPts val="0"/>
-              </a:spcAft>
-            </a:pPr>
-            <a:r>
-              <a:rPr sz="1700" b="1">
-                <a:solidFill>
-                  <a:srgbClr val="1C6FB5"/>
-                </a:solidFill>
-                <a:latin typeface="Arial"/>
-              </a:rPr>
-              <a:t>3</a:t>
-            </a:r>
-          </a:p>
-        </p:txBody>
-      </p:sp>
-      <p:sp>
-        <p:nvSpPr>
-          <p:cNvPr id="64" name="Rectangle 63"/>
+              <a:t>n</a:t>
+            </a:r>
+          </a:p>
+        </p:txBody>
+      </p:sp>
+      <p:sp>
+        <p:nvSpPr>
+          <p:cNvPr id="52" name="Rectangle 51"/>
           <p:cNvSpPr/>
           <p:nvPr/>
         </p:nvSpPr>
         <p:spPr>
           <a:xfrm>
-            <a:off x="32552640" y="21667216"/>
-            <a:ext cx="10607040" cy="23774"/>
+            <a:off x="32552640" y="19915123"/>
+            <a:ext cx="10607040" cy="14630"/>
           </a:xfrm>
           <a:prstGeom prst="rect">
             <a:avLst/>
           </a:prstGeom>
           <a:solidFill>
-            <a:srgbClr val="1E293B"/>
+            <a:srgbClr val="C2CEDA"/>
           </a:solidFill>
           <a:ln>
             <a:noFill/>
@@ -5666,14 +5162,14 @@
       </p:sp>
       <p:sp>
         <p:nvSpPr>
-          <p:cNvPr id="65" name="TextBox 64"/>
-          <p:cNvSpPr txBox="1"/>
-          <p:nvPr/>
-        </p:nvSpPr>
-        <p:spPr>
-          <a:xfrm>
-            <a:off x="32552640" y="21932392"/>
-            <a:ext cx="10607040" cy="365760"/>
+          <p:cNvPr id="53" name="TextBox 52"/>
+          <p:cNvSpPr txBox="1"/>
+          <p:nvPr/>
+        </p:nvSpPr>
+        <p:spPr>
+          <a:xfrm>
+            <a:off x="32552640" y="20024851"/>
+            <a:ext cx="4667097" cy="365760"/>
           </a:xfrm>
           <a:prstGeom prst="rect">
             <a:avLst/>
@@ -5688,34 +5184,118 @@
           <a:p>
             <a:pPr algn="l">
               <a:lnSpc>
-                <a:spcPct val="122000"/>
-              </a:lnSpc>
-              <a:spcAft>
-                <a:spcPts val="1200"/>
-              </a:spcAft>
-            </a:pPr>
-            <a:r>
-              <a:rPr sz="1600" b="0">
-                <a:solidFill>
-                  <a:srgbClr val="556575"/>
-                </a:solidFill>
-                <a:latin typeface="Arial"/>
-              </a:rPr>
-              <a:t>Twelve times the data costs 0.0189, which is 8.2 times the seed spread, and the same eight checkpoints fall on a second dataset too. One of six audited web sources clears a 0.90 label-precision bar. This is why the robots exist.</a:t>
-            </a:r>
-          </a:p>
-        </p:txBody>
-      </p:sp>
-      <p:sp>
-        <p:nvSpPr>
-          <p:cNvPr id="66" name="TextBox 65"/>
-          <p:cNvSpPr txBox="1"/>
-          <p:nvPr/>
-        </p:nvSpPr>
-        <p:spPr>
-          <a:xfrm>
-            <a:off x="11704320" y="25144984"/>
-            <a:ext cx="20482560" cy="365760"/>
+                <a:spcPct val="100000"/>
+              </a:lnSpc>
+              <a:spcAft>
+                <a:spcPts val="0"/>
+              </a:spcAft>
+            </a:pPr>
+            <a:r>
+              <a:rPr sz="1700" b="0">
+                <a:solidFill>
+                  <a:srgbClr val="1E293B"/>
+                </a:solidFill>
+                <a:latin typeface="Arial"/>
+              </a:rPr>
+              <a:t>none, the core</a:t>
+            </a:r>
+          </a:p>
+        </p:txBody>
+      </p:sp>
+      <p:sp>
+        <p:nvSpPr>
+          <p:cNvPr id="54" name="TextBox 53"/>
+          <p:cNvSpPr txBox="1"/>
+          <p:nvPr/>
+        </p:nvSpPr>
+        <p:spPr>
+          <a:xfrm>
+            <a:off x="37219737" y="20024851"/>
+            <a:ext cx="4242816" cy="365760"/>
+          </a:xfrm>
+          <a:prstGeom prst="rect">
+            <a:avLst/>
+          </a:prstGeom>
+          <a:noFill/>
+        </p:spPr>
+        <p:txBody>
+          <a:bodyPr wrap="square" lIns="0" rIns="0" tIns="0" bIns="0">
+            <a:spAutoFit/>
+          </a:bodyPr>
+          <a:lstStyle/>
+          <a:p>
+            <a:pPr algn="r">
+              <a:lnSpc>
+                <a:spcPct val="100000"/>
+              </a:lnSpc>
+              <a:spcAft>
+                <a:spcPts val="0"/>
+              </a:spcAft>
+            </a:pPr>
+            <a:r>
+              <a:rPr sz="1700" b="0">
+                <a:solidFill>
+                  <a:srgbClr val="1E293B"/>
+                </a:solidFill>
+                <a:latin typeface="Arial"/>
+              </a:rPr>
+              <a:t>0.8637 ± 0.0027</a:t>
+            </a:r>
+          </a:p>
+        </p:txBody>
+      </p:sp>
+      <p:sp>
+        <p:nvSpPr>
+          <p:cNvPr id="55" name="TextBox 54"/>
+          <p:cNvSpPr txBox="1"/>
+          <p:nvPr/>
+        </p:nvSpPr>
+        <p:spPr>
+          <a:xfrm>
+            <a:off x="41462553" y="20024851"/>
+            <a:ext cx="1697126" cy="365760"/>
+          </a:xfrm>
+          <a:prstGeom prst="rect">
+            <a:avLst/>
+          </a:prstGeom>
+          <a:noFill/>
+        </p:spPr>
+        <p:txBody>
+          <a:bodyPr wrap="square" lIns="0" rIns="0" tIns="0" bIns="0">
+            <a:spAutoFit/>
+          </a:bodyPr>
+          <a:lstStyle/>
+          <a:p>
+            <a:pPr algn="r">
+              <a:lnSpc>
+                <a:spcPct val="100000"/>
+              </a:lnSpc>
+              <a:spcAft>
+                <a:spcPts val="0"/>
+              </a:spcAft>
+            </a:pPr>
+            <a:r>
+              <a:rPr sz="1700" b="0">
+                <a:solidFill>
+                  <a:srgbClr val="1E293B"/>
+                </a:solidFill>
+                <a:latin typeface="Arial"/>
+              </a:rPr>
+              <a:t>3</a:t>
+            </a:r>
+          </a:p>
+        </p:txBody>
+      </p:sp>
+      <p:sp>
+        <p:nvSpPr>
+          <p:cNvPr id="56" name="TextBox 55"/>
+          <p:cNvSpPr txBox="1"/>
+          <p:nvPr/>
+        </p:nvSpPr>
+        <p:spPr>
+          <a:xfrm>
+            <a:off x="32552640" y="20427188"/>
+            <a:ext cx="4667097" cy="365760"/>
           </a:xfrm>
           <a:prstGeom prst="rect">
             <a:avLst/>
@@ -5730,40 +5310,376 @@
           <a:p>
             <a:pPr algn="l">
               <a:lnSpc>
-                <a:spcPct val="95000"/>
+                <a:spcPct val="100000"/>
               </a:lnSpc>
               <a:spcAft>
                 <a:spcPts val="0"/>
               </a:spcAft>
             </a:pPr>
             <a:r>
-              <a:rPr sz="3400" b="1">
-                <a:solidFill>
-                  <a:srgbClr val="14314E"/>
-                </a:solidFill>
-                <a:latin typeface="Arial"/>
-              </a:rPr>
-              <a:t>Everything we trained, ran, or rejected</a:t>
-            </a:r>
-          </a:p>
-        </p:txBody>
-      </p:sp>
-      <p:sp>
-        <p:nvSpPr>
-          <p:cNvPr id="67" name="Rectangle 66"/>
+              <a:rPr sz="1700" b="0">
+                <a:solidFill>
+                  <a:srgbClr val="1E293B"/>
+                </a:solidFill>
+                <a:latin typeface="Arial"/>
+              </a:rPr>
+              <a:t>+5,000</a:t>
+            </a:r>
+          </a:p>
+        </p:txBody>
+      </p:sp>
+      <p:sp>
+        <p:nvSpPr>
+          <p:cNvPr id="57" name="TextBox 56"/>
+          <p:cNvSpPr txBox="1"/>
+          <p:nvPr/>
+        </p:nvSpPr>
+        <p:spPr>
+          <a:xfrm>
+            <a:off x="37219737" y="20427188"/>
+            <a:ext cx="4242816" cy="365760"/>
+          </a:xfrm>
+          <a:prstGeom prst="rect">
+            <a:avLst/>
+          </a:prstGeom>
+          <a:noFill/>
+        </p:spPr>
+        <p:txBody>
+          <a:bodyPr wrap="square" lIns="0" rIns="0" tIns="0" bIns="0">
+            <a:spAutoFit/>
+          </a:bodyPr>
+          <a:lstStyle/>
+          <a:p>
+            <a:pPr algn="r">
+              <a:lnSpc>
+                <a:spcPct val="100000"/>
+              </a:lnSpc>
+              <a:spcAft>
+                <a:spcPts val="0"/>
+              </a:spcAft>
+            </a:pPr>
+            <a:r>
+              <a:rPr sz="1700" b="0">
+                <a:solidFill>
+                  <a:srgbClr val="1E293B"/>
+                </a:solidFill>
+                <a:latin typeface="Arial"/>
+              </a:rPr>
+              <a:t>0.8609 ± 0.0036</a:t>
+            </a:r>
+          </a:p>
+        </p:txBody>
+      </p:sp>
+      <p:sp>
+        <p:nvSpPr>
+          <p:cNvPr id="58" name="TextBox 57"/>
+          <p:cNvSpPr txBox="1"/>
+          <p:nvPr/>
+        </p:nvSpPr>
+        <p:spPr>
+          <a:xfrm>
+            <a:off x="41462553" y="20427188"/>
+            <a:ext cx="1697126" cy="365760"/>
+          </a:xfrm>
+          <a:prstGeom prst="rect">
+            <a:avLst/>
+          </a:prstGeom>
+          <a:noFill/>
+        </p:spPr>
+        <p:txBody>
+          <a:bodyPr wrap="square" lIns="0" rIns="0" tIns="0" bIns="0">
+            <a:spAutoFit/>
+          </a:bodyPr>
+          <a:lstStyle/>
+          <a:p>
+            <a:pPr algn="r">
+              <a:lnSpc>
+                <a:spcPct val="100000"/>
+              </a:lnSpc>
+              <a:spcAft>
+                <a:spcPts val="0"/>
+              </a:spcAft>
+            </a:pPr>
+            <a:r>
+              <a:rPr sz="1700" b="0">
+                <a:solidFill>
+                  <a:srgbClr val="1E293B"/>
+                </a:solidFill>
+                <a:latin typeface="Arial"/>
+              </a:rPr>
+              <a:t>3</a:t>
+            </a:r>
+          </a:p>
+        </p:txBody>
+      </p:sp>
+      <p:sp>
+        <p:nvSpPr>
+          <p:cNvPr id="59" name="TextBox 58"/>
+          <p:cNvSpPr txBox="1"/>
+          <p:nvPr/>
+        </p:nvSpPr>
+        <p:spPr>
+          <a:xfrm>
+            <a:off x="32552640" y="20829524"/>
+            <a:ext cx="4667097" cy="365760"/>
+          </a:xfrm>
+          <a:prstGeom prst="rect">
+            <a:avLst/>
+          </a:prstGeom>
+          <a:noFill/>
+        </p:spPr>
+        <p:txBody>
+          <a:bodyPr wrap="square" lIns="0" rIns="0" tIns="0" bIns="0">
+            <a:spAutoFit/>
+          </a:bodyPr>
+          <a:lstStyle/>
+          <a:p>
+            <a:pPr algn="l">
+              <a:lnSpc>
+                <a:spcPct val="100000"/>
+              </a:lnSpc>
+              <a:spcAft>
+                <a:spcPts val="0"/>
+              </a:spcAft>
+            </a:pPr>
+            <a:r>
+              <a:rPr sz="1700" b="0">
+                <a:solidFill>
+                  <a:srgbClr val="1E293B"/>
+                </a:solidFill>
+                <a:latin typeface="Arial"/>
+              </a:rPr>
+              <a:t>+15,000</a:t>
+            </a:r>
+          </a:p>
+        </p:txBody>
+      </p:sp>
+      <p:sp>
+        <p:nvSpPr>
+          <p:cNvPr id="60" name="TextBox 59"/>
+          <p:cNvSpPr txBox="1"/>
+          <p:nvPr/>
+        </p:nvSpPr>
+        <p:spPr>
+          <a:xfrm>
+            <a:off x="37219737" y="20829524"/>
+            <a:ext cx="4242816" cy="365760"/>
+          </a:xfrm>
+          <a:prstGeom prst="rect">
+            <a:avLst/>
+          </a:prstGeom>
+          <a:noFill/>
+        </p:spPr>
+        <p:txBody>
+          <a:bodyPr wrap="square" lIns="0" rIns="0" tIns="0" bIns="0">
+            <a:spAutoFit/>
+          </a:bodyPr>
+          <a:lstStyle/>
+          <a:p>
+            <a:pPr algn="r">
+              <a:lnSpc>
+                <a:spcPct val="100000"/>
+              </a:lnSpc>
+              <a:spcAft>
+                <a:spcPts val="0"/>
+              </a:spcAft>
+            </a:pPr>
+            <a:r>
+              <a:rPr sz="1700" b="0">
+                <a:solidFill>
+                  <a:srgbClr val="1E293B"/>
+                </a:solidFill>
+                <a:latin typeface="Arial"/>
+              </a:rPr>
+              <a:t>0.8580 ± 0.0047</a:t>
+            </a:r>
+          </a:p>
+        </p:txBody>
+      </p:sp>
+      <p:sp>
+        <p:nvSpPr>
+          <p:cNvPr id="61" name="TextBox 60"/>
+          <p:cNvSpPr txBox="1"/>
+          <p:nvPr/>
+        </p:nvSpPr>
+        <p:spPr>
+          <a:xfrm>
+            <a:off x="41462553" y="20829524"/>
+            <a:ext cx="1697126" cy="365760"/>
+          </a:xfrm>
+          <a:prstGeom prst="rect">
+            <a:avLst/>
+          </a:prstGeom>
+          <a:noFill/>
+        </p:spPr>
+        <p:txBody>
+          <a:bodyPr wrap="square" lIns="0" rIns="0" tIns="0" bIns="0">
+            <a:spAutoFit/>
+          </a:bodyPr>
+          <a:lstStyle/>
+          <a:p>
+            <a:pPr algn="r">
+              <a:lnSpc>
+                <a:spcPct val="100000"/>
+              </a:lnSpc>
+              <a:spcAft>
+                <a:spcPts val="0"/>
+              </a:spcAft>
+            </a:pPr>
+            <a:r>
+              <a:rPr sz="1700" b="0">
+                <a:solidFill>
+                  <a:srgbClr val="1E293B"/>
+                </a:solidFill>
+                <a:latin typeface="Arial"/>
+              </a:rPr>
+              <a:t>3</a:t>
+            </a:r>
+          </a:p>
+        </p:txBody>
+      </p:sp>
+      <p:sp>
+        <p:nvSpPr>
+          <p:cNvPr id="62" name="TextBox 61"/>
+          <p:cNvSpPr txBox="1"/>
+          <p:nvPr/>
+        </p:nvSpPr>
+        <p:spPr>
+          <a:xfrm>
+            <a:off x="32552640" y="21231860"/>
+            <a:ext cx="4667097" cy="365760"/>
+          </a:xfrm>
+          <a:prstGeom prst="rect">
+            <a:avLst/>
+          </a:prstGeom>
+          <a:noFill/>
+        </p:spPr>
+        <p:txBody>
+          <a:bodyPr wrap="square" lIns="0" rIns="0" tIns="0" bIns="0">
+            <a:spAutoFit/>
+          </a:bodyPr>
+          <a:lstStyle/>
+          <a:p>
+            <a:pPr algn="l">
+              <a:lnSpc>
+                <a:spcPct val="100000"/>
+              </a:lnSpc>
+              <a:spcAft>
+                <a:spcPts val="0"/>
+              </a:spcAft>
+            </a:pPr>
+            <a:r>
+              <a:rPr sz="1700" b="1">
+                <a:solidFill>
+                  <a:srgbClr val="1C6FB5"/>
+                </a:solidFill>
+                <a:latin typeface="Arial"/>
+              </a:rPr>
+              <a:t>+40,000</a:t>
+            </a:r>
+          </a:p>
+        </p:txBody>
+      </p:sp>
+      <p:sp>
+        <p:nvSpPr>
+          <p:cNvPr id="63" name="TextBox 62"/>
+          <p:cNvSpPr txBox="1"/>
+          <p:nvPr/>
+        </p:nvSpPr>
+        <p:spPr>
+          <a:xfrm>
+            <a:off x="37219737" y="21231860"/>
+            <a:ext cx="4242816" cy="365760"/>
+          </a:xfrm>
+          <a:prstGeom prst="rect">
+            <a:avLst/>
+          </a:prstGeom>
+          <a:noFill/>
+        </p:spPr>
+        <p:txBody>
+          <a:bodyPr wrap="square" lIns="0" rIns="0" tIns="0" bIns="0">
+            <a:spAutoFit/>
+          </a:bodyPr>
+          <a:lstStyle/>
+          <a:p>
+            <a:pPr algn="r">
+              <a:lnSpc>
+                <a:spcPct val="100000"/>
+              </a:lnSpc>
+              <a:spcAft>
+                <a:spcPts val="0"/>
+              </a:spcAft>
+            </a:pPr>
+            <a:r>
+              <a:rPr sz="1700" b="1">
+                <a:solidFill>
+                  <a:srgbClr val="1C6FB5"/>
+                </a:solidFill>
+                <a:latin typeface="Arial"/>
+              </a:rPr>
+              <a:t>0.8448 ± 0.0018</a:t>
+            </a:r>
+          </a:p>
+        </p:txBody>
+      </p:sp>
+      <p:sp>
+        <p:nvSpPr>
+          <p:cNvPr id="64" name="TextBox 63"/>
+          <p:cNvSpPr txBox="1"/>
+          <p:nvPr/>
+        </p:nvSpPr>
+        <p:spPr>
+          <a:xfrm>
+            <a:off x="41462553" y="21231860"/>
+            <a:ext cx="1697126" cy="365760"/>
+          </a:xfrm>
+          <a:prstGeom prst="rect">
+            <a:avLst/>
+          </a:prstGeom>
+          <a:noFill/>
+        </p:spPr>
+        <p:txBody>
+          <a:bodyPr wrap="square" lIns="0" rIns="0" tIns="0" bIns="0">
+            <a:spAutoFit/>
+          </a:bodyPr>
+          <a:lstStyle/>
+          <a:p>
+            <a:pPr algn="r">
+              <a:lnSpc>
+                <a:spcPct val="100000"/>
+              </a:lnSpc>
+              <a:spcAft>
+                <a:spcPts val="0"/>
+              </a:spcAft>
+            </a:pPr>
+            <a:r>
+              <a:rPr sz="1700" b="1">
+                <a:solidFill>
+                  <a:srgbClr val="1C6FB5"/>
+                </a:solidFill>
+                <a:latin typeface="Arial"/>
+              </a:rPr>
+              <a:t>3</a:t>
+            </a:r>
+          </a:p>
+        </p:txBody>
+      </p:sp>
+      <p:sp>
+        <p:nvSpPr>
+          <p:cNvPr id="65" name="Rectangle 64"/>
           <p:cNvSpPr/>
           <p:nvPr/>
         </p:nvSpPr>
         <p:spPr>
           <a:xfrm>
-            <a:off x="11704320" y="25711912"/>
-            <a:ext cx="20482560" cy="27432"/>
+            <a:off x="32552640" y="21661628"/>
+            <a:ext cx="10607040" cy="23774"/>
           </a:xfrm>
           <a:prstGeom prst="rect">
             <a:avLst/>
           </a:prstGeom>
           <a:solidFill>
-            <a:srgbClr val="1C6FB5"/>
+            <a:srgbClr val="1E293B"/>
           </a:solidFill>
           <a:ln>
             <a:noFill/>
@@ -5792,39 +5708,57 @@
           </a:p>
         </p:txBody>
       </p:sp>
-      <p:pic>
-        <p:nvPicPr>
-          <p:cNvPr id="68" name="Picture 67" descr="m_ledger.png"/>
-          <p:cNvPicPr>
-            <a:picLocks noChangeAspect="1"/>
-          </p:cNvPicPr>
-          <p:nvPr/>
-        </p:nvPicPr>
-        <p:blipFill>
-          <a:blip r:embed="rId7"/>
-          <a:stretch>
-            <a:fillRect/>
-          </a:stretch>
-        </p:blipFill>
-        <p:spPr>
-          <a:xfrm>
-            <a:off x="11704320" y="26041096"/>
-            <a:ext cx="20482560" cy="3749040"/>
-          </a:xfrm>
-          <a:prstGeom prst="rect">
-            <a:avLst/>
-          </a:prstGeom>
-        </p:spPr>
-      </p:pic>
-      <p:sp>
-        <p:nvSpPr>
-          <p:cNvPr id="69" name="TextBox 68"/>
-          <p:cNvSpPr txBox="1"/>
-          <p:nvPr/>
-        </p:nvSpPr>
-        <p:spPr>
-          <a:xfrm>
-            <a:off x="11704320" y="29899864"/>
+      <p:sp>
+        <p:nvSpPr>
+          <p:cNvPr id="66" name="TextBox 65"/>
+          <p:cNvSpPr txBox="1"/>
+          <p:nvPr/>
+        </p:nvSpPr>
+        <p:spPr>
+          <a:xfrm>
+            <a:off x="32552640" y="21926804"/>
+            <a:ext cx="10607040" cy="365760"/>
+          </a:xfrm>
+          <a:prstGeom prst="rect">
+            <a:avLst/>
+          </a:prstGeom>
+          <a:noFill/>
+        </p:spPr>
+        <p:txBody>
+          <a:bodyPr wrap="square" lIns="0" rIns="0" tIns="0" bIns="0">
+            <a:spAutoFit/>
+          </a:bodyPr>
+          <a:lstStyle/>
+          <a:p>
+            <a:pPr algn="l">
+              <a:lnSpc>
+                <a:spcPct val="122000"/>
+              </a:lnSpc>
+              <a:spcAft>
+                <a:spcPts val="1200"/>
+              </a:spcAft>
+            </a:pPr>
+            <a:r>
+              <a:rPr sz="1600" b="0">
+                <a:solidFill>
+                  <a:srgbClr val="556575"/>
+                </a:solidFill>
+                <a:latin typeface="Arial"/>
+              </a:rPr>
+              <a:t>Twelve times the data costs 0.0189, which is 8.2 times the seed spread, and the same eight checkpoints fall on a second dataset too. One of six audited web sources clears a 0.90 label-precision bar. This is why the robots exist.</a:t>
+            </a:r>
+          </a:p>
+        </p:txBody>
+      </p:sp>
+      <p:sp>
+        <p:nvSpPr>
+          <p:cNvPr id="67" name="TextBox 66"/>
+          <p:cNvSpPr txBox="1"/>
+          <p:nvPr/>
+        </p:nvSpPr>
+        <p:spPr>
+          <a:xfrm>
+            <a:off x="11704320" y="25139395"/>
             <a:ext cx="20482560" cy="365760"/>
           </a:xfrm>
           <a:prstGeom prst="rect">
@@ -5840,76 +5774,34 @@
           <a:p>
             <a:pPr algn="l">
               <a:lnSpc>
-                <a:spcPct val="118000"/>
+                <a:spcPct val="95000"/>
               </a:lnSpc>
               <a:spcAft>
                 <a:spcPts val="0"/>
               </a:spcAft>
             </a:pPr>
             <a:r>
-              <a:rPr sz="1600" b="0">
-                <a:solidFill>
-                  <a:srgbClr val="556575"/>
-                </a:solidFill>
-                <a:latin typeface="Arial"/>
-              </a:rPr>
-              <a:t>Figure 6.  30 rows in four families, which is 27 distinct models: OWLv2-large and Qwen2.5-7B each appear twice because each does two jobs here. One model is deployed. The zero-shot column is a single deterministic pass per model with no repeats, scored as mAP50 on the 848-image split; the reviewer column is the 149-case dev split, and two of its arms are still running. RF-DETR's score is on a third scale and is never differenced against the rows above it: the one measured offset between two of our evaluators, 0.0239, is larger than the gap on display.</a:t>
-            </a:r>
-          </a:p>
-        </p:txBody>
-      </p:sp>
-      <p:sp>
-        <p:nvSpPr>
-          <p:cNvPr id="70" name="TextBox 69"/>
-          <p:cNvSpPr txBox="1"/>
-          <p:nvPr/>
-        </p:nvSpPr>
-        <p:spPr>
-          <a:xfrm>
-            <a:off x="731520" y="25144984"/>
-            <a:ext cx="10607040" cy="365760"/>
-          </a:xfrm>
-          <a:prstGeom prst="rect">
-            <a:avLst/>
-          </a:prstGeom>
-          <a:noFill/>
-        </p:spPr>
-        <p:txBody>
-          <a:bodyPr wrap="square" lIns="0" rIns="0" tIns="0" bIns="0">
-            <a:spAutoFit/>
-          </a:bodyPr>
-          <a:lstStyle/>
-          <a:p>
-            <a:pPr algn="l">
-              <a:lnSpc>
-                <a:spcPct val="95000"/>
-              </a:lnSpc>
-              <a:spcAft>
-                <a:spcPts val="0"/>
-              </a:spcAft>
-            </a:pPr>
-            <a:r>
               <a:rPr sz="3400" b="1">
                 <a:solidFill>
                   <a:srgbClr val="14314E"/>
                 </a:solidFill>
                 <a:latin typeface="Arial"/>
               </a:rPr>
-              <a:t>Six audited web sources</a:t>
-            </a:r>
-          </a:p>
-        </p:txBody>
-      </p:sp>
-      <p:sp>
-        <p:nvSpPr>
-          <p:cNvPr id="71" name="Rectangle 70"/>
+              <a:t>Everything we trained, ran, or rejected</a:t>
+            </a:r>
+          </a:p>
+        </p:txBody>
+      </p:sp>
+      <p:sp>
+        <p:nvSpPr>
+          <p:cNvPr id="68" name="Rectangle 67"/>
           <p:cNvSpPr/>
           <p:nvPr/>
         </p:nvSpPr>
         <p:spPr>
           <a:xfrm>
-            <a:off x="731520" y="25711912"/>
-            <a:ext cx="10607040" cy="27432"/>
+            <a:off x="11704320" y="25700735"/>
+            <a:ext cx="20482560" cy="27432"/>
           </a:xfrm>
           <a:prstGeom prst="rect">
             <a:avLst/>
@@ -5944,15 +5836,81 @@
           </a:p>
         </p:txBody>
       </p:sp>
-      <p:sp>
-        <p:nvSpPr>
-          <p:cNvPr id="72" name="TextBox 71"/>
-          <p:cNvSpPr txBox="1"/>
-          <p:nvPr/>
-        </p:nvSpPr>
-        <p:spPr>
-          <a:xfrm>
-            <a:off x="731520" y="26041096"/>
+      <p:pic>
+        <p:nvPicPr>
+          <p:cNvPr id="69" name="Picture 68" descr="m_ledger.png"/>
+          <p:cNvPicPr>
+            <a:picLocks noChangeAspect="1"/>
+          </p:cNvPicPr>
+          <p:nvPr/>
+        </p:nvPicPr>
+        <p:blipFill>
+          <a:blip r:embed="rId7"/>
+          <a:stretch>
+            <a:fillRect/>
+          </a:stretch>
+        </p:blipFill>
+        <p:spPr>
+          <a:xfrm>
+            <a:off x="11704320" y="26029919"/>
+            <a:ext cx="20482560" cy="3749040"/>
+          </a:xfrm>
+          <a:prstGeom prst="rect">
+            <a:avLst/>
+          </a:prstGeom>
+        </p:spPr>
+      </p:pic>
+      <p:sp>
+        <p:nvSpPr>
+          <p:cNvPr id="70" name="TextBox 69"/>
+          <p:cNvSpPr txBox="1"/>
+          <p:nvPr/>
+        </p:nvSpPr>
+        <p:spPr>
+          <a:xfrm>
+            <a:off x="11704320" y="29888687"/>
+            <a:ext cx="20482560" cy="365760"/>
+          </a:xfrm>
+          <a:prstGeom prst="rect">
+            <a:avLst/>
+          </a:prstGeom>
+          <a:noFill/>
+        </p:spPr>
+        <p:txBody>
+          <a:bodyPr wrap="square" lIns="0" rIns="0" tIns="0" bIns="0">
+            <a:spAutoFit/>
+          </a:bodyPr>
+          <a:lstStyle/>
+          <a:p>
+            <a:pPr algn="l">
+              <a:lnSpc>
+                <a:spcPct val="118000"/>
+              </a:lnSpc>
+              <a:spcAft>
+                <a:spcPts val="0"/>
+              </a:spcAft>
+            </a:pPr>
+            <a:r>
+              <a:rPr sz="1600" b="0">
+                <a:solidFill>
+                  <a:srgbClr val="556575"/>
+                </a:solidFill>
+                <a:latin typeface="Arial"/>
+              </a:rPr>
+              <a:t>Figure 6.  30 rows in four families, which is 27 distinct models: OWLv2-large and Qwen2.5-7B each appear twice because each does two jobs here. One model is deployed. The zero-shot column is a single deterministic pass per model with no repeats, scored as mAP50 on the 848-image split; the reviewer column is the 149-case dev split, and two of its arms are still running. RF-DETR's score is on a third scale and is never differenced against the rows above it: the one measured offset between two of our evaluators, 0.0239, is larger than the gap on display.</a:t>
+            </a:r>
+          </a:p>
+        </p:txBody>
+      </p:sp>
+      <p:sp>
+        <p:nvSpPr>
+          <p:cNvPr id="71" name="TextBox 70"/>
+          <p:cNvSpPr txBox="1"/>
+          <p:nvPr/>
+        </p:nvSpPr>
+        <p:spPr>
+          <a:xfrm>
+            <a:off x="731520" y="25139395"/>
             <a:ext cx="10607040" cy="365760"/>
           </a:xfrm>
           <a:prstGeom prst="rect">
@@ -5968,48 +5926,6 @@
           <a:p>
             <a:pPr algn="l">
               <a:lnSpc>
-                <a:spcPct val="122000"/>
-              </a:lnSpc>
-              <a:spcAft>
-                <a:spcPts val="1200"/>
-              </a:spcAft>
-            </a:pPr>
-            <a:r>
-              <a:rPr sz="1600" b="0">
-                <a:solidFill>
-                  <a:srgbClr val="556575"/>
-                </a:solidFill>
-                <a:latin typeface="Arial"/>
-              </a:rPr>
-              <a:t>Of 13,527 labelled images from six audited harvested sources, only 3,208 come from a source that clears a 0.90 label-precision bar. The other five score between 0.18 and 0.74. The same probe reads 1.000 on human-labelled CottonWeedDet12, so those are the data and not the instrument.</a:t>
-            </a:r>
-          </a:p>
-        </p:txBody>
-      </p:sp>
-      <p:sp>
-        <p:nvSpPr>
-          <p:cNvPr id="73" name="TextBox 72"/>
-          <p:cNvSpPr txBox="1"/>
-          <p:nvPr/>
-        </p:nvSpPr>
-        <p:spPr>
-          <a:xfrm>
-            <a:off x="32552640" y="25144984"/>
-            <a:ext cx="10607040" cy="365760"/>
-          </a:xfrm>
-          <a:prstGeom prst="rect">
-            <a:avLst/>
-          </a:prstGeom>
-          <a:noFill/>
-        </p:spPr>
-        <p:txBody>
-          <a:bodyPr wrap="square" lIns="0" rIns="0" tIns="0" bIns="0">
-            <a:spAutoFit/>
-          </a:bodyPr>
-          <a:lstStyle/>
-          <a:p>
-            <a:pPr algn="l">
-              <a:lnSpc>
                 <a:spcPct val="95000"/>
               </a:lnSpc>
               <a:spcAft>
@@ -6023,20 +5939,20 @@
                 </a:solidFill>
                 <a:latin typeface="Arial"/>
               </a:rPr>
-              <a:t>Who notices when it breaks</a:t>
-            </a:r>
-          </a:p>
-        </p:txBody>
-      </p:sp>
-      <p:sp>
-        <p:nvSpPr>
-          <p:cNvPr id="74" name="Rectangle 73"/>
+              <a:t>Six audited web sources</a:t>
+            </a:r>
+          </a:p>
+        </p:txBody>
+      </p:sp>
+      <p:sp>
+        <p:nvSpPr>
+          <p:cNvPr id="72" name="Rectangle 71"/>
           <p:cNvSpPr/>
           <p:nvPr/>
         </p:nvSpPr>
         <p:spPr>
           <a:xfrm>
-            <a:off x="32552640" y="25711912"/>
+            <a:off x="731520" y="25700735"/>
             <a:ext cx="10607040" cy="27432"/>
           </a:xfrm>
           <a:prstGeom prst="rect">
@@ -6074,20 +5990,104 @@
       </p:sp>
       <p:sp>
         <p:nvSpPr>
+          <p:cNvPr id="73" name="TextBox 72"/>
+          <p:cNvSpPr txBox="1"/>
+          <p:nvPr/>
+        </p:nvSpPr>
+        <p:spPr>
+          <a:xfrm>
+            <a:off x="731520" y="26029919"/>
+            <a:ext cx="10607040" cy="365760"/>
+          </a:xfrm>
+          <a:prstGeom prst="rect">
+            <a:avLst/>
+          </a:prstGeom>
+          <a:noFill/>
+        </p:spPr>
+        <p:txBody>
+          <a:bodyPr wrap="square" lIns="0" rIns="0" tIns="0" bIns="0">
+            <a:spAutoFit/>
+          </a:bodyPr>
+          <a:lstStyle/>
+          <a:p>
+            <a:pPr algn="l">
+              <a:lnSpc>
+                <a:spcPct val="122000"/>
+              </a:lnSpc>
+              <a:spcAft>
+                <a:spcPts val="1200"/>
+              </a:spcAft>
+            </a:pPr>
+            <a:r>
+              <a:rPr sz="1600" b="0">
+                <a:solidFill>
+                  <a:srgbClr val="556575"/>
+                </a:solidFill>
+                <a:latin typeface="Arial"/>
+              </a:rPr>
+              <a:t>Of 13,527 labelled images from six audited harvested sources, only 3,208 come from a source that clears a 0.90 label-precision bar. The other five score between 0.18 and 0.74. The same probe reads 1.000 on human-labelled CottonWeedDet12, so those are the data and not the instrument.</a:t>
+            </a:r>
+          </a:p>
+        </p:txBody>
+      </p:sp>
+      <p:sp>
+        <p:nvSpPr>
+          <p:cNvPr id="74" name="TextBox 73"/>
+          <p:cNvSpPr txBox="1"/>
+          <p:nvPr/>
+        </p:nvSpPr>
+        <p:spPr>
+          <a:xfrm>
+            <a:off x="32552640" y="25139395"/>
+            <a:ext cx="10607040" cy="365760"/>
+          </a:xfrm>
+          <a:prstGeom prst="rect">
+            <a:avLst/>
+          </a:prstGeom>
+          <a:noFill/>
+        </p:spPr>
+        <p:txBody>
+          <a:bodyPr wrap="square" lIns="0" rIns="0" tIns="0" bIns="0">
+            <a:spAutoFit/>
+          </a:bodyPr>
+          <a:lstStyle/>
+          <a:p>
+            <a:pPr algn="l">
+              <a:lnSpc>
+                <a:spcPct val="95000"/>
+              </a:lnSpc>
+              <a:spcAft>
+                <a:spcPts val="0"/>
+              </a:spcAft>
+            </a:pPr>
+            <a:r>
+              <a:rPr sz="3400" b="1">
+                <a:solidFill>
+                  <a:srgbClr val="14314E"/>
+                </a:solidFill>
+                <a:latin typeface="Arial"/>
+              </a:rPr>
+              <a:t>Who notices when it breaks</a:t>
+            </a:r>
+          </a:p>
+        </p:txBody>
+      </p:sp>
+      <p:sp>
+        <p:nvSpPr>
           <p:cNvPr id="75" name="Rectangle 74"/>
           <p:cNvSpPr/>
           <p:nvPr/>
         </p:nvSpPr>
         <p:spPr>
           <a:xfrm>
-            <a:off x="32552640" y="26041096"/>
-            <a:ext cx="10607040" cy="23774"/>
+            <a:off x="32552640" y="25700735"/>
+            <a:ext cx="10607040" cy="27432"/>
           </a:xfrm>
           <a:prstGeom prst="rect">
             <a:avLst/>
           </a:prstGeom>
           <a:solidFill>
-            <a:srgbClr val="1E293B"/>
+            <a:srgbClr val="1C6FB5"/>
           </a:solidFill>
           <a:ln>
             <a:noFill/>
@@ -6118,188 +6118,20 @@
       </p:sp>
       <p:sp>
         <p:nvSpPr>
-          <p:cNvPr id="76" name="TextBox 75"/>
-          <p:cNvSpPr txBox="1"/>
-          <p:nvPr/>
-        </p:nvSpPr>
-        <p:spPr>
-          <a:xfrm>
-            <a:off x="32552640" y="26159968"/>
-            <a:ext cx="4030675" cy="365760"/>
-          </a:xfrm>
-          <a:prstGeom prst="rect">
-            <a:avLst/>
-          </a:prstGeom>
-          <a:noFill/>
-        </p:spPr>
-        <p:txBody>
-          <a:bodyPr wrap="square" lIns="0" rIns="0" tIns="0" bIns="0">
-            <a:spAutoFit/>
-          </a:bodyPr>
-          <a:lstStyle/>
-          <a:p>
-            <a:pPr algn="l">
-              <a:lnSpc>
-                <a:spcPct val="100000"/>
-              </a:lnSpc>
-              <a:spcAft>
-                <a:spcPts val="0"/>
-              </a:spcAft>
-            </a:pPr>
-            <a:r>
-              <a:rPr sz="1550" b="1">
-                <a:solidFill>
-                  <a:srgbClr val="1E293B"/>
-                </a:solidFill>
-                <a:latin typeface="Arial"/>
-              </a:rPr>
-              <a:t>reviewer</a:t>
-            </a:r>
-          </a:p>
-        </p:txBody>
-      </p:sp>
-      <p:sp>
-        <p:nvSpPr>
-          <p:cNvPr id="77" name="TextBox 76"/>
-          <p:cNvSpPr txBox="1"/>
-          <p:nvPr/>
-        </p:nvSpPr>
-        <p:spPr>
-          <a:xfrm>
-            <a:off x="36583315" y="26159968"/>
-            <a:ext cx="2227478" cy="365760"/>
-          </a:xfrm>
-          <a:prstGeom prst="rect">
-            <a:avLst/>
-          </a:prstGeom>
-          <a:noFill/>
-        </p:spPr>
-        <p:txBody>
-          <a:bodyPr wrap="square" lIns="0" rIns="0" tIns="0" bIns="0">
-            <a:spAutoFit/>
-          </a:bodyPr>
-          <a:lstStyle/>
-          <a:p>
-            <a:pPr algn="r">
-              <a:lnSpc>
-                <a:spcPct val="100000"/>
-              </a:lnSpc>
-              <a:spcAft>
-                <a:spcPts val="0"/>
-              </a:spcAft>
-            </a:pPr>
-            <a:r>
-              <a:rPr sz="1550" b="1">
-                <a:solidFill>
-                  <a:srgbClr val="1E293B"/>
-                </a:solidFill>
-                <a:latin typeface="Arial"/>
-              </a:rPr>
-              <a:t>recall</a:t>
-            </a:r>
-          </a:p>
-        </p:txBody>
-      </p:sp>
-      <p:sp>
-        <p:nvSpPr>
-          <p:cNvPr id="78" name="TextBox 77"/>
-          <p:cNvSpPr txBox="1"/>
-          <p:nvPr/>
-        </p:nvSpPr>
-        <p:spPr>
-          <a:xfrm>
-            <a:off x="38810793" y="26159968"/>
-            <a:ext cx="2227478" cy="365760"/>
-          </a:xfrm>
-          <a:prstGeom prst="rect">
-            <a:avLst/>
-          </a:prstGeom>
-          <a:noFill/>
-        </p:spPr>
-        <p:txBody>
-          <a:bodyPr wrap="square" lIns="0" rIns="0" tIns="0" bIns="0">
-            <a:spAutoFit/>
-          </a:bodyPr>
-          <a:lstStyle/>
-          <a:p>
-            <a:pPr algn="r">
-              <a:lnSpc>
-                <a:spcPct val="100000"/>
-              </a:lnSpc>
-              <a:spcAft>
-                <a:spcPts val="0"/>
-              </a:spcAft>
-            </a:pPr>
-            <a:r>
-              <a:rPr sz="1550" b="1">
-                <a:solidFill>
-                  <a:srgbClr val="1E293B"/>
-                </a:solidFill>
-                <a:latin typeface="Arial"/>
-              </a:rPr>
-              <a:t>grounded</a:t>
-            </a:r>
-          </a:p>
-        </p:txBody>
-      </p:sp>
-      <p:sp>
-        <p:nvSpPr>
-          <p:cNvPr id="79" name="TextBox 78"/>
-          <p:cNvSpPr txBox="1"/>
-          <p:nvPr/>
-        </p:nvSpPr>
-        <p:spPr>
-          <a:xfrm>
-            <a:off x="41038272" y="26159968"/>
-            <a:ext cx="2121408" cy="365760"/>
-          </a:xfrm>
-          <a:prstGeom prst="rect">
-            <a:avLst/>
-          </a:prstGeom>
-          <a:noFill/>
-        </p:spPr>
-        <p:txBody>
-          <a:bodyPr wrap="square" lIns="0" rIns="0" tIns="0" bIns="0">
-            <a:spAutoFit/>
-          </a:bodyPr>
-          <a:lstStyle/>
-          <a:p>
-            <a:pPr algn="r">
-              <a:lnSpc>
-                <a:spcPct val="100000"/>
-              </a:lnSpc>
-              <a:spcAft>
-                <a:spcPts val="0"/>
-              </a:spcAft>
-            </a:pPr>
-            <a:r>
-              <a:rPr sz="1550" b="1">
-                <a:solidFill>
-                  <a:srgbClr val="1E293B"/>
-                </a:solidFill>
-                <a:latin typeface="Arial"/>
-              </a:rPr>
-              <a:t>incidents</a:t>
-            </a:r>
-          </a:p>
-        </p:txBody>
-      </p:sp>
-      <p:sp>
-        <p:nvSpPr>
-          <p:cNvPr id="80" name="Rectangle 79"/>
+          <p:cNvPr id="76" name="Rectangle 75"/>
           <p:cNvSpPr/>
           <p:nvPr/>
         </p:nvSpPr>
         <p:spPr>
           <a:xfrm>
-            <a:off x="32552640" y="26525728"/>
-            <a:ext cx="10607040" cy="14630"/>
+            <a:off x="32552640" y="26029919"/>
+            <a:ext cx="10607040" cy="23774"/>
           </a:xfrm>
           <a:prstGeom prst="rect">
             <a:avLst/>
           </a:prstGeom>
           <a:solidFill>
-            <a:srgbClr val="C2CEDA"/>
+            <a:srgbClr val="1E293B"/>
           </a:solidFill>
           <a:ln>
             <a:noFill/>
@@ -6330,13 +6162,13 @@
       </p:sp>
       <p:sp>
         <p:nvSpPr>
-          <p:cNvPr id="81" name="TextBox 80"/>
-          <p:cNvSpPr txBox="1"/>
-          <p:nvPr/>
-        </p:nvSpPr>
-        <p:spPr>
-          <a:xfrm>
-            <a:off x="32552640" y="26635456"/>
+          <p:cNvPr id="77" name="TextBox 76"/>
+          <p:cNvSpPr txBox="1"/>
+          <p:nvPr/>
+        </p:nvSpPr>
+        <p:spPr>
+          <a:xfrm>
+            <a:off x="32552640" y="26148791"/>
             <a:ext cx="4030675" cy="365760"/>
           </a:xfrm>
           <a:prstGeom prst="rect">
@@ -6359,26 +6191,26 @@
               </a:spcAft>
             </a:pPr>
             <a:r>
-              <a:rPr sz="1700" b="0">
+              <a:rPr sz="1550" b="1">
                 <a:solidFill>
                   <a:srgbClr val="1E293B"/>
                 </a:solidFill>
                 <a:latin typeface="Arial"/>
               </a:rPr>
-              <a:t>scripted watchdog</a:t>
-            </a:r>
-          </a:p>
-        </p:txBody>
-      </p:sp>
-      <p:sp>
-        <p:nvSpPr>
-          <p:cNvPr id="82" name="TextBox 81"/>
-          <p:cNvSpPr txBox="1"/>
-          <p:nvPr/>
-        </p:nvSpPr>
-        <p:spPr>
-          <a:xfrm>
-            <a:off x="36583315" y="26635456"/>
+              <a:t>reviewer</a:t>
+            </a:r>
+          </a:p>
+        </p:txBody>
+      </p:sp>
+      <p:sp>
+        <p:nvSpPr>
+          <p:cNvPr id="78" name="TextBox 77"/>
+          <p:cNvSpPr txBox="1"/>
+          <p:nvPr/>
+        </p:nvSpPr>
+        <p:spPr>
+          <a:xfrm>
+            <a:off x="36583315" y="26148791"/>
             <a:ext cx="2227478" cy="365760"/>
           </a:xfrm>
           <a:prstGeom prst="rect">
@@ -6401,26 +6233,26 @@
               </a:spcAft>
             </a:pPr>
             <a:r>
-              <a:rPr sz="1700" b="0">
+              <a:rPr sz="1550" b="1">
                 <a:solidFill>
                   <a:srgbClr val="1E293B"/>
                 </a:solidFill>
                 <a:latin typeface="Arial"/>
               </a:rPr>
-              <a:t>no decision</a:t>
-            </a:r>
-          </a:p>
-        </p:txBody>
-      </p:sp>
-      <p:sp>
-        <p:nvSpPr>
-          <p:cNvPr id="83" name="TextBox 82"/>
-          <p:cNvSpPr txBox="1"/>
-          <p:nvPr/>
-        </p:nvSpPr>
-        <p:spPr>
-          <a:xfrm>
-            <a:off x="38810793" y="26635456"/>
+              <a:t>recall</a:t>
+            </a:r>
+          </a:p>
+        </p:txBody>
+      </p:sp>
+      <p:sp>
+        <p:nvSpPr>
+          <p:cNvPr id="79" name="TextBox 78"/>
+          <p:cNvSpPr txBox="1"/>
+          <p:nvPr/>
+        </p:nvSpPr>
+        <p:spPr>
+          <a:xfrm>
+            <a:off x="38810793" y="26148791"/>
             <a:ext cx="2227478" cy="365760"/>
           </a:xfrm>
           <a:prstGeom prst="rect">
@@ -6443,26 +6275,26 @@
               </a:spcAft>
             </a:pPr>
             <a:r>
-              <a:rPr sz="1700" b="0">
+              <a:rPr sz="1550" b="1">
                 <a:solidFill>
                   <a:srgbClr val="1E293B"/>
                 </a:solidFill>
                 <a:latin typeface="Arial"/>
               </a:rPr>
-              <a:t>—</a:t>
-            </a:r>
-          </a:p>
-        </p:txBody>
-      </p:sp>
-      <p:sp>
-        <p:nvSpPr>
-          <p:cNvPr id="84" name="TextBox 83"/>
-          <p:cNvSpPr txBox="1"/>
-          <p:nvPr/>
-        </p:nvSpPr>
-        <p:spPr>
-          <a:xfrm>
-            <a:off x="41038272" y="26635456"/>
+              <a:t>grounded</a:t>
+            </a:r>
+          </a:p>
+        </p:txBody>
+      </p:sp>
+      <p:sp>
+        <p:nvSpPr>
+          <p:cNvPr id="80" name="TextBox 79"/>
+          <p:cNvSpPr txBox="1"/>
+          <p:nvPr/>
+        </p:nvSpPr>
+        <p:spPr>
+          <a:xfrm>
+            <a:off x="41038272" y="26148791"/>
             <a:ext cx="2121408" cy="365760"/>
           </a:xfrm>
           <a:prstGeom prst="rect">
@@ -6485,705 +6317,33 @@
               </a:spcAft>
             </a:pPr>
             <a:r>
-              <a:rPr sz="1700" b="0">
+              <a:rPr sz="1550" b="1">
                 <a:solidFill>
                   <a:srgbClr val="1E293B"/>
                 </a:solidFill>
                 <a:latin typeface="Arial"/>
               </a:rPr>
-              <a:t>—</a:t>
-            </a:r>
-          </a:p>
-        </p:txBody>
-      </p:sp>
-      <p:sp>
-        <p:nvSpPr>
-          <p:cNvPr id="85" name="TextBox 84"/>
-          <p:cNvSpPr txBox="1"/>
-          <p:nvPr/>
-        </p:nvSpPr>
-        <p:spPr>
-          <a:xfrm>
-            <a:off x="32552640" y="27037792"/>
-            <a:ext cx="4030675" cy="365760"/>
-          </a:xfrm>
-          <a:prstGeom prst="rect">
-            <a:avLst/>
-          </a:prstGeom>
-          <a:noFill/>
-        </p:spPr>
-        <p:txBody>
-          <a:bodyPr wrap="square" lIns="0" rIns="0" tIns="0" bIns="0">
-            <a:spAutoFit/>
-          </a:bodyPr>
-          <a:lstStyle/>
-          <a:p>
-            <a:pPr algn="l">
-              <a:lnSpc>
-                <a:spcPct val="100000"/>
-              </a:lnSpc>
-              <a:spcAft>
-                <a:spcPts val="0"/>
-              </a:spcAft>
-            </a:pPr>
-            <a:r>
-              <a:rPr sz="1700" b="0">
-                <a:solidFill>
-                  <a:srgbClr val="1E293B"/>
-                </a:solidFill>
-                <a:latin typeface="Arial"/>
-              </a:rPr>
-              <a:t>12 rules</a:t>
-            </a:r>
-          </a:p>
-        </p:txBody>
-      </p:sp>
-      <p:sp>
-        <p:nvSpPr>
-          <p:cNvPr id="86" name="TextBox 85"/>
-          <p:cNvSpPr txBox="1"/>
-          <p:nvPr/>
-        </p:nvSpPr>
-        <p:spPr>
-          <a:xfrm>
-            <a:off x="36583315" y="27037792"/>
-            <a:ext cx="2227478" cy="365760"/>
-          </a:xfrm>
-          <a:prstGeom prst="rect">
-            <a:avLst/>
-          </a:prstGeom>
-          <a:noFill/>
-        </p:spPr>
-        <p:txBody>
-          <a:bodyPr wrap="square" lIns="0" rIns="0" tIns="0" bIns="0">
-            <a:spAutoFit/>
-          </a:bodyPr>
-          <a:lstStyle/>
-          <a:p>
-            <a:pPr algn="r">
-              <a:lnSpc>
-                <a:spcPct val="100000"/>
-              </a:lnSpc>
-              <a:spcAft>
-                <a:spcPts val="0"/>
-              </a:spcAft>
-            </a:pPr>
-            <a:r>
-              <a:rPr sz="1700" b="0">
-                <a:solidFill>
-                  <a:srgbClr val="1E293B"/>
-                </a:solidFill>
-                <a:latin typeface="Arial"/>
-              </a:rPr>
-              <a:t>0.095</a:t>
-            </a:r>
-          </a:p>
-        </p:txBody>
-      </p:sp>
-      <p:sp>
-        <p:nvSpPr>
-          <p:cNvPr id="87" name="TextBox 86"/>
-          <p:cNvSpPr txBox="1"/>
-          <p:nvPr/>
-        </p:nvSpPr>
-        <p:spPr>
-          <a:xfrm>
-            <a:off x="38810793" y="27037792"/>
-            <a:ext cx="2227478" cy="365760"/>
-          </a:xfrm>
-          <a:prstGeom prst="rect">
-            <a:avLst/>
-          </a:prstGeom>
-          <a:noFill/>
-        </p:spPr>
-        <p:txBody>
-          <a:bodyPr wrap="square" lIns="0" rIns="0" tIns="0" bIns="0">
-            <a:spAutoFit/>
-          </a:bodyPr>
-          <a:lstStyle/>
-          <a:p>
-            <a:pPr algn="r">
-              <a:lnSpc>
-                <a:spcPct val="100000"/>
-              </a:lnSpc>
-              <a:spcAft>
-                <a:spcPts val="0"/>
-              </a:spcAft>
-            </a:pPr>
-            <a:r>
-              <a:rPr sz="1700" b="0">
-                <a:solidFill>
-                  <a:srgbClr val="1E293B"/>
-                </a:solidFill>
-                <a:latin typeface="Arial"/>
-              </a:rPr>
-              <a:t>0.095</a:t>
-            </a:r>
-          </a:p>
-        </p:txBody>
-      </p:sp>
-      <p:sp>
-        <p:nvSpPr>
-          <p:cNvPr id="88" name="TextBox 87"/>
-          <p:cNvSpPr txBox="1"/>
-          <p:nvPr/>
-        </p:nvSpPr>
-        <p:spPr>
-          <a:xfrm>
-            <a:off x="41038272" y="27037792"/>
-            <a:ext cx="2121408" cy="365760"/>
-          </a:xfrm>
-          <a:prstGeom prst="rect">
-            <a:avLst/>
-          </a:prstGeom>
-          <a:noFill/>
-        </p:spPr>
-        <p:txBody>
-          <a:bodyPr wrap="square" lIns="0" rIns="0" tIns="0" bIns="0">
-            <a:spAutoFit/>
-          </a:bodyPr>
-          <a:lstStyle/>
-          <a:p>
-            <a:pPr algn="r">
-              <a:lnSpc>
-                <a:spcPct val="100000"/>
-              </a:lnSpc>
-              <a:spcAft>
-                <a:spcPts val="0"/>
-              </a:spcAft>
-            </a:pPr>
-            <a:r>
-              <a:rPr sz="1700" b="0">
-                <a:solidFill>
-                  <a:srgbClr val="1E293B"/>
-                </a:solidFill>
-                <a:latin typeface="Arial"/>
-              </a:rPr>
-              <a:t>116</a:t>
-            </a:r>
-          </a:p>
-        </p:txBody>
-      </p:sp>
-      <p:sp>
-        <p:nvSpPr>
-          <p:cNvPr id="89" name="TextBox 88"/>
-          <p:cNvSpPr txBox="1"/>
-          <p:nvPr/>
-        </p:nvSpPr>
-        <p:spPr>
-          <a:xfrm>
-            <a:off x="32552640" y="27440128"/>
-            <a:ext cx="4030675" cy="365760"/>
-          </a:xfrm>
-          <a:prstGeom prst="rect">
-            <a:avLst/>
-          </a:prstGeom>
-          <a:noFill/>
-        </p:spPr>
-        <p:txBody>
-          <a:bodyPr wrap="square" lIns="0" rIns="0" tIns="0" bIns="0">
-            <a:spAutoFit/>
-          </a:bodyPr>
-          <a:lstStyle/>
-          <a:p>
-            <a:pPr algn="l">
-              <a:lnSpc>
-                <a:spcPct val="100000"/>
-              </a:lnSpc>
-              <a:spcAft>
-                <a:spcPts val="0"/>
-              </a:spcAft>
-            </a:pPr>
-            <a:r>
-              <a:rPr sz="1700" b="0">
-                <a:solidFill>
-                  <a:srgbClr val="1E293B"/>
-                </a:solidFill>
-                <a:latin typeface="Arial"/>
-              </a:rPr>
-              <a:t>Qwen2.5-7B</a:t>
-            </a:r>
-          </a:p>
-        </p:txBody>
-      </p:sp>
-      <p:sp>
-        <p:nvSpPr>
-          <p:cNvPr id="90" name="TextBox 89"/>
-          <p:cNvSpPr txBox="1"/>
-          <p:nvPr/>
-        </p:nvSpPr>
-        <p:spPr>
-          <a:xfrm>
-            <a:off x="36583315" y="27440128"/>
-            <a:ext cx="2227478" cy="365760"/>
-          </a:xfrm>
-          <a:prstGeom prst="rect">
-            <a:avLst/>
-          </a:prstGeom>
-          <a:noFill/>
-        </p:spPr>
-        <p:txBody>
-          <a:bodyPr wrap="square" lIns="0" rIns="0" tIns="0" bIns="0">
-            <a:spAutoFit/>
-          </a:bodyPr>
-          <a:lstStyle/>
-          <a:p>
-            <a:pPr algn="r">
-              <a:lnSpc>
-                <a:spcPct val="100000"/>
-              </a:lnSpc>
-              <a:spcAft>
-                <a:spcPts val="0"/>
-              </a:spcAft>
-            </a:pPr>
-            <a:r>
-              <a:rPr sz="1700" b="0">
-                <a:solidFill>
-                  <a:srgbClr val="1E293B"/>
-                </a:solidFill>
-                <a:latin typeface="Arial"/>
-              </a:rPr>
-              <a:t>0.823</a:t>
-            </a:r>
-          </a:p>
-        </p:txBody>
-      </p:sp>
-      <p:sp>
-        <p:nvSpPr>
-          <p:cNvPr id="91" name="TextBox 90"/>
-          <p:cNvSpPr txBox="1"/>
-          <p:nvPr/>
-        </p:nvSpPr>
-        <p:spPr>
-          <a:xfrm>
-            <a:off x="38810793" y="27440128"/>
-            <a:ext cx="2227478" cy="365760"/>
-          </a:xfrm>
-          <a:prstGeom prst="rect">
-            <a:avLst/>
-          </a:prstGeom>
-          <a:noFill/>
-        </p:spPr>
-        <p:txBody>
-          <a:bodyPr wrap="square" lIns="0" rIns="0" tIns="0" bIns="0">
-            <a:spAutoFit/>
-          </a:bodyPr>
-          <a:lstStyle/>
-          <a:p>
-            <a:pPr algn="r">
-              <a:lnSpc>
-                <a:spcPct val="100000"/>
-              </a:lnSpc>
-              <a:spcAft>
-                <a:spcPts val="0"/>
-              </a:spcAft>
-            </a:pPr>
-            <a:r>
-              <a:rPr sz="1700" b="0">
-                <a:solidFill>
-                  <a:srgbClr val="1E293B"/>
-                </a:solidFill>
-                <a:latin typeface="Arial"/>
-              </a:rPr>
-              <a:t>0.274</a:t>
-            </a:r>
-          </a:p>
-        </p:txBody>
-      </p:sp>
-      <p:sp>
-        <p:nvSpPr>
-          <p:cNvPr id="92" name="TextBox 91"/>
-          <p:cNvSpPr txBox="1"/>
-          <p:nvPr/>
-        </p:nvSpPr>
-        <p:spPr>
-          <a:xfrm>
-            <a:off x="41038272" y="27440128"/>
-            <a:ext cx="2121408" cy="365760"/>
-          </a:xfrm>
-          <a:prstGeom prst="rect">
-            <a:avLst/>
-          </a:prstGeom>
-          <a:noFill/>
-        </p:spPr>
-        <p:txBody>
-          <a:bodyPr wrap="square" lIns="0" rIns="0" tIns="0" bIns="0">
-            <a:spAutoFit/>
-          </a:bodyPr>
-          <a:lstStyle/>
-          <a:p>
-            <a:pPr algn="r">
-              <a:lnSpc>
-                <a:spcPct val="100000"/>
-              </a:lnSpc>
-              <a:spcAft>
-                <a:spcPts val="0"/>
-              </a:spcAft>
-            </a:pPr>
-            <a:r>
-              <a:rPr sz="1700" b="0">
-                <a:solidFill>
-                  <a:srgbClr val="1E293B"/>
-                </a:solidFill>
-                <a:latin typeface="Arial"/>
-              </a:rPr>
-              <a:t>113</a:t>
-            </a:r>
-          </a:p>
-        </p:txBody>
-      </p:sp>
-      <p:sp>
-        <p:nvSpPr>
-          <p:cNvPr id="93" name="TextBox 92"/>
-          <p:cNvSpPr txBox="1"/>
-          <p:nvPr/>
-        </p:nvSpPr>
-        <p:spPr>
-          <a:xfrm>
-            <a:off x="32552640" y="27842464"/>
-            <a:ext cx="4030675" cy="365760"/>
-          </a:xfrm>
-          <a:prstGeom prst="rect">
-            <a:avLst/>
-          </a:prstGeom>
-          <a:noFill/>
-        </p:spPr>
-        <p:txBody>
-          <a:bodyPr wrap="square" lIns="0" rIns="0" tIns="0" bIns="0">
-            <a:spAutoFit/>
-          </a:bodyPr>
-          <a:lstStyle/>
-          <a:p>
-            <a:pPr algn="l">
-              <a:lnSpc>
-                <a:spcPct val="100000"/>
-              </a:lnSpc>
-              <a:spcAft>
-                <a:spcPts val="0"/>
-              </a:spcAft>
-            </a:pPr>
-            <a:r>
-              <a:rPr sz="1700" b="0">
-                <a:solidFill>
-                  <a:srgbClr val="1E293B"/>
-                </a:solidFill>
-                <a:latin typeface="Arial"/>
-              </a:rPr>
-              <a:t>Qwen3-14B</a:t>
-            </a:r>
-          </a:p>
-        </p:txBody>
-      </p:sp>
-      <p:sp>
-        <p:nvSpPr>
-          <p:cNvPr id="94" name="TextBox 93"/>
-          <p:cNvSpPr txBox="1"/>
-          <p:nvPr/>
-        </p:nvSpPr>
-        <p:spPr>
-          <a:xfrm>
-            <a:off x="36583315" y="27842464"/>
-            <a:ext cx="2227478" cy="365760"/>
-          </a:xfrm>
-          <a:prstGeom prst="rect">
-            <a:avLst/>
-          </a:prstGeom>
-          <a:noFill/>
-        </p:spPr>
-        <p:txBody>
-          <a:bodyPr wrap="square" lIns="0" rIns="0" tIns="0" bIns="0">
-            <a:spAutoFit/>
-          </a:bodyPr>
-          <a:lstStyle/>
-          <a:p>
-            <a:pPr algn="r">
-              <a:lnSpc>
-                <a:spcPct val="100000"/>
-              </a:lnSpc>
-              <a:spcAft>
-                <a:spcPts val="0"/>
-              </a:spcAft>
-            </a:pPr>
-            <a:r>
-              <a:rPr sz="1700" b="0">
-                <a:solidFill>
-                  <a:srgbClr val="1E293B"/>
-                </a:solidFill>
-                <a:latin typeface="Arial"/>
-              </a:rPr>
-              <a:t>0.675</a:t>
-            </a:r>
-          </a:p>
-        </p:txBody>
-      </p:sp>
-      <p:sp>
-        <p:nvSpPr>
-          <p:cNvPr id="95" name="TextBox 94"/>
-          <p:cNvSpPr txBox="1"/>
-          <p:nvPr/>
-        </p:nvSpPr>
-        <p:spPr>
-          <a:xfrm>
-            <a:off x="38810793" y="27842464"/>
-            <a:ext cx="2227478" cy="365760"/>
-          </a:xfrm>
-          <a:prstGeom prst="rect">
-            <a:avLst/>
-          </a:prstGeom>
-          <a:noFill/>
-        </p:spPr>
-        <p:txBody>
-          <a:bodyPr wrap="square" lIns="0" rIns="0" tIns="0" bIns="0">
-            <a:spAutoFit/>
-          </a:bodyPr>
-          <a:lstStyle/>
-          <a:p>
-            <a:pPr algn="r">
-              <a:lnSpc>
-                <a:spcPct val="100000"/>
-              </a:lnSpc>
-              <a:spcAft>
-                <a:spcPts val="0"/>
-              </a:spcAft>
-            </a:pPr>
-            <a:r>
-              <a:rPr sz="1700" b="0">
-                <a:solidFill>
-                  <a:srgbClr val="1E293B"/>
-                </a:solidFill>
-                <a:latin typeface="Arial"/>
-              </a:rPr>
-              <a:t>0.614</a:t>
-            </a:r>
-          </a:p>
-        </p:txBody>
-      </p:sp>
-      <p:sp>
-        <p:nvSpPr>
-          <p:cNvPr id="96" name="TextBox 95"/>
-          <p:cNvSpPr txBox="1"/>
-          <p:nvPr/>
-        </p:nvSpPr>
-        <p:spPr>
-          <a:xfrm>
-            <a:off x="41038272" y="27842464"/>
-            <a:ext cx="2121408" cy="365760"/>
-          </a:xfrm>
-          <a:prstGeom prst="rect">
-            <a:avLst/>
-          </a:prstGeom>
-          <a:noFill/>
-        </p:spPr>
-        <p:txBody>
-          <a:bodyPr wrap="square" lIns="0" rIns="0" tIns="0" bIns="0">
-            <a:spAutoFit/>
-          </a:bodyPr>
-          <a:lstStyle/>
-          <a:p>
-            <a:pPr algn="r">
-              <a:lnSpc>
-                <a:spcPct val="100000"/>
-              </a:lnSpc>
-              <a:spcAft>
-                <a:spcPts val="0"/>
-              </a:spcAft>
-            </a:pPr>
-            <a:r>
-              <a:rPr sz="1700" b="0">
-                <a:solidFill>
-                  <a:srgbClr val="1E293B"/>
-                </a:solidFill>
-                <a:latin typeface="Arial"/>
-              </a:rPr>
-              <a:t>114</a:t>
-            </a:r>
-          </a:p>
-        </p:txBody>
-      </p:sp>
-      <p:sp>
-        <p:nvSpPr>
-          <p:cNvPr id="97" name="TextBox 96"/>
-          <p:cNvSpPr txBox="1"/>
-          <p:nvPr/>
-        </p:nvSpPr>
-        <p:spPr>
-          <a:xfrm>
-            <a:off x="32552640" y="28244800"/>
-            <a:ext cx="4030675" cy="365760"/>
-          </a:xfrm>
-          <a:prstGeom prst="rect">
-            <a:avLst/>
-          </a:prstGeom>
-          <a:noFill/>
-        </p:spPr>
-        <p:txBody>
-          <a:bodyPr wrap="square" lIns="0" rIns="0" tIns="0" bIns="0">
-            <a:spAutoFit/>
-          </a:bodyPr>
-          <a:lstStyle/>
-          <a:p>
-            <a:pPr algn="l">
-              <a:lnSpc>
-                <a:spcPct val="100000"/>
-              </a:lnSpc>
-              <a:spcAft>
-                <a:spcPts val="0"/>
-              </a:spcAft>
-            </a:pPr>
-            <a:r>
-              <a:rPr sz="1700" b="0">
-                <a:solidFill>
-                  <a:srgbClr val="1E293B"/>
-                </a:solidFill>
-                <a:latin typeface="Arial"/>
-              </a:rPr>
-              <a:t>Qwen3.8-27B</a:t>
-            </a:r>
-          </a:p>
-        </p:txBody>
-      </p:sp>
-      <p:sp>
-        <p:nvSpPr>
-          <p:cNvPr id="98" name="TextBox 97"/>
-          <p:cNvSpPr txBox="1"/>
-          <p:nvPr/>
-        </p:nvSpPr>
-        <p:spPr>
-          <a:xfrm>
-            <a:off x="36583315" y="28244800"/>
-            <a:ext cx="2227478" cy="365760"/>
-          </a:xfrm>
-          <a:prstGeom prst="rect">
-            <a:avLst/>
-          </a:prstGeom>
-          <a:noFill/>
-        </p:spPr>
-        <p:txBody>
-          <a:bodyPr wrap="square" lIns="0" rIns="0" tIns="0" bIns="0">
-            <a:spAutoFit/>
-          </a:bodyPr>
-          <a:lstStyle/>
-          <a:p>
-            <a:pPr algn="r">
-              <a:lnSpc>
-                <a:spcPct val="100000"/>
-              </a:lnSpc>
-              <a:spcAft>
-                <a:spcPts val="0"/>
-              </a:spcAft>
-            </a:pPr>
-            <a:r>
-              <a:rPr sz="1700" b="0">
-                <a:solidFill>
-                  <a:srgbClr val="1E293B"/>
-                </a:solidFill>
-                <a:latin typeface="Arial"/>
-              </a:rPr>
-              <a:t>0.702</a:t>
-            </a:r>
-          </a:p>
-        </p:txBody>
-      </p:sp>
-      <p:sp>
-        <p:nvSpPr>
-          <p:cNvPr id="99" name="TextBox 98"/>
-          <p:cNvSpPr txBox="1"/>
-          <p:nvPr/>
-        </p:nvSpPr>
-        <p:spPr>
-          <a:xfrm>
-            <a:off x="38810793" y="28244800"/>
-            <a:ext cx="2227478" cy="365760"/>
-          </a:xfrm>
-          <a:prstGeom prst="rect">
-            <a:avLst/>
-          </a:prstGeom>
-          <a:noFill/>
-        </p:spPr>
-        <p:txBody>
-          <a:bodyPr wrap="square" lIns="0" rIns="0" tIns="0" bIns="0">
-            <a:spAutoFit/>
-          </a:bodyPr>
-          <a:lstStyle/>
-          <a:p>
-            <a:pPr algn="r">
-              <a:lnSpc>
-                <a:spcPct val="100000"/>
-              </a:lnSpc>
-              <a:spcAft>
-                <a:spcPts val="0"/>
-              </a:spcAft>
-            </a:pPr>
-            <a:r>
-              <a:rPr sz="1700" b="0">
-                <a:solidFill>
-                  <a:srgbClr val="1E293B"/>
-                </a:solidFill>
-                <a:latin typeface="Arial"/>
-              </a:rPr>
-              <a:t>0.702</a:t>
-            </a:r>
-          </a:p>
-        </p:txBody>
-      </p:sp>
-      <p:sp>
-        <p:nvSpPr>
-          <p:cNvPr id="100" name="TextBox 99"/>
-          <p:cNvSpPr txBox="1"/>
-          <p:nvPr/>
-        </p:nvSpPr>
-        <p:spPr>
-          <a:xfrm>
-            <a:off x="41038272" y="28244800"/>
-            <a:ext cx="2121408" cy="365760"/>
-          </a:xfrm>
-          <a:prstGeom prst="rect">
-            <a:avLst/>
-          </a:prstGeom>
-          <a:noFill/>
-        </p:spPr>
-        <p:txBody>
-          <a:bodyPr wrap="square" lIns="0" rIns="0" tIns="0" bIns="0">
-            <a:spAutoFit/>
-          </a:bodyPr>
-          <a:lstStyle/>
-          <a:p>
-            <a:pPr algn="r">
-              <a:lnSpc>
-                <a:spcPct val="100000"/>
-              </a:lnSpc>
-              <a:spcAft>
-                <a:spcPts val="0"/>
-              </a:spcAft>
-            </a:pPr>
-            <a:r>
-              <a:rPr sz="1700" b="0">
-                <a:solidFill>
-                  <a:srgbClr val="1E293B"/>
-                </a:solidFill>
-                <a:latin typeface="Arial"/>
-              </a:rPr>
-              <a:t>57</a:t>
-            </a:r>
-          </a:p>
-        </p:txBody>
-      </p:sp>
-      <p:sp>
-        <p:nvSpPr>
-          <p:cNvPr id="101" name="Rectangle 100"/>
+              <a:t>incidents</a:t>
+            </a:r>
+          </a:p>
+        </p:txBody>
+      </p:sp>
+      <p:sp>
+        <p:nvSpPr>
+          <p:cNvPr id="81" name="Rectangle 80"/>
           <p:cNvSpPr/>
           <p:nvPr/>
         </p:nvSpPr>
         <p:spPr>
           <a:xfrm>
-            <a:off x="32552640" y="28674568"/>
-            <a:ext cx="10607040" cy="23774"/>
+            <a:off x="32552640" y="26514551"/>
+            <a:ext cx="10607040" cy="14630"/>
           </a:xfrm>
           <a:prstGeom prst="rect">
             <a:avLst/>
           </a:prstGeom>
           <a:solidFill>
-            <a:srgbClr val="1E293B"/>
+            <a:srgbClr val="C2CEDA"/>
           </a:solidFill>
           <a:ln>
             <a:noFill/>
@@ -7214,14 +6374,14 @@
       </p:sp>
       <p:sp>
         <p:nvSpPr>
-          <p:cNvPr id="102" name="TextBox 101"/>
-          <p:cNvSpPr txBox="1"/>
-          <p:nvPr/>
-        </p:nvSpPr>
-        <p:spPr>
-          <a:xfrm>
-            <a:off x="32552640" y="28939744"/>
-            <a:ext cx="10607040" cy="365760"/>
+          <p:cNvPr id="82" name="TextBox 81"/>
+          <p:cNvSpPr txBox="1"/>
+          <p:nvPr/>
+        </p:nvSpPr>
+        <p:spPr>
+          <a:xfrm>
+            <a:off x="32552640" y="26624279"/>
+            <a:ext cx="4030675" cy="365760"/>
           </a:xfrm>
           <a:prstGeom prst="rect">
             <a:avLst/>
@@ -7236,40 +6396,838 @@
           <a:p>
             <a:pPr algn="l">
               <a:lnSpc>
-                <a:spcPct val="122000"/>
-              </a:lnSpc>
-              <a:spcAft>
-                <a:spcPts val="1200"/>
-              </a:spcAft>
-            </a:pPr>
-            <a:r>
-              <a:rPr sz="1600" b="0">
-                <a:solidFill>
-                  <a:srgbClr val="556575"/>
-                </a:solidFill>
-                <a:latin typeface="Arial"/>
-              </a:rPr>
-              <a:t>162 real failures out of this project's own record, frozen as a corpus. The watchdog the loop was running returned no decision on any of the 149 dev cases. Recall does not order the reviewers by size; evidence does.</a:t>
-            </a:r>
-          </a:p>
-        </p:txBody>
-      </p:sp>
-      <p:sp>
-        <p:nvSpPr>
-          <p:cNvPr id="103" name="Rectangle 102"/>
+                <a:spcPct val="100000"/>
+              </a:lnSpc>
+              <a:spcAft>
+                <a:spcPts val="0"/>
+              </a:spcAft>
+            </a:pPr>
+            <a:r>
+              <a:rPr sz="1700" b="0">
+                <a:solidFill>
+                  <a:srgbClr val="1E293B"/>
+                </a:solidFill>
+                <a:latin typeface="Arial"/>
+              </a:rPr>
+              <a:t>scripted watchdog</a:t>
+            </a:r>
+          </a:p>
+        </p:txBody>
+      </p:sp>
+      <p:sp>
+        <p:nvSpPr>
+          <p:cNvPr id="83" name="TextBox 82"/>
+          <p:cNvSpPr txBox="1"/>
+          <p:nvPr/>
+        </p:nvSpPr>
+        <p:spPr>
+          <a:xfrm>
+            <a:off x="36583315" y="26624279"/>
+            <a:ext cx="2227478" cy="365760"/>
+          </a:xfrm>
+          <a:prstGeom prst="rect">
+            <a:avLst/>
+          </a:prstGeom>
+          <a:noFill/>
+        </p:spPr>
+        <p:txBody>
+          <a:bodyPr wrap="square" lIns="0" rIns="0" tIns="0" bIns="0">
+            <a:spAutoFit/>
+          </a:bodyPr>
+          <a:lstStyle/>
+          <a:p>
+            <a:pPr algn="r">
+              <a:lnSpc>
+                <a:spcPct val="100000"/>
+              </a:lnSpc>
+              <a:spcAft>
+                <a:spcPts val="0"/>
+              </a:spcAft>
+            </a:pPr>
+            <a:r>
+              <a:rPr sz="1700" b="0">
+                <a:solidFill>
+                  <a:srgbClr val="1E293B"/>
+                </a:solidFill>
+                <a:latin typeface="Arial"/>
+              </a:rPr>
+              <a:t>no decision</a:t>
+            </a:r>
+          </a:p>
+        </p:txBody>
+      </p:sp>
+      <p:sp>
+        <p:nvSpPr>
+          <p:cNvPr id="84" name="TextBox 83"/>
+          <p:cNvSpPr txBox="1"/>
+          <p:nvPr/>
+        </p:nvSpPr>
+        <p:spPr>
+          <a:xfrm>
+            <a:off x="38810793" y="26624279"/>
+            <a:ext cx="2227478" cy="365760"/>
+          </a:xfrm>
+          <a:prstGeom prst="rect">
+            <a:avLst/>
+          </a:prstGeom>
+          <a:noFill/>
+        </p:spPr>
+        <p:txBody>
+          <a:bodyPr wrap="square" lIns="0" rIns="0" tIns="0" bIns="0">
+            <a:spAutoFit/>
+          </a:bodyPr>
+          <a:lstStyle/>
+          <a:p>
+            <a:pPr algn="r">
+              <a:lnSpc>
+                <a:spcPct val="100000"/>
+              </a:lnSpc>
+              <a:spcAft>
+                <a:spcPts val="0"/>
+              </a:spcAft>
+            </a:pPr>
+            <a:r>
+              <a:rPr sz="1700" b="0">
+                <a:solidFill>
+                  <a:srgbClr val="1E293B"/>
+                </a:solidFill>
+                <a:latin typeface="Arial"/>
+              </a:rPr>
+              <a:t>—</a:t>
+            </a:r>
+          </a:p>
+        </p:txBody>
+      </p:sp>
+      <p:sp>
+        <p:nvSpPr>
+          <p:cNvPr id="85" name="TextBox 84"/>
+          <p:cNvSpPr txBox="1"/>
+          <p:nvPr/>
+        </p:nvSpPr>
+        <p:spPr>
+          <a:xfrm>
+            <a:off x="41038272" y="26624279"/>
+            <a:ext cx="2121408" cy="365760"/>
+          </a:xfrm>
+          <a:prstGeom prst="rect">
+            <a:avLst/>
+          </a:prstGeom>
+          <a:noFill/>
+        </p:spPr>
+        <p:txBody>
+          <a:bodyPr wrap="square" lIns="0" rIns="0" tIns="0" bIns="0">
+            <a:spAutoFit/>
+          </a:bodyPr>
+          <a:lstStyle/>
+          <a:p>
+            <a:pPr algn="r">
+              <a:lnSpc>
+                <a:spcPct val="100000"/>
+              </a:lnSpc>
+              <a:spcAft>
+                <a:spcPts val="0"/>
+              </a:spcAft>
+            </a:pPr>
+            <a:r>
+              <a:rPr sz="1700" b="0">
+                <a:solidFill>
+                  <a:srgbClr val="1E293B"/>
+                </a:solidFill>
+                <a:latin typeface="Arial"/>
+              </a:rPr>
+              <a:t>—</a:t>
+            </a:r>
+          </a:p>
+        </p:txBody>
+      </p:sp>
+      <p:sp>
+        <p:nvSpPr>
+          <p:cNvPr id="86" name="TextBox 85"/>
+          <p:cNvSpPr txBox="1"/>
+          <p:nvPr/>
+        </p:nvSpPr>
+        <p:spPr>
+          <a:xfrm>
+            <a:off x="32552640" y="27026615"/>
+            <a:ext cx="4030675" cy="365760"/>
+          </a:xfrm>
+          <a:prstGeom prst="rect">
+            <a:avLst/>
+          </a:prstGeom>
+          <a:noFill/>
+        </p:spPr>
+        <p:txBody>
+          <a:bodyPr wrap="square" lIns="0" rIns="0" tIns="0" bIns="0">
+            <a:spAutoFit/>
+          </a:bodyPr>
+          <a:lstStyle/>
+          <a:p>
+            <a:pPr algn="l">
+              <a:lnSpc>
+                <a:spcPct val="100000"/>
+              </a:lnSpc>
+              <a:spcAft>
+                <a:spcPts val="0"/>
+              </a:spcAft>
+            </a:pPr>
+            <a:r>
+              <a:rPr sz="1700" b="0">
+                <a:solidFill>
+                  <a:srgbClr val="1E293B"/>
+                </a:solidFill>
+                <a:latin typeface="Arial"/>
+              </a:rPr>
+              <a:t>12 rules</a:t>
+            </a:r>
+          </a:p>
+        </p:txBody>
+      </p:sp>
+      <p:sp>
+        <p:nvSpPr>
+          <p:cNvPr id="87" name="TextBox 86"/>
+          <p:cNvSpPr txBox="1"/>
+          <p:nvPr/>
+        </p:nvSpPr>
+        <p:spPr>
+          <a:xfrm>
+            <a:off x="36583315" y="27026615"/>
+            <a:ext cx="2227478" cy="365760"/>
+          </a:xfrm>
+          <a:prstGeom prst="rect">
+            <a:avLst/>
+          </a:prstGeom>
+          <a:noFill/>
+        </p:spPr>
+        <p:txBody>
+          <a:bodyPr wrap="square" lIns="0" rIns="0" tIns="0" bIns="0">
+            <a:spAutoFit/>
+          </a:bodyPr>
+          <a:lstStyle/>
+          <a:p>
+            <a:pPr algn="r">
+              <a:lnSpc>
+                <a:spcPct val="100000"/>
+              </a:lnSpc>
+              <a:spcAft>
+                <a:spcPts val="0"/>
+              </a:spcAft>
+            </a:pPr>
+            <a:r>
+              <a:rPr sz="1700" b="0">
+                <a:solidFill>
+                  <a:srgbClr val="1E293B"/>
+                </a:solidFill>
+                <a:latin typeface="Arial"/>
+              </a:rPr>
+              <a:t>0.095</a:t>
+            </a:r>
+          </a:p>
+        </p:txBody>
+      </p:sp>
+      <p:sp>
+        <p:nvSpPr>
+          <p:cNvPr id="88" name="TextBox 87"/>
+          <p:cNvSpPr txBox="1"/>
+          <p:nvPr/>
+        </p:nvSpPr>
+        <p:spPr>
+          <a:xfrm>
+            <a:off x="38810793" y="27026615"/>
+            <a:ext cx="2227478" cy="365760"/>
+          </a:xfrm>
+          <a:prstGeom prst="rect">
+            <a:avLst/>
+          </a:prstGeom>
+          <a:noFill/>
+        </p:spPr>
+        <p:txBody>
+          <a:bodyPr wrap="square" lIns="0" rIns="0" tIns="0" bIns="0">
+            <a:spAutoFit/>
+          </a:bodyPr>
+          <a:lstStyle/>
+          <a:p>
+            <a:pPr algn="r">
+              <a:lnSpc>
+                <a:spcPct val="100000"/>
+              </a:lnSpc>
+              <a:spcAft>
+                <a:spcPts val="0"/>
+              </a:spcAft>
+            </a:pPr>
+            <a:r>
+              <a:rPr sz="1700" b="0">
+                <a:solidFill>
+                  <a:srgbClr val="1E293B"/>
+                </a:solidFill>
+                <a:latin typeface="Arial"/>
+              </a:rPr>
+              <a:t>0.095</a:t>
+            </a:r>
+          </a:p>
+        </p:txBody>
+      </p:sp>
+      <p:sp>
+        <p:nvSpPr>
+          <p:cNvPr id="89" name="TextBox 88"/>
+          <p:cNvSpPr txBox="1"/>
+          <p:nvPr/>
+        </p:nvSpPr>
+        <p:spPr>
+          <a:xfrm>
+            <a:off x="41038272" y="27026615"/>
+            <a:ext cx="2121408" cy="365760"/>
+          </a:xfrm>
+          <a:prstGeom prst="rect">
+            <a:avLst/>
+          </a:prstGeom>
+          <a:noFill/>
+        </p:spPr>
+        <p:txBody>
+          <a:bodyPr wrap="square" lIns="0" rIns="0" tIns="0" bIns="0">
+            <a:spAutoFit/>
+          </a:bodyPr>
+          <a:lstStyle/>
+          <a:p>
+            <a:pPr algn="r">
+              <a:lnSpc>
+                <a:spcPct val="100000"/>
+              </a:lnSpc>
+              <a:spcAft>
+                <a:spcPts val="0"/>
+              </a:spcAft>
+            </a:pPr>
+            <a:r>
+              <a:rPr sz="1700" b="0">
+                <a:solidFill>
+                  <a:srgbClr val="1E293B"/>
+                </a:solidFill>
+                <a:latin typeface="Arial"/>
+              </a:rPr>
+              <a:t>116</a:t>
+            </a:r>
+          </a:p>
+        </p:txBody>
+      </p:sp>
+      <p:sp>
+        <p:nvSpPr>
+          <p:cNvPr id="90" name="TextBox 89"/>
+          <p:cNvSpPr txBox="1"/>
+          <p:nvPr/>
+        </p:nvSpPr>
+        <p:spPr>
+          <a:xfrm>
+            <a:off x="32552640" y="27428951"/>
+            <a:ext cx="4030675" cy="365760"/>
+          </a:xfrm>
+          <a:prstGeom prst="rect">
+            <a:avLst/>
+          </a:prstGeom>
+          <a:noFill/>
+        </p:spPr>
+        <p:txBody>
+          <a:bodyPr wrap="square" lIns="0" rIns="0" tIns="0" bIns="0">
+            <a:spAutoFit/>
+          </a:bodyPr>
+          <a:lstStyle/>
+          <a:p>
+            <a:pPr algn="l">
+              <a:lnSpc>
+                <a:spcPct val="100000"/>
+              </a:lnSpc>
+              <a:spcAft>
+                <a:spcPts val="0"/>
+              </a:spcAft>
+            </a:pPr>
+            <a:r>
+              <a:rPr sz="1700" b="0">
+                <a:solidFill>
+                  <a:srgbClr val="1E293B"/>
+                </a:solidFill>
+                <a:latin typeface="Arial"/>
+              </a:rPr>
+              <a:t>Qwen2.5-7B</a:t>
+            </a:r>
+          </a:p>
+        </p:txBody>
+      </p:sp>
+      <p:sp>
+        <p:nvSpPr>
+          <p:cNvPr id="91" name="TextBox 90"/>
+          <p:cNvSpPr txBox="1"/>
+          <p:nvPr/>
+        </p:nvSpPr>
+        <p:spPr>
+          <a:xfrm>
+            <a:off x="36583315" y="27428951"/>
+            <a:ext cx="2227478" cy="365760"/>
+          </a:xfrm>
+          <a:prstGeom prst="rect">
+            <a:avLst/>
+          </a:prstGeom>
+          <a:noFill/>
+        </p:spPr>
+        <p:txBody>
+          <a:bodyPr wrap="square" lIns="0" rIns="0" tIns="0" bIns="0">
+            <a:spAutoFit/>
+          </a:bodyPr>
+          <a:lstStyle/>
+          <a:p>
+            <a:pPr algn="r">
+              <a:lnSpc>
+                <a:spcPct val="100000"/>
+              </a:lnSpc>
+              <a:spcAft>
+                <a:spcPts val="0"/>
+              </a:spcAft>
+            </a:pPr>
+            <a:r>
+              <a:rPr sz="1700" b="0">
+                <a:solidFill>
+                  <a:srgbClr val="1E293B"/>
+                </a:solidFill>
+                <a:latin typeface="Arial"/>
+              </a:rPr>
+              <a:t>0.823</a:t>
+            </a:r>
+          </a:p>
+        </p:txBody>
+      </p:sp>
+      <p:sp>
+        <p:nvSpPr>
+          <p:cNvPr id="92" name="TextBox 91"/>
+          <p:cNvSpPr txBox="1"/>
+          <p:nvPr/>
+        </p:nvSpPr>
+        <p:spPr>
+          <a:xfrm>
+            <a:off x="38810793" y="27428951"/>
+            <a:ext cx="2227478" cy="365760"/>
+          </a:xfrm>
+          <a:prstGeom prst="rect">
+            <a:avLst/>
+          </a:prstGeom>
+          <a:noFill/>
+        </p:spPr>
+        <p:txBody>
+          <a:bodyPr wrap="square" lIns="0" rIns="0" tIns="0" bIns="0">
+            <a:spAutoFit/>
+          </a:bodyPr>
+          <a:lstStyle/>
+          <a:p>
+            <a:pPr algn="r">
+              <a:lnSpc>
+                <a:spcPct val="100000"/>
+              </a:lnSpc>
+              <a:spcAft>
+                <a:spcPts val="0"/>
+              </a:spcAft>
+            </a:pPr>
+            <a:r>
+              <a:rPr sz="1700" b="0">
+                <a:solidFill>
+                  <a:srgbClr val="1E293B"/>
+                </a:solidFill>
+                <a:latin typeface="Arial"/>
+              </a:rPr>
+              <a:t>0.274</a:t>
+            </a:r>
+          </a:p>
+        </p:txBody>
+      </p:sp>
+      <p:sp>
+        <p:nvSpPr>
+          <p:cNvPr id="93" name="TextBox 92"/>
+          <p:cNvSpPr txBox="1"/>
+          <p:nvPr/>
+        </p:nvSpPr>
+        <p:spPr>
+          <a:xfrm>
+            <a:off x="41038272" y="27428951"/>
+            <a:ext cx="2121408" cy="365760"/>
+          </a:xfrm>
+          <a:prstGeom prst="rect">
+            <a:avLst/>
+          </a:prstGeom>
+          <a:noFill/>
+        </p:spPr>
+        <p:txBody>
+          <a:bodyPr wrap="square" lIns="0" rIns="0" tIns="0" bIns="0">
+            <a:spAutoFit/>
+          </a:bodyPr>
+          <a:lstStyle/>
+          <a:p>
+            <a:pPr algn="r">
+              <a:lnSpc>
+                <a:spcPct val="100000"/>
+              </a:lnSpc>
+              <a:spcAft>
+                <a:spcPts val="0"/>
+              </a:spcAft>
+            </a:pPr>
+            <a:r>
+              <a:rPr sz="1700" b="0">
+                <a:solidFill>
+                  <a:srgbClr val="1E293B"/>
+                </a:solidFill>
+                <a:latin typeface="Arial"/>
+              </a:rPr>
+              <a:t>113</a:t>
+            </a:r>
+          </a:p>
+        </p:txBody>
+      </p:sp>
+      <p:sp>
+        <p:nvSpPr>
+          <p:cNvPr id="94" name="TextBox 93"/>
+          <p:cNvSpPr txBox="1"/>
+          <p:nvPr/>
+        </p:nvSpPr>
+        <p:spPr>
+          <a:xfrm>
+            <a:off x="32552640" y="27831287"/>
+            <a:ext cx="4030675" cy="365760"/>
+          </a:xfrm>
+          <a:prstGeom prst="rect">
+            <a:avLst/>
+          </a:prstGeom>
+          <a:noFill/>
+        </p:spPr>
+        <p:txBody>
+          <a:bodyPr wrap="square" lIns="0" rIns="0" tIns="0" bIns="0">
+            <a:spAutoFit/>
+          </a:bodyPr>
+          <a:lstStyle/>
+          <a:p>
+            <a:pPr algn="l">
+              <a:lnSpc>
+                <a:spcPct val="100000"/>
+              </a:lnSpc>
+              <a:spcAft>
+                <a:spcPts val="0"/>
+              </a:spcAft>
+            </a:pPr>
+            <a:r>
+              <a:rPr sz="1700" b="0">
+                <a:solidFill>
+                  <a:srgbClr val="1E293B"/>
+                </a:solidFill>
+                <a:latin typeface="Arial"/>
+              </a:rPr>
+              <a:t>Qwen3-14B</a:t>
+            </a:r>
+          </a:p>
+        </p:txBody>
+      </p:sp>
+      <p:sp>
+        <p:nvSpPr>
+          <p:cNvPr id="95" name="TextBox 94"/>
+          <p:cNvSpPr txBox="1"/>
+          <p:nvPr/>
+        </p:nvSpPr>
+        <p:spPr>
+          <a:xfrm>
+            <a:off x="36583315" y="27831287"/>
+            <a:ext cx="2227478" cy="365760"/>
+          </a:xfrm>
+          <a:prstGeom prst="rect">
+            <a:avLst/>
+          </a:prstGeom>
+          <a:noFill/>
+        </p:spPr>
+        <p:txBody>
+          <a:bodyPr wrap="square" lIns="0" rIns="0" tIns="0" bIns="0">
+            <a:spAutoFit/>
+          </a:bodyPr>
+          <a:lstStyle/>
+          <a:p>
+            <a:pPr algn="r">
+              <a:lnSpc>
+                <a:spcPct val="100000"/>
+              </a:lnSpc>
+              <a:spcAft>
+                <a:spcPts val="0"/>
+              </a:spcAft>
+            </a:pPr>
+            <a:r>
+              <a:rPr sz="1700" b="0">
+                <a:solidFill>
+                  <a:srgbClr val="1E293B"/>
+                </a:solidFill>
+                <a:latin typeface="Arial"/>
+              </a:rPr>
+              <a:t>0.675</a:t>
+            </a:r>
+          </a:p>
+        </p:txBody>
+      </p:sp>
+      <p:sp>
+        <p:nvSpPr>
+          <p:cNvPr id="96" name="TextBox 95"/>
+          <p:cNvSpPr txBox="1"/>
+          <p:nvPr/>
+        </p:nvSpPr>
+        <p:spPr>
+          <a:xfrm>
+            <a:off x="38810793" y="27831287"/>
+            <a:ext cx="2227478" cy="365760"/>
+          </a:xfrm>
+          <a:prstGeom prst="rect">
+            <a:avLst/>
+          </a:prstGeom>
+          <a:noFill/>
+        </p:spPr>
+        <p:txBody>
+          <a:bodyPr wrap="square" lIns="0" rIns="0" tIns="0" bIns="0">
+            <a:spAutoFit/>
+          </a:bodyPr>
+          <a:lstStyle/>
+          <a:p>
+            <a:pPr algn="r">
+              <a:lnSpc>
+                <a:spcPct val="100000"/>
+              </a:lnSpc>
+              <a:spcAft>
+                <a:spcPts val="0"/>
+              </a:spcAft>
+            </a:pPr>
+            <a:r>
+              <a:rPr sz="1700" b="0">
+                <a:solidFill>
+                  <a:srgbClr val="1E293B"/>
+                </a:solidFill>
+                <a:latin typeface="Arial"/>
+              </a:rPr>
+              <a:t>0.614</a:t>
+            </a:r>
+          </a:p>
+        </p:txBody>
+      </p:sp>
+      <p:sp>
+        <p:nvSpPr>
+          <p:cNvPr id="97" name="TextBox 96"/>
+          <p:cNvSpPr txBox="1"/>
+          <p:nvPr/>
+        </p:nvSpPr>
+        <p:spPr>
+          <a:xfrm>
+            <a:off x="41038272" y="27831287"/>
+            <a:ext cx="2121408" cy="365760"/>
+          </a:xfrm>
+          <a:prstGeom prst="rect">
+            <a:avLst/>
+          </a:prstGeom>
+          <a:noFill/>
+        </p:spPr>
+        <p:txBody>
+          <a:bodyPr wrap="square" lIns="0" rIns="0" tIns="0" bIns="0">
+            <a:spAutoFit/>
+          </a:bodyPr>
+          <a:lstStyle/>
+          <a:p>
+            <a:pPr algn="r">
+              <a:lnSpc>
+                <a:spcPct val="100000"/>
+              </a:lnSpc>
+              <a:spcAft>
+                <a:spcPts val="0"/>
+              </a:spcAft>
+            </a:pPr>
+            <a:r>
+              <a:rPr sz="1700" b="0">
+                <a:solidFill>
+                  <a:srgbClr val="1E293B"/>
+                </a:solidFill>
+                <a:latin typeface="Arial"/>
+              </a:rPr>
+              <a:t>114</a:t>
+            </a:r>
+          </a:p>
+        </p:txBody>
+      </p:sp>
+      <p:sp>
+        <p:nvSpPr>
+          <p:cNvPr id="98" name="TextBox 97"/>
+          <p:cNvSpPr txBox="1"/>
+          <p:nvPr/>
+        </p:nvSpPr>
+        <p:spPr>
+          <a:xfrm>
+            <a:off x="32552640" y="28233624"/>
+            <a:ext cx="4030675" cy="365760"/>
+          </a:xfrm>
+          <a:prstGeom prst="rect">
+            <a:avLst/>
+          </a:prstGeom>
+          <a:noFill/>
+        </p:spPr>
+        <p:txBody>
+          <a:bodyPr wrap="square" lIns="0" rIns="0" tIns="0" bIns="0">
+            <a:spAutoFit/>
+          </a:bodyPr>
+          <a:lstStyle/>
+          <a:p>
+            <a:pPr algn="l">
+              <a:lnSpc>
+                <a:spcPct val="100000"/>
+              </a:lnSpc>
+              <a:spcAft>
+                <a:spcPts val="0"/>
+              </a:spcAft>
+            </a:pPr>
+            <a:r>
+              <a:rPr sz="1700" b="0">
+                <a:solidFill>
+                  <a:srgbClr val="1E293B"/>
+                </a:solidFill>
+                <a:latin typeface="Arial"/>
+              </a:rPr>
+              <a:t>Qwen3.8-27B</a:t>
+            </a:r>
+          </a:p>
+        </p:txBody>
+      </p:sp>
+      <p:sp>
+        <p:nvSpPr>
+          <p:cNvPr id="99" name="TextBox 98"/>
+          <p:cNvSpPr txBox="1"/>
+          <p:nvPr/>
+        </p:nvSpPr>
+        <p:spPr>
+          <a:xfrm>
+            <a:off x="36583315" y="28233624"/>
+            <a:ext cx="2227478" cy="365760"/>
+          </a:xfrm>
+          <a:prstGeom prst="rect">
+            <a:avLst/>
+          </a:prstGeom>
+          <a:noFill/>
+        </p:spPr>
+        <p:txBody>
+          <a:bodyPr wrap="square" lIns="0" rIns="0" tIns="0" bIns="0">
+            <a:spAutoFit/>
+          </a:bodyPr>
+          <a:lstStyle/>
+          <a:p>
+            <a:pPr algn="r">
+              <a:lnSpc>
+                <a:spcPct val="100000"/>
+              </a:lnSpc>
+              <a:spcAft>
+                <a:spcPts val="0"/>
+              </a:spcAft>
+            </a:pPr>
+            <a:r>
+              <a:rPr sz="1700" b="0">
+                <a:solidFill>
+                  <a:srgbClr val="1E293B"/>
+                </a:solidFill>
+                <a:latin typeface="Arial"/>
+              </a:rPr>
+              <a:t>0.702</a:t>
+            </a:r>
+          </a:p>
+        </p:txBody>
+      </p:sp>
+      <p:sp>
+        <p:nvSpPr>
+          <p:cNvPr id="100" name="TextBox 99"/>
+          <p:cNvSpPr txBox="1"/>
+          <p:nvPr/>
+        </p:nvSpPr>
+        <p:spPr>
+          <a:xfrm>
+            <a:off x="38810793" y="28233624"/>
+            <a:ext cx="2227478" cy="365760"/>
+          </a:xfrm>
+          <a:prstGeom prst="rect">
+            <a:avLst/>
+          </a:prstGeom>
+          <a:noFill/>
+        </p:spPr>
+        <p:txBody>
+          <a:bodyPr wrap="square" lIns="0" rIns="0" tIns="0" bIns="0">
+            <a:spAutoFit/>
+          </a:bodyPr>
+          <a:lstStyle/>
+          <a:p>
+            <a:pPr algn="r">
+              <a:lnSpc>
+                <a:spcPct val="100000"/>
+              </a:lnSpc>
+              <a:spcAft>
+                <a:spcPts val="0"/>
+              </a:spcAft>
+            </a:pPr>
+            <a:r>
+              <a:rPr sz="1700" b="0">
+                <a:solidFill>
+                  <a:srgbClr val="1E293B"/>
+                </a:solidFill>
+                <a:latin typeface="Arial"/>
+              </a:rPr>
+              <a:t>0.702</a:t>
+            </a:r>
+          </a:p>
+        </p:txBody>
+      </p:sp>
+      <p:sp>
+        <p:nvSpPr>
+          <p:cNvPr id="101" name="TextBox 100"/>
+          <p:cNvSpPr txBox="1"/>
+          <p:nvPr/>
+        </p:nvSpPr>
+        <p:spPr>
+          <a:xfrm>
+            <a:off x="41038272" y="28233624"/>
+            <a:ext cx="2121408" cy="365760"/>
+          </a:xfrm>
+          <a:prstGeom prst="rect">
+            <a:avLst/>
+          </a:prstGeom>
+          <a:noFill/>
+        </p:spPr>
+        <p:txBody>
+          <a:bodyPr wrap="square" lIns="0" rIns="0" tIns="0" bIns="0">
+            <a:spAutoFit/>
+          </a:bodyPr>
+          <a:lstStyle/>
+          <a:p>
+            <a:pPr algn="r">
+              <a:lnSpc>
+                <a:spcPct val="100000"/>
+              </a:lnSpc>
+              <a:spcAft>
+                <a:spcPts val="0"/>
+              </a:spcAft>
+            </a:pPr>
+            <a:r>
+              <a:rPr sz="1700" b="0">
+                <a:solidFill>
+                  <a:srgbClr val="1E293B"/>
+                </a:solidFill>
+                <a:latin typeface="Arial"/>
+              </a:rPr>
+              <a:t>57</a:t>
+            </a:r>
+          </a:p>
+        </p:txBody>
+      </p:sp>
+      <p:sp>
+        <p:nvSpPr>
+          <p:cNvPr id="102" name="Rectangle 101"/>
           <p:cNvSpPr/>
           <p:nvPr/>
         </p:nvSpPr>
         <p:spPr>
           <a:xfrm>
-            <a:off x="731520" y="31176976"/>
-            <a:ext cx="42428160" cy="20116"/>
+            <a:off x="32552640" y="28663392"/>
+            <a:ext cx="10607040" cy="23774"/>
           </a:xfrm>
           <a:prstGeom prst="rect">
             <a:avLst/>
           </a:prstGeom>
           <a:solidFill>
-            <a:srgbClr val="C2CEDA"/>
+            <a:srgbClr val="1E293B"/>
           </a:solidFill>
           <a:ln>
             <a:noFill/>
@@ -7300,13 +7258,99 @@
       </p:sp>
       <p:sp>
         <p:nvSpPr>
-          <p:cNvPr id="104" name="TextBox 103"/>
-          <p:cNvSpPr txBox="1"/>
-          <p:nvPr/>
-        </p:nvSpPr>
-        <p:spPr>
-          <a:xfrm>
-            <a:off x="731520" y="31433008"/>
+          <p:cNvPr id="103" name="TextBox 102"/>
+          <p:cNvSpPr txBox="1"/>
+          <p:nvPr/>
+        </p:nvSpPr>
+        <p:spPr>
+          <a:xfrm>
+            <a:off x="32552640" y="28928568"/>
+            <a:ext cx="10607040" cy="365760"/>
+          </a:xfrm>
+          <a:prstGeom prst="rect">
+            <a:avLst/>
+          </a:prstGeom>
+          <a:noFill/>
+        </p:spPr>
+        <p:txBody>
+          <a:bodyPr wrap="square" lIns="0" rIns="0" tIns="0" bIns="0">
+            <a:spAutoFit/>
+          </a:bodyPr>
+          <a:lstStyle/>
+          <a:p>
+            <a:pPr algn="l">
+              <a:lnSpc>
+                <a:spcPct val="122000"/>
+              </a:lnSpc>
+              <a:spcAft>
+                <a:spcPts val="1200"/>
+              </a:spcAft>
+            </a:pPr>
+            <a:r>
+              <a:rPr sz="1600" b="0">
+                <a:solidFill>
+                  <a:srgbClr val="556575"/>
+                </a:solidFill>
+                <a:latin typeface="Arial"/>
+              </a:rPr>
+              <a:t>162 real failures out of this project's own record, frozen as a corpus. The watchdog the loop was running returned no decision on any of the 149 dev cases. Recall does not order the reviewers by size; evidence does.</a:t>
+            </a:r>
+          </a:p>
+        </p:txBody>
+      </p:sp>
+      <p:sp>
+        <p:nvSpPr>
+          <p:cNvPr id="104" name="Rectangle 103"/>
+          <p:cNvSpPr/>
+          <p:nvPr/>
+        </p:nvSpPr>
+        <p:spPr>
+          <a:xfrm>
+            <a:off x="731520" y="31165799"/>
+            <a:ext cx="42428160" cy="20116"/>
+          </a:xfrm>
+          <a:prstGeom prst="rect">
+            <a:avLst/>
+          </a:prstGeom>
+          <a:solidFill>
+            <a:srgbClr val="C2CEDA"/>
+          </a:solidFill>
+          <a:ln>
+            <a:noFill/>
+          </a:ln>
+          <a:effectLst/>
+        </p:spPr>
+        <p:style>
+          <a:lnRef idx="1">
+            <a:schemeClr val="accent1"/>
+          </a:lnRef>
+          <a:fillRef idx="3">
+            <a:schemeClr val="accent1"/>
+          </a:fillRef>
+          <a:effectRef idx="2">
+            <a:schemeClr val="accent1"/>
+          </a:effectRef>
+          <a:fontRef idx="minor">
+            <a:schemeClr val="lt1"/>
+          </a:fontRef>
+        </p:style>
+        <p:txBody>
+          <a:bodyPr rtlCol="0" anchor="ctr"/>
+          <a:lstStyle/>
+          <a:p>
+            <a:pPr algn="ctr"/>
+          </a:p>
+        </p:txBody>
+      </p:sp>
+      <p:sp>
+        <p:nvSpPr>
+          <p:cNvPr id="105" name="TextBox 104"/>
+          <p:cNvSpPr txBox="1"/>
+          <p:nvPr/>
+        </p:nvSpPr>
+        <p:spPr>
+          <a:xfrm>
+            <a:off x="731520" y="31421831"/>
             <a:ext cx="13837920" cy="365760"/>
           </a:xfrm>
           <a:prstGeom prst="rect">
@@ -7342,13 +7386,13 @@
       </p:sp>
       <p:sp>
         <p:nvSpPr>
-          <p:cNvPr id="105" name="TextBox 104"/>
-          <p:cNvSpPr txBox="1"/>
-          <p:nvPr/>
-        </p:nvSpPr>
-        <p:spPr>
-          <a:xfrm>
-            <a:off x="15026640" y="31433008"/>
+          <p:cNvPr id="106" name="TextBox 105"/>
+          <p:cNvSpPr txBox="1"/>
+          <p:nvPr/>
+        </p:nvSpPr>
+        <p:spPr>
+          <a:xfrm>
+            <a:off x="15026640" y="31421831"/>
             <a:ext cx="13837920" cy="365760"/>
           </a:xfrm>
           <a:prstGeom prst="rect">
@@ -7384,13 +7428,13 @@
       </p:sp>
       <p:sp>
         <p:nvSpPr>
-          <p:cNvPr id="106" name="TextBox 105"/>
-          <p:cNvSpPr txBox="1"/>
-          <p:nvPr/>
-        </p:nvSpPr>
-        <p:spPr>
-          <a:xfrm>
-            <a:off x="29321759" y="31433008"/>
+          <p:cNvPr id="107" name="TextBox 106"/>
+          <p:cNvSpPr txBox="1"/>
+          <p:nvPr/>
+        </p:nvSpPr>
+        <p:spPr>
+          <a:xfrm>
+            <a:off x="29321759" y="31421831"/>
             <a:ext cx="13837920" cy="365760"/>
           </a:xfrm>
           <a:prstGeom prst="rect">
